--- a/public/ideam-seminar.pptx
+++ b/public/ideam-seminar.pptx
@@ -16,9 +16,24 @@
     <p:sldId id="264" r:id="rId10"/>
     <p:sldId id="265" r:id="rId11"/>
     <p:sldId id="266" r:id="rId12"/>
+    <p:sldId id="267" r:id="rId13"/>
+    <p:sldId id="268" r:id="rId14"/>
+    <p:sldId id="269" r:id="rId15"/>
+    <p:sldId id="270" r:id="rId16"/>
+    <p:sldId id="271" r:id="rId17"/>
+    <p:sldId id="272" r:id="rId18"/>
+    <p:sldId id="273" r:id="rId19"/>
+    <p:sldId id="274" r:id="rId20"/>
+    <p:sldId id="275" r:id="rId21"/>
+    <p:sldId id="276" r:id="rId22"/>
+    <p:sldId id="277" r:id="rId23"/>
+    <p:sldId id="278" r:id="rId24"/>
+    <p:sldId id="279" r:id="rId25"/>
+    <p:sldId id="280" r:id="rId26"/>
+    <p:sldId id="281" r:id="rId27"/>
   </p:sldIdLst>
   <p:notesMasterIdLst>
-    <p:notesMasterId r:id="rId13"/>
+    <p:notesMasterId r:id="rId28"/>
   </p:notesMasterIdLst>
   <p:sldSz cx="12192000" cy="6858000"/>
   <p:notesSz cx="6858000" cy="12192000"/>
@@ -176,9 +191,9 @@
           </c:dLbls>
           <c:cat>
             <c:multiLvlStrRef>
-              <c:f>Sheet1!$A$2:$A$3</c:f>
+              <c:f>Sheet1!$A$2:$A$4</c:f>
               <c:multiLvlStrCache>
-                <c:ptCount val="2"/>
+                <c:ptCount val="3"/>
                 <c:lvl>
                   <c:pt idx="0">
                     <c:v>developers now use AI</c:v>
@@ -186,21 +201,27 @@
                   <c:pt idx="1">
                     <c:v>actually trust the…</c:v>
                   </c:pt>
+                  <c:pt idx="2">
+                    <c:v>lose time debugging…</c:v>
+                  </c:pt>
                 </c:lvl>
               </c:multiLvlStrCache>
             </c:multiLvlStrRef>
           </c:cat>
           <c:val>
             <c:numRef>
-              <c:f>Sheet1!$B$2:$B$3</c:f>
+              <c:f>Sheet1!$B$2:$B$4</c:f>
               <c:numCache>
                 <c:formatCode>General</c:formatCode>
-                <c:ptCount val="2"/>
+                <c:ptCount val="3"/>
                 <c:pt idx="0">
                   <c:v>80</c:v>
                 </c:pt>
                 <c:pt idx="1">
                   <c:v>29</c:v>
+                </c:pt>
+                <c:pt idx="2">
+                  <c:v>45</c:v>
                 </c:pt>
               </c:numCache>
             </c:numRef>
@@ -628,6 +649,235 @@
           </c:dLbls>
           <c:cat>
             <c:multiLvlStrRef>
+              <c:f>Sheet1!$A$2:$A$4</c:f>
+              <c:multiLvlStrCache>
+                <c:ptCount val="3"/>
+                <c:lvl>
+                  <c:pt idx="0">
+                    <c:v>developers use AI as</c:v>
+                  </c:pt>
+                  <c:pt idx="1">
+                    <c:v>development is truly…</c:v>
+                  </c:pt>
+                  <c:pt idx="2">
+                    <c:v>frontier</c:v>
+                  </c:pt>
+                </c:lvl>
+              </c:multiLvlStrCache>
+            </c:multiLvlStrRef>
+          </c:cat>
+          <c:val>
+            <c:numRef>
+              <c:f>Sheet1!$B$2:$B$4</c:f>
+              <c:numCache>
+                <c:formatCode>General</c:formatCode>
+                <c:ptCount val="3"/>
+                <c:pt idx="0">
+                  <c:v>80</c:v>
+                </c:pt>
+                <c:pt idx="1">
+                  <c:v>10</c:v>
+                </c:pt>
+                <c:pt idx="2">
+                  <c:v>15</c:v>
+                </c:pt>
+              </c:numCache>
+            </c:numRef>
+          </c:val>
+        </c:ser>
+        <c:dLbls>
+          <c:numFmt formatCode="0&quot;%&quot;" sourceLinked="0"/>
+          <c:txPr>
+            <a:bodyPr/>
+            <a:lstStyle/>
+            <a:p>
+              <a:pPr>
+                <a:defRPr b="0" i="0" strike="noStrike" sz="1200" u="none">
+                  <a:solidFill>
+                    <a:srgbClr val="F5F8FF"/>
+                  </a:solidFill>
+                  <a:latin typeface="IBM Plex Sans"/>
+                </a:defRPr>
+              </a:pPr>
+            </a:p>
+          </c:txPr>
+          <c:showLegendKey val="0"/>
+          <c:showVal val="1"/>
+          <c:showCatName val="0"/>
+          <c:showSerName val="0"/>
+          <c:showPercent val="0"/>
+          <c:showBubbleSize val="0"/>
+          <c:showLeaderLines val="0"/>
+        </c:dLbls>
+        <c:gapWidth val="40"/>
+        <c:overlap val="0"/>
+        <c:axId val="2094734554"/>
+        <c:axId val="2094734552"/>
+        <c:axId val="2094734556"/>
+      </c:barChart>
+      <c:catAx>
+        <c:axId val="2094734554"/>
+        <c:scaling>
+          <c:orientation val="minMax"/>
+        </c:scaling>
+        <c:delete val="0"/>
+        <c:axPos val="b"/>
+        <c:numFmt formatCode="General" sourceLinked="1"/>
+        <c:majorTickMark val="out"/>
+        <c:minorTickMark val="none"/>
+        <c:tickLblPos val="low"/>
+        <c:spPr>
+          <a:ln w="12700" cap="flat">
+            <a:solidFill>
+              <a:srgbClr val="1E2A44"/>
+            </a:solidFill>
+            <a:prstDash val="solid"/>
+            <a:round/>
+          </a:ln>
+        </c:spPr>
+        <c:txPr>
+          <a:bodyPr/>
+          <a:lstStyle/>
+          <a:p>
+            <a:pPr>
+              <a:defRPr sz="1100" b="0" i="0" u="none" strike="noStrike">
+                <a:solidFill>
+                  <a:srgbClr val="93A4B8"/>
+                </a:solidFill>
+                <a:latin typeface="IBM Plex Sans"/>
+              </a:defRPr>
+            </a:pPr>
+            <a:endParaRPr lang="en-US"/>
+          </a:p>
+        </c:txPr>
+        <c:crossAx val="2094734552"/>
+        <c:crosses val="autoZero"/>
+        <c:auto val="1"/>
+        <c:lblAlgn val="ctr"/>
+        <c:noMultiLvlLbl val="1"/>
+      </c:catAx>
+      <c:valAx>
+        <c:axId val="2094734552"/>
+        <c:scaling>
+          <c:orientation val="minMax"/>
+        </c:scaling>
+        <c:delete val="1"/>
+        <c:axPos val="l"/>
+        <c:numFmt formatCode="General" sourceLinked="0"/>
+        <c:majorTickMark val="out"/>
+        <c:minorTickMark val="none"/>
+        <c:tickLblPos val="nextTo"/>
+        <c:spPr>
+          <a:ln w="12700" cap="flat">
+            <a:solidFill>
+              <a:srgbClr val="888888"/>
+            </a:solidFill>
+            <a:prstDash val="solid"/>
+            <a:round/>
+          </a:ln>
+        </c:spPr>
+        <c:txPr>
+          <a:bodyPr/>
+          <a:lstStyle/>
+          <a:p>
+            <a:pPr>
+              <a:defRPr sz="1200" b="0" i="0" u="none" strike="noStrike">
+                <a:solidFill>
+                  <a:srgbClr val="000000"/>
+                </a:solidFill>
+                <a:latin typeface="Arial"/>
+              </a:defRPr>
+            </a:pPr>
+            <a:endParaRPr lang="en-US"/>
+          </a:p>
+        </c:txPr>
+        <c:crossAx val="2094734554"/>
+        <c:crosses val="autoZero"/>
+        <c:crossBetween val="between"/>
+      </c:valAx>
+      <c:spPr>
+        <a:noFill/>
+        <a:ln>
+          <a:noFill/>
+        </a:ln>
+        <a:effectLst/>
+      </c:spPr>
+    </c:plotArea>
+    <c:plotVisOnly val="1"/>
+    <c:dispBlanksAs val="span"/>
+  </c:chart>
+  <c:spPr>
+    <a:noFill/>
+    <a:ln>
+      <a:noFill/>
+    </a:ln>
+    <a:effectLst/>
+  </c:spPr>
+  <c:externalData r:id="rId1">
+    <c:autoUpdate val="0"/>
+  </c:externalData>
+</c:chartSpace>
+</file>
+
+<file path=ppt/charts/chart4.xml><?xml version="1.0" encoding="utf-8"?>
+<c:chartSpace xmlns:c="http://schemas.openxmlformats.org/drawingml/2006/chart" xmlns:a="http://schemas.openxmlformats.org/drawingml/2006/main" xmlns:r="http://schemas.openxmlformats.org/officeDocument/2006/relationships">
+  <c:date1904 val="0"/>
+  <c:roundedCorners val="1"/>
+  <c:chart>
+    <c:autoTitleDeleted val="1"/>
+    <c:plotArea>
+      <c:layout/>
+      <c:barChart>
+        <c:barDir val="col"/>
+        <c:grouping val="clustered"/>
+        <c:varyColors val="0"/>
+        <c:ser>
+          <c:idx val="0"/>
+          <c:order val="0"/>
+          <c:tx>
+            <c:strRef>
+              <c:f>Sheet1!$B$1</c:f>
+              <c:strCache>
+                <c:ptCount val="1"/>
+                <c:pt idx="0">
+                  <c:v>Percent</c:v>
+                </c:pt>
+              </c:strCache>
+            </c:strRef>
+          </c:tx>
+          <c:spPr>
+            <a:solidFill>
+              <a:srgbClr val="3898FF"/>
+            </a:solidFill>
+            <a:effectLst/>
+          </c:spPr>
+          <c:invertIfNegative val="0"/>
+          <c:dLbls>
+            <c:numFmt formatCode="0&quot;%&quot;" sourceLinked="0"/>
+            <c:txPr>
+              <a:bodyPr/>
+              <a:lstStyle/>
+              <a:p>
+                <a:pPr>
+                  <a:defRPr b="0" i="0" strike="noStrike" sz="1200" u="none">
+                    <a:solidFill>
+                      <a:srgbClr val="F5F8FF"/>
+                    </a:solidFill>
+                    <a:latin typeface="IBM Plex Sans"/>
+                  </a:defRPr>
+                </a:pPr>
+              </a:p>
+            </c:txPr>
+            <c:showLegendKey val="0"/>
+            <c:showVal val="1"/>
+            <c:showCatName val="0"/>
+            <c:showSerName val="0"/>
+            <c:showPercent val="0"/>
+            <c:showBubbleSize val="0"/>
+            <c:showLeaderLines val="0"/>
+          </c:dLbls>
+          <c:cat>
+            <c:multiLvlStrRef>
               <c:f>Sheet1!$A$2:$A$7</c:f>
               <c:multiLvlStrCache>
                 <c:ptCount val="6"/>
@@ -646,6 +896,500 @@
                   </c:pt>
                   <c:pt idx="4">
                     <c:v>development is truly…</c:v>
+                  </c:pt>
+                  <c:pt idx="5">
+                    <c:v>frontier</c:v>
+                  </c:pt>
+                </c:lvl>
+              </c:multiLvlStrCache>
+            </c:multiLvlStrRef>
+          </c:cat>
+          <c:val>
+            <c:numRef>
+              <c:f>Sheet1!$B$2:$B$7</c:f>
+              <c:numCache>
+                <c:formatCode>General</c:formatCode>
+                <c:ptCount val="6"/>
+                <c:pt idx="0">
+                  <c:v>80</c:v>
+                </c:pt>
+                <c:pt idx="1">
+                  <c:v>29</c:v>
+                </c:pt>
+                <c:pt idx="2">
+                  <c:v>45</c:v>
+                </c:pt>
+                <c:pt idx="3">
+                  <c:v>80</c:v>
+                </c:pt>
+                <c:pt idx="4">
+                  <c:v>10</c:v>
+                </c:pt>
+                <c:pt idx="5">
+                  <c:v>15</c:v>
+                </c:pt>
+              </c:numCache>
+            </c:numRef>
+          </c:val>
+        </c:ser>
+        <c:dLbls>
+          <c:numFmt formatCode="0&quot;%&quot;" sourceLinked="0"/>
+          <c:txPr>
+            <a:bodyPr/>
+            <a:lstStyle/>
+            <a:p>
+              <a:pPr>
+                <a:defRPr b="0" i="0" strike="noStrike" sz="1200" u="none">
+                  <a:solidFill>
+                    <a:srgbClr val="F5F8FF"/>
+                  </a:solidFill>
+                  <a:latin typeface="IBM Plex Sans"/>
+                </a:defRPr>
+              </a:pPr>
+            </a:p>
+          </c:txPr>
+          <c:showLegendKey val="0"/>
+          <c:showVal val="1"/>
+          <c:showCatName val="0"/>
+          <c:showSerName val="0"/>
+          <c:showPercent val="0"/>
+          <c:showBubbleSize val="0"/>
+          <c:showLeaderLines val="0"/>
+        </c:dLbls>
+        <c:gapWidth val="40"/>
+        <c:overlap val="0"/>
+        <c:axId val="2094734554"/>
+        <c:axId val="2094734552"/>
+        <c:axId val="2094734556"/>
+      </c:barChart>
+      <c:catAx>
+        <c:axId val="2094734554"/>
+        <c:scaling>
+          <c:orientation val="minMax"/>
+        </c:scaling>
+        <c:delete val="0"/>
+        <c:axPos val="b"/>
+        <c:numFmt formatCode="General" sourceLinked="1"/>
+        <c:majorTickMark val="out"/>
+        <c:minorTickMark val="none"/>
+        <c:tickLblPos val="low"/>
+        <c:spPr>
+          <a:ln w="12700" cap="flat">
+            <a:solidFill>
+              <a:srgbClr val="1E2A44"/>
+            </a:solidFill>
+            <a:prstDash val="solid"/>
+            <a:round/>
+          </a:ln>
+        </c:spPr>
+        <c:txPr>
+          <a:bodyPr/>
+          <a:lstStyle/>
+          <a:p>
+            <a:pPr>
+              <a:defRPr sz="1100" b="0" i="0" u="none" strike="noStrike">
+                <a:solidFill>
+                  <a:srgbClr val="93A4B8"/>
+                </a:solidFill>
+                <a:latin typeface="IBM Plex Sans"/>
+              </a:defRPr>
+            </a:pPr>
+            <a:endParaRPr lang="en-US"/>
+          </a:p>
+        </c:txPr>
+        <c:crossAx val="2094734552"/>
+        <c:crosses val="autoZero"/>
+        <c:auto val="1"/>
+        <c:lblAlgn val="ctr"/>
+        <c:noMultiLvlLbl val="1"/>
+      </c:catAx>
+      <c:valAx>
+        <c:axId val="2094734552"/>
+        <c:scaling>
+          <c:orientation val="minMax"/>
+        </c:scaling>
+        <c:delete val="1"/>
+        <c:axPos val="l"/>
+        <c:numFmt formatCode="General" sourceLinked="0"/>
+        <c:majorTickMark val="out"/>
+        <c:minorTickMark val="none"/>
+        <c:tickLblPos val="nextTo"/>
+        <c:spPr>
+          <a:ln w="12700" cap="flat">
+            <a:solidFill>
+              <a:srgbClr val="888888"/>
+            </a:solidFill>
+            <a:prstDash val="solid"/>
+            <a:round/>
+          </a:ln>
+        </c:spPr>
+        <c:txPr>
+          <a:bodyPr/>
+          <a:lstStyle/>
+          <a:p>
+            <a:pPr>
+              <a:defRPr sz="1200" b="0" i="0" u="none" strike="noStrike">
+                <a:solidFill>
+                  <a:srgbClr val="000000"/>
+                </a:solidFill>
+                <a:latin typeface="Arial"/>
+              </a:defRPr>
+            </a:pPr>
+            <a:endParaRPr lang="en-US"/>
+          </a:p>
+        </c:txPr>
+        <c:crossAx val="2094734554"/>
+        <c:crosses val="autoZero"/>
+        <c:crossBetween val="between"/>
+      </c:valAx>
+      <c:spPr>
+        <a:noFill/>
+        <a:ln>
+          <a:noFill/>
+        </a:ln>
+        <a:effectLst/>
+      </c:spPr>
+    </c:plotArea>
+    <c:plotVisOnly val="1"/>
+    <c:dispBlanksAs val="span"/>
+  </c:chart>
+  <c:spPr>
+    <a:noFill/>
+    <a:ln>
+      <a:noFill/>
+    </a:ln>
+    <a:effectLst/>
+  </c:spPr>
+  <c:externalData r:id="rId1">
+    <c:autoUpdate val="0"/>
+  </c:externalData>
+</c:chartSpace>
+</file>
+
+<file path=ppt/charts/chart5.xml><?xml version="1.0" encoding="utf-8"?>
+<c:chartSpace xmlns:c="http://schemas.openxmlformats.org/drawingml/2006/chart" xmlns:a="http://schemas.openxmlformats.org/drawingml/2006/main" xmlns:r="http://schemas.openxmlformats.org/officeDocument/2006/relationships">
+  <c:date1904 val="0"/>
+  <c:roundedCorners val="1"/>
+  <c:chart>
+    <c:autoTitleDeleted val="1"/>
+    <c:plotArea>
+      <c:layout/>
+      <c:barChart>
+        <c:barDir val="col"/>
+        <c:grouping val="clustered"/>
+        <c:varyColors val="0"/>
+        <c:ser>
+          <c:idx val="0"/>
+          <c:order val="0"/>
+          <c:tx>
+            <c:strRef>
+              <c:f>Sheet1!$B$1</c:f>
+              <c:strCache>
+                <c:ptCount val="1"/>
+                <c:pt idx="0">
+                  <c:v>Percent</c:v>
+                </c:pt>
+              </c:strCache>
+            </c:strRef>
+          </c:tx>
+          <c:spPr>
+            <a:solidFill>
+              <a:srgbClr val="3898FF"/>
+            </a:solidFill>
+            <a:effectLst/>
+          </c:spPr>
+          <c:invertIfNegative val="0"/>
+          <c:dLbls>
+            <c:numFmt formatCode="0&quot;%&quot;" sourceLinked="0"/>
+            <c:txPr>
+              <a:bodyPr/>
+              <a:lstStyle/>
+              <a:p>
+                <a:pPr>
+                  <a:defRPr b="0" i="0" strike="noStrike" sz="1200" u="none">
+                    <a:solidFill>
+                      <a:srgbClr val="F5F8FF"/>
+                    </a:solidFill>
+                    <a:latin typeface="IBM Plex Sans"/>
+                  </a:defRPr>
+                </a:pPr>
+              </a:p>
+            </c:txPr>
+            <c:showLegendKey val="0"/>
+            <c:showVal val="1"/>
+            <c:showCatName val="0"/>
+            <c:showSerName val="0"/>
+            <c:showPercent val="0"/>
+            <c:showBubbleSize val="0"/>
+            <c:showLeaderLines val="0"/>
+          </c:dLbls>
+          <c:cat>
+            <c:multiLvlStrRef>
+              <c:f>Sheet1!$A$2:$A$7</c:f>
+              <c:multiLvlStrCache>
+                <c:ptCount val="6"/>
+                <c:lvl>
+                  <c:pt idx="0">
+                    <c:v>AI adoption</c:v>
+                  </c:pt>
+                  <c:pt idx="1">
+                    <c:v>trust in accuracy</c:v>
+                  </c:pt>
+                  <c:pt idx="2">
+                    <c:v>report losing time…</c:v>
+                  </c:pt>
+                  <c:pt idx="3">
+                    <c:v>AI as an assistant</c:v>
+                  </c:pt>
+                  <c:pt idx="4">
+                    <c:v>development is truly…</c:v>
+                  </c:pt>
+                  <c:pt idx="5">
+                    <c:v>frontier</c:v>
+                  </c:pt>
+                </c:lvl>
+              </c:multiLvlStrCache>
+            </c:multiLvlStrRef>
+          </c:cat>
+          <c:val>
+            <c:numRef>
+              <c:f>Sheet1!$B$2:$B$7</c:f>
+              <c:numCache>
+                <c:formatCode>General</c:formatCode>
+                <c:ptCount val="6"/>
+                <c:pt idx="0">
+                  <c:v>80</c:v>
+                </c:pt>
+                <c:pt idx="1">
+                  <c:v>29</c:v>
+                </c:pt>
+                <c:pt idx="2">
+                  <c:v>45</c:v>
+                </c:pt>
+                <c:pt idx="3">
+                  <c:v>80</c:v>
+                </c:pt>
+                <c:pt idx="4">
+                  <c:v>10</c:v>
+                </c:pt>
+                <c:pt idx="5">
+                  <c:v>15</c:v>
+                </c:pt>
+              </c:numCache>
+            </c:numRef>
+          </c:val>
+        </c:ser>
+        <c:dLbls>
+          <c:numFmt formatCode="0&quot;%&quot;" sourceLinked="0"/>
+          <c:txPr>
+            <a:bodyPr/>
+            <a:lstStyle/>
+            <a:p>
+              <a:pPr>
+                <a:defRPr b="0" i="0" strike="noStrike" sz="1200" u="none">
+                  <a:solidFill>
+                    <a:srgbClr val="F5F8FF"/>
+                  </a:solidFill>
+                  <a:latin typeface="IBM Plex Sans"/>
+                </a:defRPr>
+              </a:pPr>
+            </a:p>
+          </c:txPr>
+          <c:showLegendKey val="0"/>
+          <c:showVal val="1"/>
+          <c:showCatName val="0"/>
+          <c:showSerName val="0"/>
+          <c:showPercent val="0"/>
+          <c:showBubbleSize val="0"/>
+          <c:showLeaderLines val="0"/>
+        </c:dLbls>
+        <c:gapWidth val="40"/>
+        <c:overlap val="0"/>
+        <c:axId val="2094734554"/>
+        <c:axId val="2094734552"/>
+        <c:axId val="2094734556"/>
+      </c:barChart>
+      <c:catAx>
+        <c:axId val="2094734554"/>
+        <c:scaling>
+          <c:orientation val="minMax"/>
+        </c:scaling>
+        <c:delete val="0"/>
+        <c:axPos val="b"/>
+        <c:numFmt formatCode="General" sourceLinked="1"/>
+        <c:majorTickMark val="out"/>
+        <c:minorTickMark val="none"/>
+        <c:tickLblPos val="low"/>
+        <c:spPr>
+          <a:ln w="12700" cap="flat">
+            <a:solidFill>
+              <a:srgbClr val="1E2A44"/>
+            </a:solidFill>
+            <a:prstDash val="solid"/>
+            <a:round/>
+          </a:ln>
+        </c:spPr>
+        <c:txPr>
+          <a:bodyPr/>
+          <a:lstStyle/>
+          <a:p>
+            <a:pPr>
+              <a:defRPr sz="1100" b="0" i="0" u="none" strike="noStrike">
+                <a:solidFill>
+                  <a:srgbClr val="93A4B8"/>
+                </a:solidFill>
+                <a:latin typeface="IBM Plex Sans"/>
+              </a:defRPr>
+            </a:pPr>
+            <a:endParaRPr lang="en-US"/>
+          </a:p>
+        </c:txPr>
+        <c:crossAx val="2094734552"/>
+        <c:crosses val="autoZero"/>
+        <c:auto val="1"/>
+        <c:lblAlgn val="ctr"/>
+        <c:noMultiLvlLbl val="1"/>
+      </c:catAx>
+      <c:valAx>
+        <c:axId val="2094734552"/>
+        <c:scaling>
+          <c:orientation val="minMax"/>
+        </c:scaling>
+        <c:delete val="1"/>
+        <c:axPos val="l"/>
+        <c:numFmt formatCode="General" sourceLinked="0"/>
+        <c:majorTickMark val="out"/>
+        <c:minorTickMark val="none"/>
+        <c:tickLblPos val="nextTo"/>
+        <c:spPr>
+          <a:ln w="12700" cap="flat">
+            <a:solidFill>
+              <a:srgbClr val="888888"/>
+            </a:solidFill>
+            <a:prstDash val="solid"/>
+            <a:round/>
+          </a:ln>
+        </c:spPr>
+        <c:txPr>
+          <a:bodyPr/>
+          <a:lstStyle/>
+          <a:p>
+            <a:pPr>
+              <a:defRPr sz="1200" b="0" i="0" u="none" strike="noStrike">
+                <a:solidFill>
+                  <a:srgbClr val="000000"/>
+                </a:solidFill>
+                <a:latin typeface="Arial"/>
+              </a:defRPr>
+            </a:pPr>
+            <a:endParaRPr lang="en-US"/>
+          </a:p>
+        </c:txPr>
+        <c:crossAx val="2094734554"/>
+        <c:crosses val="autoZero"/>
+        <c:crossBetween val="between"/>
+      </c:valAx>
+      <c:spPr>
+        <a:noFill/>
+        <a:ln>
+          <a:noFill/>
+        </a:ln>
+        <a:effectLst/>
+      </c:spPr>
+    </c:plotArea>
+    <c:plotVisOnly val="1"/>
+    <c:dispBlanksAs val="span"/>
+  </c:chart>
+  <c:spPr>
+    <a:noFill/>
+    <a:ln>
+      <a:noFill/>
+    </a:ln>
+    <a:effectLst/>
+  </c:spPr>
+  <c:externalData r:id="rId1">
+    <c:autoUpdate val="0"/>
+  </c:externalData>
+</c:chartSpace>
+</file>
+
+<file path=ppt/charts/chart6.xml><?xml version="1.0" encoding="utf-8"?>
+<c:chartSpace xmlns:c="http://schemas.openxmlformats.org/drawingml/2006/chart" xmlns:a="http://schemas.openxmlformats.org/drawingml/2006/main" xmlns:r="http://schemas.openxmlformats.org/officeDocument/2006/relationships">
+  <c:date1904 val="0"/>
+  <c:roundedCorners val="1"/>
+  <c:chart>
+    <c:autoTitleDeleted val="1"/>
+    <c:plotArea>
+      <c:layout/>
+      <c:barChart>
+        <c:barDir val="col"/>
+        <c:grouping val="clustered"/>
+        <c:varyColors val="0"/>
+        <c:ser>
+          <c:idx val="0"/>
+          <c:order val="0"/>
+          <c:tx>
+            <c:strRef>
+              <c:f>Sheet1!$B$1</c:f>
+              <c:strCache>
+                <c:ptCount val="1"/>
+                <c:pt idx="0">
+                  <c:v>Percent</c:v>
+                </c:pt>
+              </c:strCache>
+            </c:strRef>
+          </c:tx>
+          <c:spPr>
+            <a:solidFill>
+              <a:srgbClr val="3898FF"/>
+            </a:solidFill>
+            <a:effectLst/>
+          </c:spPr>
+          <c:invertIfNegative val="0"/>
+          <c:dLbls>
+            <c:numFmt formatCode="0&quot;%&quot;" sourceLinked="0"/>
+            <c:txPr>
+              <a:bodyPr/>
+              <a:lstStyle/>
+              <a:p>
+                <a:pPr>
+                  <a:defRPr b="0" i="0" strike="noStrike" sz="1200" u="none">
+                    <a:solidFill>
+                      <a:srgbClr val="F5F8FF"/>
+                    </a:solidFill>
+                    <a:latin typeface="IBM Plex Sans"/>
+                  </a:defRPr>
+                </a:pPr>
+              </a:p>
+            </c:txPr>
+            <c:showLegendKey val="0"/>
+            <c:showVal val="1"/>
+            <c:showCatName val="0"/>
+            <c:showSerName val="0"/>
+            <c:showPercent val="0"/>
+            <c:showBubbleSize val="0"/>
+            <c:showLeaderLines val="0"/>
+          </c:dLbls>
+          <c:cat>
+            <c:multiLvlStrRef>
+              <c:f>Sheet1!$A$2:$A$7</c:f>
+              <c:multiLvlStrCache>
+                <c:ptCount val="6"/>
+                <c:lvl>
+                  <c:pt idx="0">
+                    <c:v>AI</c:v>
+                  </c:pt>
+                  <c:pt idx="1">
+                    <c:v>trust it</c:v>
+                  </c:pt>
+                  <c:pt idx="2">
+                    <c:v>lose time debugging it</c:v>
+                  </c:pt>
+                  <c:pt idx="3">
+                    <c:v>AI-assisted</c:v>
+                  </c:pt>
+                  <c:pt idx="4">
+                    <c:v>AI-driven</c:v>
                   </c:pt>
                   <c:pt idx="5">
                     <c:v>frontier</c:v>
@@ -1429,6 +2173,710 @@
 </p:notes>
 </file>
 
+<file path=ppt/notesSlides/notesSlide12.xml><?xml version="1.0" encoding="utf-8"?>
+<p:notes xmlns:a="http://schemas.openxmlformats.org/drawingml/2006/main" xmlns:r="http://schemas.openxmlformats.org/officeDocument/2006/relationships" xmlns:p="http://schemas.openxmlformats.org/presentationml/2006/main">
+  <p:cSld>
+    <p:spTree>
+      <p:nvGrpSpPr>
+        <p:cNvPr id="1" name=""/>
+        <p:cNvGrpSpPr/>
+        <p:nvPr/>
+      </p:nvGrpSpPr>
+      <p:grpSpPr>
+        <a:xfrm>
+          <a:off x="0" y="0"/>
+          <a:ext cx="0" cy="0"/>
+          <a:chOff x="0" y="0"/>
+          <a:chExt cx="0" cy="0"/>
+        </a:xfrm>
+      </p:grpSpPr>
+      <p:sp>
+        <p:nvSpPr>
+          <p:cNvPr id="2" name="Slide Image Placeholder 1"/>
+          <p:cNvSpPr>
+            <a:spLocks noGrp="1" noRot="1" noChangeAspect="1"/>
+          </p:cNvSpPr>
+          <p:nvPr>
+            <p:ph type="sldImg"/>
+          </p:nvPr>
+        </p:nvSpPr>
+        <p:spPr/>
+      </p:sp>
+      <p:sp>
+        <p:nvSpPr>
+          <p:cNvPr id="3" name="Notes Placeholder 2"/>
+          <p:cNvSpPr>
+            <a:spLocks noGrp="1"/>
+          </p:cNvSpPr>
+          <p:nvPr>
+            <p:ph type="body" idx="1"/>
+          </p:nvPr>
+        </p:nvSpPr>
+        <p:spPr/>
+        <p:txBody>
+          <a:bodyPr/>
+          <a:lstStyle/>
+          <a:p>
+            <a:r>
+              <a:rPr lang="en-US" dirty="0"/>
+              <a:t/>
+            </a:r>
+            <a:endParaRPr lang="en-US" dirty="0"/>
+          </a:p>
+        </p:txBody>
+      </p:sp>
+      <p:sp>
+        <p:nvSpPr>
+          <p:cNvPr id="4" name="Slide Number Placeholder 3"/>
+          <p:cNvSpPr>
+            <a:spLocks noGrp="1"/>
+          </p:cNvSpPr>
+          <p:nvPr>
+            <p:ph type="sldNum" sz="quarter" idx="10"/>
+          </p:nvPr>
+        </p:nvSpPr>
+        <p:spPr/>
+        <p:txBody>
+          <a:bodyPr/>
+          <a:lstStyle/>
+          <a:p>
+            <a:fld id="{F7021451-1387-4CA6-816F-3879F97B5CBC}" type="slidenum">
+              <a:rPr lang="en-US"/>
+              <a:t>12</a:t>
+            </a:fld>
+            <a:endParaRPr lang="en-US"/>
+          </a:p>
+        </p:txBody>
+      </p:sp>
+    </p:spTree>
+    <p:extLst>
+      <p:ext uri="{BB962C8B-B14F-4D97-AF65-F5344CB8AC3E}">
+        <p14:creationId xmlns:p14="http://schemas.microsoft.com/office/powerpoint/2010/main" val="1024086991"/>
+      </p:ext>
+    </p:extLst>
+  </p:cSld>
+  <p:clrMapOvr>
+    <a:masterClrMapping/>
+  </p:clrMapOvr>
+</p:notes>
+</file>
+
+<file path=ppt/notesSlides/notesSlide13.xml><?xml version="1.0" encoding="utf-8"?>
+<p:notes xmlns:a="http://schemas.openxmlformats.org/drawingml/2006/main" xmlns:r="http://schemas.openxmlformats.org/officeDocument/2006/relationships" xmlns:p="http://schemas.openxmlformats.org/presentationml/2006/main">
+  <p:cSld>
+    <p:spTree>
+      <p:nvGrpSpPr>
+        <p:cNvPr id="1" name=""/>
+        <p:cNvGrpSpPr/>
+        <p:nvPr/>
+      </p:nvGrpSpPr>
+      <p:grpSpPr>
+        <a:xfrm>
+          <a:off x="0" y="0"/>
+          <a:ext cx="0" cy="0"/>
+          <a:chOff x="0" y="0"/>
+          <a:chExt cx="0" cy="0"/>
+        </a:xfrm>
+      </p:grpSpPr>
+      <p:sp>
+        <p:nvSpPr>
+          <p:cNvPr id="2" name="Slide Image Placeholder 1"/>
+          <p:cNvSpPr>
+            <a:spLocks noGrp="1" noRot="1" noChangeAspect="1"/>
+          </p:cNvSpPr>
+          <p:nvPr>
+            <p:ph type="sldImg"/>
+          </p:nvPr>
+        </p:nvSpPr>
+        <p:spPr/>
+      </p:sp>
+      <p:sp>
+        <p:nvSpPr>
+          <p:cNvPr id="3" name="Notes Placeholder 2"/>
+          <p:cNvSpPr>
+            <a:spLocks noGrp="1"/>
+          </p:cNvSpPr>
+          <p:nvPr>
+            <p:ph type="body" idx="1"/>
+          </p:nvPr>
+        </p:nvSpPr>
+        <p:spPr/>
+        <p:txBody>
+          <a:bodyPr/>
+          <a:lstStyle/>
+          <a:p>
+            <a:r>
+              <a:rPr lang="en-US" dirty="0"/>
+              <a:t/>
+            </a:r>
+            <a:endParaRPr lang="en-US" dirty="0"/>
+          </a:p>
+        </p:txBody>
+      </p:sp>
+      <p:sp>
+        <p:nvSpPr>
+          <p:cNvPr id="4" name="Slide Number Placeholder 3"/>
+          <p:cNvSpPr>
+            <a:spLocks noGrp="1"/>
+          </p:cNvSpPr>
+          <p:nvPr>
+            <p:ph type="sldNum" sz="quarter" idx="10"/>
+          </p:nvPr>
+        </p:nvSpPr>
+        <p:spPr/>
+        <p:txBody>
+          <a:bodyPr/>
+          <a:lstStyle/>
+          <a:p>
+            <a:fld id="{F7021451-1387-4CA6-816F-3879F97B5CBC}" type="slidenum">
+              <a:rPr lang="en-US"/>
+              <a:t>13</a:t>
+            </a:fld>
+            <a:endParaRPr lang="en-US"/>
+          </a:p>
+        </p:txBody>
+      </p:sp>
+    </p:spTree>
+    <p:extLst>
+      <p:ext uri="{BB962C8B-B14F-4D97-AF65-F5344CB8AC3E}">
+        <p14:creationId xmlns:p14="http://schemas.microsoft.com/office/powerpoint/2010/main" val="1024086991"/>
+      </p:ext>
+    </p:extLst>
+  </p:cSld>
+  <p:clrMapOvr>
+    <a:masterClrMapping/>
+  </p:clrMapOvr>
+</p:notes>
+</file>
+
+<file path=ppt/notesSlides/notesSlide14.xml><?xml version="1.0" encoding="utf-8"?>
+<p:notes xmlns:a="http://schemas.openxmlformats.org/drawingml/2006/main" xmlns:r="http://schemas.openxmlformats.org/officeDocument/2006/relationships" xmlns:p="http://schemas.openxmlformats.org/presentationml/2006/main">
+  <p:cSld>
+    <p:spTree>
+      <p:nvGrpSpPr>
+        <p:cNvPr id="1" name=""/>
+        <p:cNvGrpSpPr/>
+        <p:nvPr/>
+      </p:nvGrpSpPr>
+      <p:grpSpPr>
+        <a:xfrm>
+          <a:off x="0" y="0"/>
+          <a:ext cx="0" cy="0"/>
+          <a:chOff x="0" y="0"/>
+          <a:chExt cx="0" cy="0"/>
+        </a:xfrm>
+      </p:grpSpPr>
+      <p:sp>
+        <p:nvSpPr>
+          <p:cNvPr id="2" name="Slide Image Placeholder 1"/>
+          <p:cNvSpPr>
+            <a:spLocks noGrp="1" noRot="1" noChangeAspect="1"/>
+          </p:cNvSpPr>
+          <p:nvPr>
+            <p:ph type="sldImg"/>
+          </p:nvPr>
+        </p:nvSpPr>
+        <p:spPr/>
+      </p:sp>
+      <p:sp>
+        <p:nvSpPr>
+          <p:cNvPr id="3" name="Notes Placeholder 2"/>
+          <p:cNvSpPr>
+            <a:spLocks noGrp="1"/>
+          </p:cNvSpPr>
+          <p:nvPr>
+            <p:ph type="body" idx="1"/>
+          </p:nvPr>
+        </p:nvSpPr>
+        <p:spPr/>
+        <p:txBody>
+          <a:bodyPr/>
+          <a:lstStyle/>
+          <a:p>
+            <a:r>
+              <a:rPr lang="en-US" dirty="0"/>
+              <a:t/>
+            </a:r>
+            <a:endParaRPr lang="en-US" dirty="0"/>
+          </a:p>
+        </p:txBody>
+      </p:sp>
+      <p:sp>
+        <p:nvSpPr>
+          <p:cNvPr id="4" name="Slide Number Placeholder 3"/>
+          <p:cNvSpPr>
+            <a:spLocks noGrp="1"/>
+          </p:cNvSpPr>
+          <p:nvPr>
+            <p:ph type="sldNum" sz="quarter" idx="10"/>
+          </p:nvPr>
+        </p:nvSpPr>
+        <p:spPr/>
+        <p:txBody>
+          <a:bodyPr/>
+          <a:lstStyle/>
+          <a:p>
+            <a:fld id="{F7021451-1387-4CA6-816F-3879F97B5CBC}" type="slidenum">
+              <a:rPr lang="en-US"/>
+              <a:t>14</a:t>
+            </a:fld>
+            <a:endParaRPr lang="en-US"/>
+          </a:p>
+        </p:txBody>
+      </p:sp>
+    </p:spTree>
+    <p:extLst>
+      <p:ext uri="{BB962C8B-B14F-4D97-AF65-F5344CB8AC3E}">
+        <p14:creationId xmlns:p14="http://schemas.microsoft.com/office/powerpoint/2010/main" val="1024086991"/>
+      </p:ext>
+    </p:extLst>
+  </p:cSld>
+  <p:clrMapOvr>
+    <a:masterClrMapping/>
+  </p:clrMapOvr>
+</p:notes>
+</file>
+
+<file path=ppt/notesSlides/notesSlide15.xml><?xml version="1.0" encoding="utf-8"?>
+<p:notes xmlns:a="http://schemas.openxmlformats.org/drawingml/2006/main" xmlns:r="http://schemas.openxmlformats.org/officeDocument/2006/relationships" xmlns:p="http://schemas.openxmlformats.org/presentationml/2006/main">
+  <p:cSld>
+    <p:spTree>
+      <p:nvGrpSpPr>
+        <p:cNvPr id="1" name=""/>
+        <p:cNvGrpSpPr/>
+        <p:nvPr/>
+      </p:nvGrpSpPr>
+      <p:grpSpPr>
+        <a:xfrm>
+          <a:off x="0" y="0"/>
+          <a:ext cx="0" cy="0"/>
+          <a:chOff x="0" y="0"/>
+          <a:chExt cx="0" cy="0"/>
+        </a:xfrm>
+      </p:grpSpPr>
+      <p:sp>
+        <p:nvSpPr>
+          <p:cNvPr id="2" name="Slide Image Placeholder 1"/>
+          <p:cNvSpPr>
+            <a:spLocks noGrp="1" noRot="1" noChangeAspect="1"/>
+          </p:cNvSpPr>
+          <p:nvPr>
+            <p:ph type="sldImg"/>
+          </p:nvPr>
+        </p:nvSpPr>
+        <p:spPr/>
+      </p:sp>
+      <p:sp>
+        <p:nvSpPr>
+          <p:cNvPr id="3" name="Notes Placeholder 2"/>
+          <p:cNvSpPr>
+            <a:spLocks noGrp="1"/>
+          </p:cNvSpPr>
+          <p:nvPr>
+            <p:ph type="body" idx="1"/>
+          </p:nvPr>
+        </p:nvSpPr>
+        <p:spPr/>
+        <p:txBody>
+          <a:bodyPr/>
+          <a:lstStyle/>
+          <a:p>
+            <a:r>
+              <a:rPr lang="en-US" dirty="0"/>
+              <a:t/>
+            </a:r>
+            <a:endParaRPr lang="en-US" dirty="0"/>
+          </a:p>
+        </p:txBody>
+      </p:sp>
+      <p:sp>
+        <p:nvSpPr>
+          <p:cNvPr id="4" name="Slide Number Placeholder 3"/>
+          <p:cNvSpPr>
+            <a:spLocks noGrp="1"/>
+          </p:cNvSpPr>
+          <p:nvPr>
+            <p:ph type="sldNum" sz="quarter" idx="10"/>
+          </p:nvPr>
+        </p:nvSpPr>
+        <p:spPr/>
+        <p:txBody>
+          <a:bodyPr/>
+          <a:lstStyle/>
+          <a:p>
+            <a:fld id="{F7021451-1387-4CA6-816F-3879F97B5CBC}" type="slidenum">
+              <a:rPr lang="en-US"/>
+              <a:t>15</a:t>
+            </a:fld>
+            <a:endParaRPr lang="en-US"/>
+          </a:p>
+        </p:txBody>
+      </p:sp>
+    </p:spTree>
+    <p:extLst>
+      <p:ext uri="{BB962C8B-B14F-4D97-AF65-F5344CB8AC3E}">
+        <p14:creationId xmlns:p14="http://schemas.microsoft.com/office/powerpoint/2010/main" val="1024086991"/>
+      </p:ext>
+    </p:extLst>
+  </p:cSld>
+  <p:clrMapOvr>
+    <a:masterClrMapping/>
+  </p:clrMapOvr>
+</p:notes>
+</file>
+
+<file path=ppt/notesSlides/notesSlide16.xml><?xml version="1.0" encoding="utf-8"?>
+<p:notes xmlns:a="http://schemas.openxmlformats.org/drawingml/2006/main" xmlns:r="http://schemas.openxmlformats.org/officeDocument/2006/relationships" xmlns:p="http://schemas.openxmlformats.org/presentationml/2006/main">
+  <p:cSld>
+    <p:spTree>
+      <p:nvGrpSpPr>
+        <p:cNvPr id="1" name=""/>
+        <p:cNvGrpSpPr/>
+        <p:nvPr/>
+      </p:nvGrpSpPr>
+      <p:grpSpPr>
+        <a:xfrm>
+          <a:off x="0" y="0"/>
+          <a:ext cx="0" cy="0"/>
+          <a:chOff x="0" y="0"/>
+          <a:chExt cx="0" cy="0"/>
+        </a:xfrm>
+      </p:grpSpPr>
+      <p:sp>
+        <p:nvSpPr>
+          <p:cNvPr id="2" name="Slide Image Placeholder 1"/>
+          <p:cNvSpPr>
+            <a:spLocks noGrp="1" noRot="1" noChangeAspect="1"/>
+          </p:cNvSpPr>
+          <p:nvPr>
+            <p:ph type="sldImg"/>
+          </p:nvPr>
+        </p:nvSpPr>
+        <p:spPr/>
+      </p:sp>
+      <p:sp>
+        <p:nvSpPr>
+          <p:cNvPr id="3" name="Notes Placeholder 2"/>
+          <p:cNvSpPr>
+            <a:spLocks noGrp="1"/>
+          </p:cNvSpPr>
+          <p:nvPr>
+            <p:ph type="body" idx="1"/>
+          </p:nvPr>
+        </p:nvSpPr>
+        <p:spPr/>
+        <p:txBody>
+          <a:bodyPr/>
+          <a:lstStyle/>
+          <a:p>
+            <a:r>
+              <a:rPr lang="en-US" dirty="0"/>
+              <a:t/>
+            </a:r>
+            <a:endParaRPr lang="en-US" dirty="0"/>
+          </a:p>
+        </p:txBody>
+      </p:sp>
+      <p:sp>
+        <p:nvSpPr>
+          <p:cNvPr id="4" name="Slide Number Placeholder 3"/>
+          <p:cNvSpPr>
+            <a:spLocks noGrp="1"/>
+          </p:cNvSpPr>
+          <p:nvPr>
+            <p:ph type="sldNum" sz="quarter" idx="10"/>
+          </p:nvPr>
+        </p:nvSpPr>
+        <p:spPr/>
+        <p:txBody>
+          <a:bodyPr/>
+          <a:lstStyle/>
+          <a:p>
+            <a:fld id="{F7021451-1387-4CA6-816F-3879F97B5CBC}" type="slidenum">
+              <a:rPr lang="en-US"/>
+              <a:t>16</a:t>
+            </a:fld>
+            <a:endParaRPr lang="en-US"/>
+          </a:p>
+        </p:txBody>
+      </p:sp>
+    </p:spTree>
+    <p:extLst>
+      <p:ext uri="{BB962C8B-B14F-4D97-AF65-F5344CB8AC3E}">
+        <p14:creationId xmlns:p14="http://schemas.microsoft.com/office/powerpoint/2010/main" val="1024086991"/>
+      </p:ext>
+    </p:extLst>
+  </p:cSld>
+  <p:clrMapOvr>
+    <a:masterClrMapping/>
+  </p:clrMapOvr>
+</p:notes>
+</file>
+
+<file path=ppt/notesSlides/notesSlide17.xml><?xml version="1.0" encoding="utf-8"?>
+<p:notes xmlns:a="http://schemas.openxmlformats.org/drawingml/2006/main" xmlns:r="http://schemas.openxmlformats.org/officeDocument/2006/relationships" xmlns:p="http://schemas.openxmlformats.org/presentationml/2006/main">
+  <p:cSld>
+    <p:spTree>
+      <p:nvGrpSpPr>
+        <p:cNvPr id="1" name=""/>
+        <p:cNvGrpSpPr/>
+        <p:nvPr/>
+      </p:nvGrpSpPr>
+      <p:grpSpPr>
+        <a:xfrm>
+          <a:off x="0" y="0"/>
+          <a:ext cx="0" cy="0"/>
+          <a:chOff x="0" y="0"/>
+          <a:chExt cx="0" cy="0"/>
+        </a:xfrm>
+      </p:grpSpPr>
+      <p:sp>
+        <p:nvSpPr>
+          <p:cNvPr id="2" name="Slide Image Placeholder 1"/>
+          <p:cNvSpPr>
+            <a:spLocks noGrp="1" noRot="1" noChangeAspect="1"/>
+          </p:cNvSpPr>
+          <p:nvPr>
+            <p:ph type="sldImg"/>
+          </p:nvPr>
+        </p:nvSpPr>
+        <p:spPr/>
+      </p:sp>
+      <p:sp>
+        <p:nvSpPr>
+          <p:cNvPr id="3" name="Notes Placeholder 2"/>
+          <p:cNvSpPr>
+            <a:spLocks noGrp="1"/>
+          </p:cNvSpPr>
+          <p:nvPr>
+            <p:ph type="body" idx="1"/>
+          </p:nvPr>
+        </p:nvSpPr>
+        <p:spPr/>
+        <p:txBody>
+          <a:bodyPr/>
+          <a:lstStyle/>
+          <a:p>
+            <a:r>
+              <a:rPr lang="en-US" dirty="0"/>
+              <a:t/>
+            </a:r>
+            <a:endParaRPr lang="en-US" dirty="0"/>
+          </a:p>
+        </p:txBody>
+      </p:sp>
+      <p:sp>
+        <p:nvSpPr>
+          <p:cNvPr id="4" name="Slide Number Placeholder 3"/>
+          <p:cNvSpPr>
+            <a:spLocks noGrp="1"/>
+          </p:cNvSpPr>
+          <p:nvPr>
+            <p:ph type="sldNum" sz="quarter" idx="10"/>
+          </p:nvPr>
+        </p:nvSpPr>
+        <p:spPr/>
+        <p:txBody>
+          <a:bodyPr/>
+          <a:lstStyle/>
+          <a:p>
+            <a:fld id="{F7021451-1387-4CA6-816F-3879F97B5CBC}" type="slidenum">
+              <a:rPr lang="en-US"/>
+              <a:t>17</a:t>
+            </a:fld>
+            <a:endParaRPr lang="en-US"/>
+          </a:p>
+        </p:txBody>
+      </p:sp>
+    </p:spTree>
+    <p:extLst>
+      <p:ext uri="{BB962C8B-B14F-4D97-AF65-F5344CB8AC3E}">
+        <p14:creationId xmlns:p14="http://schemas.microsoft.com/office/powerpoint/2010/main" val="1024086991"/>
+      </p:ext>
+    </p:extLst>
+  </p:cSld>
+  <p:clrMapOvr>
+    <a:masterClrMapping/>
+  </p:clrMapOvr>
+</p:notes>
+</file>
+
+<file path=ppt/notesSlides/notesSlide18.xml><?xml version="1.0" encoding="utf-8"?>
+<p:notes xmlns:a="http://schemas.openxmlformats.org/drawingml/2006/main" xmlns:r="http://schemas.openxmlformats.org/officeDocument/2006/relationships" xmlns:p="http://schemas.openxmlformats.org/presentationml/2006/main">
+  <p:cSld>
+    <p:spTree>
+      <p:nvGrpSpPr>
+        <p:cNvPr id="1" name=""/>
+        <p:cNvGrpSpPr/>
+        <p:nvPr/>
+      </p:nvGrpSpPr>
+      <p:grpSpPr>
+        <a:xfrm>
+          <a:off x="0" y="0"/>
+          <a:ext cx="0" cy="0"/>
+          <a:chOff x="0" y="0"/>
+          <a:chExt cx="0" cy="0"/>
+        </a:xfrm>
+      </p:grpSpPr>
+      <p:sp>
+        <p:nvSpPr>
+          <p:cNvPr id="2" name="Slide Image Placeholder 1"/>
+          <p:cNvSpPr>
+            <a:spLocks noGrp="1" noRot="1" noChangeAspect="1"/>
+          </p:cNvSpPr>
+          <p:nvPr>
+            <p:ph type="sldImg"/>
+          </p:nvPr>
+        </p:nvSpPr>
+        <p:spPr/>
+      </p:sp>
+      <p:sp>
+        <p:nvSpPr>
+          <p:cNvPr id="3" name="Notes Placeholder 2"/>
+          <p:cNvSpPr>
+            <a:spLocks noGrp="1"/>
+          </p:cNvSpPr>
+          <p:nvPr>
+            <p:ph type="body" idx="1"/>
+          </p:nvPr>
+        </p:nvSpPr>
+        <p:spPr/>
+        <p:txBody>
+          <a:bodyPr/>
+          <a:lstStyle/>
+          <a:p>
+            <a:r>
+              <a:rPr lang="en-US" dirty="0"/>
+              <a:t/>
+            </a:r>
+            <a:endParaRPr lang="en-US" dirty="0"/>
+          </a:p>
+        </p:txBody>
+      </p:sp>
+      <p:sp>
+        <p:nvSpPr>
+          <p:cNvPr id="4" name="Slide Number Placeholder 3"/>
+          <p:cNvSpPr>
+            <a:spLocks noGrp="1"/>
+          </p:cNvSpPr>
+          <p:nvPr>
+            <p:ph type="sldNum" sz="quarter" idx="10"/>
+          </p:nvPr>
+        </p:nvSpPr>
+        <p:spPr/>
+        <p:txBody>
+          <a:bodyPr/>
+          <a:lstStyle/>
+          <a:p>
+            <a:fld id="{F7021451-1387-4CA6-816F-3879F97B5CBC}" type="slidenum">
+              <a:rPr lang="en-US"/>
+              <a:t>18</a:t>
+            </a:fld>
+            <a:endParaRPr lang="en-US"/>
+          </a:p>
+        </p:txBody>
+      </p:sp>
+    </p:spTree>
+    <p:extLst>
+      <p:ext uri="{BB962C8B-B14F-4D97-AF65-F5344CB8AC3E}">
+        <p14:creationId xmlns:p14="http://schemas.microsoft.com/office/powerpoint/2010/main" val="1024086991"/>
+      </p:ext>
+    </p:extLst>
+  </p:cSld>
+  <p:clrMapOvr>
+    <a:masterClrMapping/>
+  </p:clrMapOvr>
+</p:notes>
+</file>
+
+<file path=ppt/notesSlides/notesSlide19.xml><?xml version="1.0" encoding="utf-8"?>
+<p:notes xmlns:a="http://schemas.openxmlformats.org/drawingml/2006/main" xmlns:r="http://schemas.openxmlformats.org/officeDocument/2006/relationships" xmlns:p="http://schemas.openxmlformats.org/presentationml/2006/main">
+  <p:cSld>
+    <p:spTree>
+      <p:nvGrpSpPr>
+        <p:cNvPr id="1" name=""/>
+        <p:cNvGrpSpPr/>
+        <p:nvPr/>
+      </p:nvGrpSpPr>
+      <p:grpSpPr>
+        <a:xfrm>
+          <a:off x="0" y="0"/>
+          <a:ext cx="0" cy="0"/>
+          <a:chOff x="0" y="0"/>
+          <a:chExt cx="0" cy="0"/>
+        </a:xfrm>
+      </p:grpSpPr>
+      <p:sp>
+        <p:nvSpPr>
+          <p:cNvPr id="2" name="Slide Image Placeholder 1"/>
+          <p:cNvSpPr>
+            <a:spLocks noGrp="1" noRot="1" noChangeAspect="1"/>
+          </p:cNvSpPr>
+          <p:nvPr>
+            <p:ph type="sldImg"/>
+          </p:nvPr>
+        </p:nvSpPr>
+        <p:spPr/>
+      </p:sp>
+      <p:sp>
+        <p:nvSpPr>
+          <p:cNvPr id="3" name="Notes Placeholder 2"/>
+          <p:cNvSpPr>
+            <a:spLocks noGrp="1"/>
+          </p:cNvSpPr>
+          <p:nvPr>
+            <p:ph type="body" idx="1"/>
+          </p:nvPr>
+        </p:nvSpPr>
+        <p:spPr/>
+        <p:txBody>
+          <a:bodyPr/>
+          <a:lstStyle/>
+          <a:p>
+            <a:r>
+              <a:rPr lang="en-US" dirty="0"/>
+              <a:t/>
+            </a:r>
+            <a:endParaRPr lang="en-US" dirty="0"/>
+          </a:p>
+        </p:txBody>
+      </p:sp>
+      <p:sp>
+        <p:nvSpPr>
+          <p:cNvPr id="4" name="Slide Number Placeholder 3"/>
+          <p:cNvSpPr>
+            <a:spLocks noGrp="1"/>
+          </p:cNvSpPr>
+          <p:nvPr>
+            <p:ph type="sldNum" sz="quarter" idx="10"/>
+          </p:nvPr>
+        </p:nvSpPr>
+        <p:spPr/>
+        <p:txBody>
+          <a:bodyPr/>
+          <a:lstStyle/>
+          <a:p>
+            <a:fld id="{F7021451-1387-4CA6-816F-3879F97B5CBC}" type="slidenum">
+              <a:rPr lang="en-US"/>
+              <a:t>19</a:t>
+            </a:fld>
+            <a:endParaRPr lang="en-US"/>
+          </a:p>
+        </p:txBody>
+      </p:sp>
+    </p:spTree>
+    <p:extLst>
+      <p:ext uri="{BB962C8B-B14F-4D97-AF65-F5344CB8AC3E}">
+        <p14:creationId xmlns:p14="http://schemas.microsoft.com/office/powerpoint/2010/main" val="1024086991"/>
+      </p:ext>
+    </p:extLst>
+  </p:cSld>
+  <p:clrMapOvr>
+    <a:masterClrMapping/>
+  </p:clrMapOvr>
+</p:notes>
+</file>
+
 <file path=ppt/notesSlides/notesSlide2.xml><?xml version="1.0" encoding="utf-8"?>
 <p:notes xmlns:a="http://schemas.openxmlformats.org/drawingml/2006/main" xmlns:r="http://schemas.openxmlformats.org/officeDocument/2006/relationships" xmlns:p="http://schemas.openxmlformats.org/presentationml/2006/main">
   <p:cSld>
@@ -1499,6 +2947,622 @@
             <a:fld id="{F7021451-1387-4CA6-816F-3879F97B5CBC}" type="slidenum">
               <a:rPr lang="en-US"/>
               <a:t>2</a:t>
+            </a:fld>
+            <a:endParaRPr lang="en-US"/>
+          </a:p>
+        </p:txBody>
+      </p:sp>
+    </p:spTree>
+    <p:extLst>
+      <p:ext uri="{BB962C8B-B14F-4D97-AF65-F5344CB8AC3E}">
+        <p14:creationId xmlns:p14="http://schemas.microsoft.com/office/powerpoint/2010/main" val="1024086991"/>
+      </p:ext>
+    </p:extLst>
+  </p:cSld>
+  <p:clrMapOvr>
+    <a:masterClrMapping/>
+  </p:clrMapOvr>
+</p:notes>
+</file>
+
+<file path=ppt/notesSlides/notesSlide20.xml><?xml version="1.0" encoding="utf-8"?>
+<p:notes xmlns:a="http://schemas.openxmlformats.org/drawingml/2006/main" xmlns:r="http://schemas.openxmlformats.org/officeDocument/2006/relationships" xmlns:p="http://schemas.openxmlformats.org/presentationml/2006/main">
+  <p:cSld>
+    <p:spTree>
+      <p:nvGrpSpPr>
+        <p:cNvPr id="1" name=""/>
+        <p:cNvGrpSpPr/>
+        <p:nvPr/>
+      </p:nvGrpSpPr>
+      <p:grpSpPr>
+        <a:xfrm>
+          <a:off x="0" y="0"/>
+          <a:ext cx="0" cy="0"/>
+          <a:chOff x="0" y="0"/>
+          <a:chExt cx="0" cy="0"/>
+        </a:xfrm>
+      </p:grpSpPr>
+      <p:sp>
+        <p:nvSpPr>
+          <p:cNvPr id="2" name="Slide Image Placeholder 1"/>
+          <p:cNvSpPr>
+            <a:spLocks noGrp="1" noRot="1" noChangeAspect="1"/>
+          </p:cNvSpPr>
+          <p:nvPr>
+            <p:ph type="sldImg"/>
+          </p:nvPr>
+        </p:nvSpPr>
+        <p:spPr/>
+      </p:sp>
+      <p:sp>
+        <p:nvSpPr>
+          <p:cNvPr id="3" name="Notes Placeholder 2"/>
+          <p:cNvSpPr>
+            <a:spLocks noGrp="1"/>
+          </p:cNvSpPr>
+          <p:nvPr>
+            <p:ph type="body" idx="1"/>
+          </p:nvPr>
+        </p:nvSpPr>
+        <p:spPr/>
+        <p:txBody>
+          <a:bodyPr/>
+          <a:lstStyle/>
+          <a:p>
+            <a:r>
+              <a:rPr lang="en-US" dirty="0"/>
+              <a:t/>
+            </a:r>
+            <a:endParaRPr lang="en-US" dirty="0"/>
+          </a:p>
+        </p:txBody>
+      </p:sp>
+      <p:sp>
+        <p:nvSpPr>
+          <p:cNvPr id="4" name="Slide Number Placeholder 3"/>
+          <p:cNvSpPr>
+            <a:spLocks noGrp="1"/>
+          </p:cNvSpPr>
+          <p:nvPr>
+            <p:ph type="sldNum" sz="quarter" idx="10"/>
+          </p:nvPr>
+        </p:nvSpPr>
+        <p:spPr/>
+        <p:txBody>
+          <a:bodyPr/>
+          <a:lstStyle/>
+          <a:p>
+            <a:fld id="{F7021451-1387-4CA6-816F-3879F97B5CBC}" type="slidenum">
+              <a:rPr lang="en-US"/>
+              <a:t>20</a:t>
+            </a:fld>
+            <a:endParaRPr lang="en-US"/>
+          </a:p>
+        </p:txBody>
+      </p:sp>
+    </p:spTree>
+    <p:extLst>
+      <p:ext uri="{BB962C8B-B14F-4D97-AF65-F5344CB8AC3E}">
+        <p14:creationId xmlns:p14="http://schemas.microsoft.com/office/powerpoint/2010/main" val="1024086991"/>
+      </p:ext>
+    </p:extLst>
+  </p:cSld>
+  <p:clrMapOvr>
+    <a:masterClrMapping/>
+  </p:clrMapOvr>
+</p:notes>
+</file>
+
+<file path=ppt/notesSlides/notesSlide21.xml><?xml version="1.0" encoding="utf-8"?>
+<p:notes xmlns:a="http://schemas.openxmlformats.org/drawingml/2006/main" xmlns:r="http://schemas.openxmlformats.org/officeDocument/2006/relationships" xmlns:p="http://schemas.openxmlformats.org/presentationml/2006/main">
+  <p:cSld>
+    <p:spTree>
+      <p:nvGrpSpPr>
+        <p:cNvPr id="1" name=""/>
+        <p:cNvGrpSpPr/>
+        <p:nvPr/>
+      </p:nvGrpSpPr>
+      <p:grpSpPr>
+        <a:xfrm>
+          <a:off x="0" y="0"/>
+          <a:ext cx="0" cy="0"/>
+          <a:chOff x="0" y="0"/>
+          <a:chExt cx="0" cy="0"/>
+        </a:xfrm>
+      </p:grpSpPr>
+      <p:sp>
+        <p:nvSpPr>
+          <p:cNvPr id="2" name="Slide Image Placeholder 1"/>
+          <p:cNvSpPr>
+            <a:spLocks noGrp="1" noRot="1" noChangeAspect="1"/>
+          </p:cNvSpPr>
+          <p:nvPr>
+            <p:ph type="sldImg"/>
+          </p:nvPr>
+        </p:nvSpPr>
+        <p:spPr/>
+      </p:sp>
+      <p:sp>
+        <p:nvSpPr>
+          <p:cNvPr id="3" name="Notes Placeholder 2"/>
+          <p:cNvSpPr>
+            <a:spLocks noGrp="1"/>
+          </p:cNvSpPr>
+          <p:nvPr>
+            <p:ph type="body" idx="1"/>
+          </p:nvPr>
+        </p:nvSpPr>
+        <p:spPr/>
+        <p:txBody>
+          <a:bodyPr/>
+          <a:lstStyle/>
+          <a:p>
+            <a:r>
+              <a:rPr lang="en-US" dirty="0"/>
+              <a:t/>
+            </a:r>
+            <a:endParaRPr lang="en-US" dirty="0"/>
+          </a:p>
+        </p:txBody>
+      </p:sp>
+      <p:sp>
+        <p:nvSpPr>
+          <p:cNvPr id="4" name="Slide Number Placeholder 3"/>
+          <p:cNvSpPr>
+            <a:spLocks noGrp="1"/>
+          </p:cNvSpPr>
+          <p:nvPr>
+            <p:ph type="sldNum" sz="quarter" idx="10"/>
+          </p:nvPr>
+        </p:nvSpPr>
+        <p:spPr/>
+        <p:txBody>
+          <a:bodyPr/>
+          <a:lstStyle/>
+          <a:p>
+            <a:fld id="{F7021451-1387-4CA6-816F-3879F97B5CBC}" type="slidenum">
+              <a:rPr lang="en-US"/>
+              <a:t>21</a:t>
+            </a:fld>
+            <a:endParaRPr lang="en-US"/>
+          </a:p>
+        </p:txBody>
+      </p:sp>
+    </p:spTree>
+    <p:extLst>
+      <p:ext uri="{BB962C8B-B14F-4D97-AF65-F5344CB8AC3E}">
+        <p14:creationId xmlns:p14="http://schemas.microsoft.com/office/powerpoint/2010/main" val="1024086991"/>
+      </p:ext>
+    </p:extLst>
+  </p:cSld>
+  <p:clrMapOvr>
+    <a:masterClrMapping/>
+  </p:clrMapOvr>
+</p:notes>
+</file>
+
+<file path=ppt/notesSlides/notesSlide22.xml><?xml version="1.0" encoding="utf-8"?>
+<p:notes xmlns:a="http://schemas.openxmlformats.org/drawingml/2006/main" xmlns:r="http://schemas.openxmlformats.org/officeDocument/2006/relationships" xmlns:p="http://schemas.openxmlformats.org/presentationml/2006/main">
+  <p:cSld>
+    <p:spTree>
+      <p:nvGrpSpPr>
+        <p:cNvPr id="1" name=""/>
+        <p:cNvGrpSpPr/>
+        <p:nvPr/>
+      </p:nvGrpSpPr>
+      <p:grpSpPr>
+        <a:xfrm>
+          <a:off x="0" y="0"/>
+          <a:ext cx="0" cy="0"/>
+          <a:chOff x="0" y="0"/>
+          <a:chExt cx="0" cy="0"/>
+        </a:xfrm>
+      </p:grpSpPr>
+      <p:sp>
+        <p:nvSpPr>
+          <p:cNvPr id="2" name="Slide Image Placeholder 1"/>
+          <p:cNvSpPr>
+            <a:spLocks noGrp="1" noRot="1" noChangeAspect="1"/>
+          </p:cNvSpPr>
+          <p:nvPr>
+            <p:ph type="sldImg"/>
+          </p:nvPr>
+        </p:nvSpPr>
+        <p:spPr/>
+      </p:sp>
+      <p:sp>
+        <p:nvSpPr>
+          <p:cNvPr id="3" name="Notes Placeholder 2"/>
+          <p:cNvSpPr>
+            <a:spLocks noGrp="1"/>
+          </p:cNvSpPr>
+          <p:nvPr>
+            <p:ph type="body" idx="1"/>
+          </p:nvPr>
+        </p:nvSpPr>
+        <p:spPr/>
+        <p:txBody>
+          <a:bodyPr/>
+          <a:lstStyle/>
+          <a:p>
+            <a:r>
+              <a:rPr lang="en-US" dirty="0"/>
+              <a:t/>
+            </a:r>
+            <a:endParaRPr lang="en-US" dirty="0"/>
+          </a:p>
+        </p:txBody>
+      </p:sp>
+      <p:sp>
+        <p:nvSpPr>
+          <p:cNvPr id="4" name="Slide Number Placeholder 3"/>
+          <p:cNvSpPr>
+            <a:spLocks noGrp="1"/>
+          </p:cNvSpPr>
+          <p:nvPr>
+            <p:ph type="sldNum" sz="quarter" idx="10"/>
+          </p:nvPr>
+        </p:nvSpPr>
+        <p:spPr/>
+        <p:txBody>
+          <a:bodyPr/>
+          <a:lstStyle/>
+          <a:p>
+            <a:fld id="{F7021451-1387-4CA6-816F-3879F97B5CBC}" type="slidenum">
+              <a:rPr lang="en-US"/>
+              <a:t>22</a:t>
+            </a:fld>
+            <a:endParaRPr lang="en-US"/>
+          </a:p>
+        </p:txBody>
+      </p:sp>
+    </p:spTree>
+    <p:extLst>
+      <p:ext uri="{BB962C8B-B14F-4D97-AF65-F5344CB8AC3E}">
+        <p14:creationId xmlns:p14="http://schemas.microsoft.com/office/powerpoint/2010/main" val="1024086991"/>
+      </p:ext>
+    </p:extLst>
+  </p:cSld>
+  <p:clrMapOvr>
+    <a:masterClrMapping/>
+  </p:clrMapOvr>
+</p:notes>
+</file>
+
+<file path=ppt/notesSlides/notesSlide23.xml><?xml version="1.0" encoding="utf-8"?>
+<p:notes xmlns:a="http://schemas.openxmlformats.org/drawingml/2006/main" xmlns:r="http://schemas.openxmlformats.org/officeDocument/2006/relationships" xmlns:p="http://schemas.openxmlformats.org/presentationml/2006/main">
+  <p:cSld>
+    <p:spTree>
+      <p:nvGrpSpPr>
+        <p:cNvPr id="1" name=""/>
+        <p:cNvGrpSpPr/>
+        <p:nvPr/>
+      </p:nvGrpSpPr>
+      <p:grpSpPr>
+        <a:xfrm>
+          <a:off x="0" y="0"/>
+          <a:ext cx="0" cy="0"/>
+          <a:chOff x="0" y="0"/>
+          <a:chExt cx="0" cy="0"/>
+        </a:xfrm>
+      </p:grpSpPr>
+      <p:sp>
+        <p:nvSpPr>
+          <p:cNvPr id="2" name="Slide Image Placeholder 1"/>
+          <p:cNvSpPr>
+            <a:spLocks noGrp="1" noRot="1" noChangeAspect="1"/>
+          </p:cNvSpPr>
+          <p:nvPr>
+            <p:ph type="sldImg"/>
+          </p:nvPr>
+        </p:nvSpPr>
+        <p:spPr/>
+      </p:sp>
+      <p:sp>
+        <p:nvSpPr>
+          <p:cNvPr id="3" name="Notes Placeholder 2"/>
+          <p:cNvSpPr>
+            <a:spLocks noGrp="1"/>
+          </p:cNvSpPr>
+          <p:nvPr>
+            <p:ph type="body" idx="1"/>
+          </p:nvPr>
+        </p:nvSpPr>
+        <p:spPr/>
+        <p:txBody>
+          <a:bodyPr/>
+          <a:lstStyle/>
+          <a:p>
+            <a:r>
+              <a:rPr lang="en-US" dirty="0"/>
+              <a:t/>
+            </a:r>
+            <a:endParaRPr lang="en-US" dirty="0"/>
+          </a:p>
+        </p:txBody>
+      </p:sp>
+      <p:sp>
+        <p:nvSpPr>
+          <p:cNvPr id="4" name="Slide Number Placeholder 3"/>
+          <p:cNvSpPr>
+            <a:spLocks noGrp="1"/>
+          </p:cNvSpPr>
+          <p:nvPr>
+            <p:ph type="sldNum" sz="quarter" idx="10"/>
+          </p:nvPr>
+        </p:nvSpPr>
+        <p:spPr/>
+        <p:txBody>
+          <a:bodyPr/>
+          <a:lstStyle/>
+          <a:p>
+            <a:fld id="{F7021451-1387-4CA6-816F-3879F97B5CBC}" type="slidenum">
+              <a:rPr lang="en-US"/>
+              <a:t>23</a:t>
+            </a:fld>
+            <a:endParaRPr lang="en-US"/>
+          </a:p>
+        </p:txBody>
+      </p:sp>
+    </p:spTree>
+    <p:extLst>
+      <p:ext uri="{BB962C8B-B14F-4D97-AF65-F5344CB8AC3E}">
+        <p14:creationId xmlns:p14="http://schemas.microsoft.com/office/powerpoint/2010/main" val="1024086991"/>
+      </p:ext>
+    </p:extLst>
+  </p:cSld>
+  <p:clrMapOvr>
+    <a:masterClrMapping/>
+  </p:clrMapOvr>
+</p:notes>
+</file>
+
+<file path=ppt/notesSlides/notesSlide24.xml><?xml version="1.0" encoding="utf-8"?>
+<p:notes xmlns:a="http://schemas.openxmlformats.org/drawingml/2006/main" xmlns:r="http://schemas.openxmlformats.org/officeDocument/2006/relationships" xmlns:p="http://schemas.openxmlformats.org/presentationml/2006/main">
+  <p:cSld>
+    <p:spTree>
+      <p:nvGrpSpPr>
+        <p:cNvPr id="1" name=""/>
+        <p:cNvGrpSpPr/>
+        <p:nvPr/>
+      </p:nvGrpSpPr>
+      <p:grpSpPr>
+        <a:xfrm>
+          <a:off x="0" y="0"/>
+          <a:ext cx="0" cy="0"/>
+          <a:chOff x="0" y="0"/>
+          <a:chExt cx="0" cy="0"/>
+        </a:xfrm>
+      </p:grpSpPr>
+      <p:sp>
+        <p:nvSpPr>
+          <p:cNvPr id="2" name="Slide Image Placeholder 1"/>
+          <p:cNvSpPr>
+            <a:spLocks noGrp="1" noRot="1" noChangeAspect="1"/>
+          </p:cNvSpPr>
+          <p:nvPr>
+            <p:ph type="sldImg"/>
+          </p:nvPr>
+        </p:nvSpPr>
+        <p:spPr/>
+      </p:sp>
+      <p:sp>
+        <p:nvSpPr>
+          <p:cNvPr id="3" name="Notes Placeholder 2"/>
+          <p:cNvSpPr>
+            <a:spLocks noGrp="1"/>
+          </p:cNvSpPr>
+          <p:nvPr>
+            <p:ph type="body" idx="1"/>
+          </p:nvPr>
+        </p:nvSpPr>
+        <p:spPr/>
+        <p:txBody>
+          <a:bodyPr/>
+          <a:lstStyle/>
+          <a:p>
+            <a:r>
+              <a:rPr lang="en-US" dirty="0"/>
+              <a:t/>
+            </a:r>
+            <a:endParaRPr lang="en-US" dirty="0"/>
+          </a:p>
+        </p:txBody>
+      </p:sp>
+      <p:sp>
+        <p:nvSpPr>
+          <p:cNvPr id="4" name="Slide Number Placeholder 3"/>
+          <p:cNvSpPr>
+            <a:spLocks noGrp="1"/>
+          </p:cNvSpPr>
+          <p:nvPr>
+            <p:ph type="sldNum" sz="quarter" idx="10"/>
+          </p:nvPr>
+        </p:nvSpPr>
+        <p:spPr/>
+        <p:txBody>
+          <a:bodyPr/>
+          <a:lstStyle/>
+          <a:p>
+            <a:fld id="{F7021451-1387-4CA6-816F-3879F97B5CBC}" type="slidenum">
+              <a:rPr lang="en-US"/>
+              <a:t>24</a:t>
+            </a:fld>
+            <a:endParaRPr lang="en-US"/>
+          </a:p>
+        </p:txBody>
+      </p:sp>
+    </p:spTree>
+    <p:extLst>
+      <p:ext uri="{BB962C8B-B14F-4D97-AF65-F5344CB8AC3E}">
+        <p14:creationId xmlns:p14="http://schemas.microsoft.com/office/powerpoint/2010/main" val="1024086991"/>
+      </p:ext>
+    </p:extLst>
+  </p:cSld>
+  <p:clrMapOvr>
+    <a:masterClrMapping/>
+  </p:clrMapOvr>
+</p:notes>
+</file>
+
+<file path=ppt/notesSlides/notesSlide25.xml><?xml version="1.0" encoding="utf-8"?>
+<p:notes xmlns:a="http://schemas.openxmlformats.org/drawingml/2006/main" xmlns:r="http://schemas.openxmlformats.org/officeDocument/2006/relationships" xmlns:p="http://schemas.openxmlformats.org/presentationml/2006/main">
+  <p:cSld>
+    <p:spTree>
+      <p:nvGrpSpPr>
+        <p:cNvPr id="1" name=""/>
+        <p:cNvGrpSpPr/>
+        <p:nvPr/>
+      </p:nvGrpSpPr>
+      <p:grpSpPr>
+        <a:xfrm>
+          <a:off x="0" y="0"/>
+          <a:ext cx="0" cy="0"/>
+          <a:chOff x="0" y="0"/>
+          <a:chExt cx="0" cy="0"/>
+        </a:xfrm>
+      </p:grpSpPr>
+      <p:sp>
+        <p:nvSpPr>
+          <p:cNvPr id="2" name="Slide Image Placeholder 1"/>
+          <p:cNvSpPr>
+            <a:spLocks noGrp="1" noRot="1" noChangeAspect="1"/>
+          </p:cNvSpPr>
+          <p:nvPr>
+            <p:ph type="sldImg"/>
+          </p:nvPr>
+        </p:nvSpPr>
+        <p:spPr/>
+      </p:sp>
+      <p:sp>
+        <p:nvSpPr>
+          <p:cNvPr id="3" name="Notes Placeholder 2"/>
+          <p:cNvSpPr>
+            <a:spLocks noGrp="1"/>
+          </p:cNvSpPr>
+          <p:nvPr>
+            <p:ph type="body" idx="1"/>
+          </p:nvPr>
+        </p:nvSpPr>
+        <p:spPr/>
+        <p:txBody>
+          <a:bodyPr/>
+          <a:lstStyle/>
+          <a:p>
+            <a:r>
+              <a:rPr lang="en-US" dirty="0"/>
+              <a:t/>
+            </a:r>
+            <a:endParaRPr lang="en-US" dirty="0"/>
+          </a:p>
+        </p:txBody>
+      </p:sp>
+      <p:sp>
+        <p:nvSpPr>
+          <p:cNvPr id="4" name="Slide Number Placeholder 3"/>
+          <p:cNvSpPr>
+            <a:spLocks noGrp="1"/>
+          </p:cNvSpPr>
+          <p:nvPr>
+            <p:ph type="sldNum" sz="quarter" idx="10"/>
+          </p:nvPr>
+        </p:nvSpPr>
+        <p:spPr/>
+        <p:txBody>
+          <a:bodyPr/>
+          <a:lstStyle/>
+          <a:p>
+            <a:fld id="{F7021451-1387-4CA6-816F-3879F97B5CBC}" type="slidenum">
+              <a:rPr lang="en-US"/>
+              <a:t>25</a:t>
+            </a:fld>
+            <a:endParaRPr lang="en-US"/>
+          </a:p>
+        </p:txBody>
+      </p:sp>
+    </p:spTree>
+    <p:extLst>
+      <p:ext uri="{BB962C8B-B14F-4D97-AF65-F5344CB8AC3E}">
+        <p14:creationId xmlns:p14="http://schemas.microsoft.com/office/powerpoint/2010/main" val="1024086991"/>
+      </p:ext>
+    </p:extLst>
+  </p:cSld>
+  <p:clrMapOvr>
+    <a:masterClrMapping/>
+  </p:clrMapOvr>
+</p:notes>
+</file>
+
+<file path=ppt/notesSlides/notesSlide26.xml><?xml version="1.0" encoding="utf-8"?>
+<p:notes xmlns:a="http://schemas.openxmlformats.org/drawingml/2006/main" xmlns:r="http://schemas.openxmlformats.org/officeDocument/2006/relationships" xmlns:p="http://schemas.openxmlformats.org/presentationml/2006/main">
+  <p:cSld>
+    <p:spTree>
+      <p:nvGrpSpPr>
+        <p:cNvPr id="1" name=""/>
+        <p:cNvGrpSpPr/>
+        <p:nvPr/>
+      </p:nvGrpSpPr>
+      <p:grpSpPr>
+        <a:xfrm>
+          <a:off x="0" y="0"/>
+          <a:ext cx="0" cy="0"/>
+          <a:chOff x="0" y="0"/>
+          <a:chExt cx="0" cy="0"/>
+        </a:xfrm>
+      </p:grpSpPr>
+      <p:sp>
+        <p:nvSpPr>
+          <p:cNvPr id="2" name="Slide Image Placeholder 1"/>
+          <p:cNvSpPr>
+            <a:spLocks noGrp="1" noRot="1" noChangeAspect="1"/>
+          </p:cNvSpPr>
+          <p:nvPr>
+            <p:ph type="sldImg"/>
+          </p:nvPr>
+        </p:nvSpPr>
+        <p:spPr/>
+      </p:sp>
+      <p:sp>
+        <p:nvSpPr>
+          <p:cNvPr id="3" name="Notes Placeholder 2"/>
+          <p:cNvSpPr>
+            <a:spLocks noGrp="1"/>
+          </p:cNvSpPr>
+          <p:nvPr>
+            <p:ph type="body" idx="1"/>
+          </p:nvPr>
+        </p:nvSpPr>
+        <p:spPr/>
+        <p:txBody>
+          <a:bodyPr/>
+          <a:lstStyle/>
+          <a:p>
+            <a:r>
+              <a:rPr lang="en-US" dirty="0"/>
+              <a:t/>
+            </a:r>
+            <a:endParaRPr lang="en-US" dirty="0"/>
+          </a:p>
+        </p:txBody>
+      </p:sp>
+      <p:sp>
+        <p:nvSpPr>
+          <p:cNvPr id="4" name="Slide Number Placeholder 3"/>
+          <p:cNvSpPr>
+            <a:spLocks noGrp="1"/>
+          </p:cNvSpPr>
+          <p:nvPr>
+            <p:ph type="sldNum" sz="quarter" idx="10"/>
+          </p:nvPr>
+        </p:nvSpPr>
+        <p:spPr/>
+        <p:txBody>
+          <a:bodyPr/>
+          <a:lstStyle/>
+          <a:p>
+            <a:fld id="{F7021451-1387-4CA6-816F-3879F97B5CBC}" type="slidenum">
+              <a:rPr lang="en-US"/>
+              <a:t>26</a:t>
             </a:fld>
             <a:endParaRPr lang="en-US"/>
           </a:p>
@@ -2985,7 +5049,7 @@
                 <a:ea typeface="IBM Plex Sans" pitchFamily="34" charset="-122"/>
                 <a:cs typeface="IBM Plex Sans" pitchFamily="34" charset="-120"/>
               </a:rPr>
-              <a:t>10 / 11</a:t>
+              <a:t>10 / 26</a:t>
             </a:r>
             <a:endParaRPr lang="en-US" sz="1100" dirty="0"/>
           </a:p>
@@ -3024,7 +5088,7 @@
                 <a:ea typeface="IBM Plex Sans" pitchFamily="34" charset="-122"/>
                 <a:cs typeface="IBM Plex Sans" pitchFamily="34" charset="-120"/>
               </a:rPr>
-              <a:t>8. Speaker Notes / Appendix — Data &amp;amp; Sources</a:t>
+              <a:t>Why universities care</a:t>
             </a:r>
             <a:endParaRPr lang="en-US" sz="2600" dirty="0"/>
           </a:p>
@@ -3059,7 +5123,7 @@
         <p:spPr>
           <a:xfrm>
             <a:off x="640080" y="1737360"/>
-            <a:ext cx="5120640" cy="4206240"/>
+            <a:ext cx="10911535" cy="4206240"/>
           </a:xfrm>
           <a:prstGeom prst="rect">
             <a:avLst/>
@@ -3087,8 +5151,11 @@
                 <a:ea typeface="IBM Plex Sans" pitchFamily="34" charset="-122"/>
                 <a:cs typeface="IBM Plex Sans" pitchFamily="34" charset="-120"/>
               </a:rPr>
-              <a:t>Sources</a:t>
-            </a:r>
+              <a:t>Turning thoughts into structured, defensible, communicable work is the core academic act — it's what a thesis, a paper, a lecture, and a dissertation…</a:t>
+            </a:r>
+            <a:endParaRPr lang="en-US" sz="1800" dirty="0"/>
+          </a:p>
+          <a:p>
             <a:pPr algn="l" marL="228600" indent="-228600">
               <a:spcAft>
                 <a:spcPts val="1000"/>
@@ -3105,28 +5172,33 @@
                 <a:ea typeface="IBM Plex Sans" pitchFamily="34" charset="-122"/>
                 <a:cs typeface="IBM Plex Sans" pitchFamily="34" charset="-120"/>
               </a:rPr>
-              <a:t>The numbers at a glance</a:t>
+              <a:t>Idea Engineering is both a tool and a discipline for thinkers, researchers, and students.</a:t>
             </a:r>
             <a:endParaRPr lang="en-US" sz="1800" dirty="0"/>
           </a:p>
-        </p:txBody>
-      </p:sp>
-      <p:graphicFrame>
-        <p:nvGraphicFramePr>
-          <p:cNvPr id="13" name="Chart 0" descr=""/>
-          <p:cNvGraphicFramePr/>
-          <p:nvPr/>
-        </p:nvGraphicFramePr>
-        <p:xfrm>
-          <a:off x="6126480" y="1737360"/>
-          <a:ext cx="5394960" cy="4023360"/>
-        </p:xfrm>
-        <a:graphic xmlns:a="http://schemas.openxmlformats.org/drawingml/2006/main">
-          <a:graphicData uri="http://schemas.openxmlformats.org/drawingml/2006/chart">
-            <c:chart xmlns:c="http://schemas.openxmlformats.org/drawingml/2006/chart" r:id="rId1"/>
-          </a:graphicData>
-        </a:graphic>
-      </p:graphicFrame>
+          <a:p>
+            <a:pPr algn="l" marL="228600" indent="-228600">
+              <a:spcAft>
+                <a:spcPts val="1000"/>
+              </a:spcAft>
+              <a:buSzPct val="100000"/>
+              <a:buChar char="•"/>
+            </a:pPr>
+            <a:r>
+              <a:rPr lang="en-US" sz="1800" dirty="0">
+                <a:solidFill>
+                  <a:srgbClr val="F5F8FF"/>
+                </a:solidFill>
+                <a:latin typeface="IBM Plex Sans" pitchFamily="34" charset="0"/>
+                <a:ea typeface="IBM Plex Sans" pitchFamily="34" charset="-122"/>
+                <a:cs typeface="IBM Plex Sans" pitchFamily="34" charset="-120"/>
+              </a:rPr>
+              <a:t>A university is, in effect, an idea-engineering institution that never had the software.</a:t>
+            </a:r>
+            <a:endParaRPr lang="en-US" sz="1800" dirty="0"/>
+          </a:p>
+        </p:txBody>
+      </p:sp>
     </p:spTree>
   </p:cSld>
   <p:clrMapOvr>
@@ -3181,92 +5253,14 @@
       </p:sp>
       <p:sp>
         <p:nvSpPr>
-          <p:cNvPr id="3" name="Text 1"/>
-          <p:cNvSpPr/>
-          <p:nvPr/>
-        </p:nvSpPr>
-        <p:spPr>
-          <a:xfrm>
-            <a:off x="640080" y="2468880"/>
-            <a:ext cx="10911535" cy="1097280"/>
-          </a:xfrm>
-          <a:prstGeom prst="rect">
-            <a:avLst/>
-          </a:prstGeom>
-          <a:noFill/>
-          <a:ln/>
-        </p:spPr>
-        <p:txBody>
-          <a:bodyPr wrap="square" rtlCol="0" anchor="ctr"/>
-          <a:lstStyle/>
-          <a:p>
-            <a:pPr algn="ctr" indent="0" marL="0">
-              <a:buNone/>
-            </a:pPr>
-            <a:r>
-              <a:rPr lang="en-US" sz="4400" b="1" dirty="0">
-                <a:solidFill>
-                  <a:srgbClr val="F5F8FF"/>
-                </a:solidFill>
-                <a:latin typeface="IBM Plex Sans" pitchFamily="34" charset="0"/>
-                <a:ea typeface="IBM Plex Sans" pitchFamily="34" charset="-122"/>
-                <a:cs typeface="IBM Plex Sans" pitchFamily="34" charset="-120"/>
-              </a:rPr>
-              <a:t>Thank you</a:t>
-            </a:r>
-            <a:endParaRPr lang="en-US" sz="4400" dirty="0"/>
-          </a:p>
-        </p:txBody>
-      </p:sp>
-      <p:sp>
-        <p:nvSpPr>
-          <p:cNvPr id="4" name="Text 2"/>
-          <p:cNvSpPr/>
-          <p:nvPr/>
-        </p:nvSpPr>
-        <p:spPr>
-          <a:xfrm>
-            <a:off x="640080" y="3566160"/>
-            <a:ext cx="10911535" cy="731520"/>
-          </a:xfrm>
-          <a:prstGeom prst="rect">
-            <a:avLst/>
-          </a:prstGeom>
-          <a:noFill/>
-          <a:ln/>
-        </p:spPr>
-        <p:txBody>
-          <a:bodyPr wrap="square" rtlCol="0" anchor="ctr"/>
-          <a:lstStyle/>
-          <a:p>
-            <a:pPr algn="ctr" indent="0" marL="0">
-              <a:buNone/>
-            </a:pPr>
-            <a:r>
-              <a:rPr lang="en-US" sz="1800" dirty="0">
-                <a:solidFill>
-                  <a:srgbClr val="93A4B8"/>
-                </a:solidFill>
-                <a:latin typeface="IBM Plex Sans" pitchFamily="34" charset="0"/>
-                <a:ea typeface="IBM Plex Sans" pitchFamily="34" charset="-122"/>
-                <a:cs typeface="IBM Plex Sans" pitchFamily="34" charset="-120"/>
-              </a:rPr>
-              <a:t>Idea Engineering — A New Class of AI App (and What Building One with AI Taught Me)</a:t>
-            </a:r>
-            <a:endParaRPr lang="en-US" sz="1800" dirty="0"/>
-          </a:p>
-        </p:txBody>
-      </p:sp>
-      <p:sp>
-        <p:nvSpPr>
-          <p:cNvPr id="5" name="Shape 3"/>
-          <p:cNvSpPr/>
-          <p:nvPr/>
-        </p:nvSpPr>
-        <p:spPr>
-          <a:xfrm>
-            <a:off x="5410048" y="4709160"/>
-            <a:ext cx="365760" cy="365760"/>
+          <p:cNvPr id="3" name="Shape 1"/>
+          <p:cNvSpPr/>
+          <p:nvPr/>
+        </p:nvSpPr>
+        <p:spPr>
+          <a:xfrm>
+            <a:off x="640080" y="6291072"/>
+            <a:ext cx="274320" cy="274320"/>
           </a:xfrm>
           <a:prstGeom prst="roundRect">
             <a:avLst>
@@ -3281,18 +5275,18 @@
       </p:sp>
       <p:sp>
         <p:nvSpPr>
-          <p:cNvPr id="6" name="Shape 4"/>
-          <p:cNvSpPr/>
-          <p:nvPr/>
-        </p:nvSpPr>
-        <p:spPr>
-          <a:xfrm>
-            <a:off x="5483200" y="4913986"/>
-            <a:ext cx="43891" cy="73152"/>
+          <p:cNvPr id="4" name="Shape 2"/>
+          <p:cNvSpPr/>
+          <p:nvPr/>
+        </p:nvSpPr>
+        <p:spPr>
+          <a:xfrm>
+            <a:off x="694944" y="6444691"/>
+            <a:ext cx="32918" cy="54864"/>
           </a:xfrm>
           <a:prstGeom prst="roundRect">
             <a:avLst>
-              <a:gd name="adj" fmla="val 50000"/>
+              <a:gd name="adj" fmla="val 50001"/>
             </a:avLst>
           </a:prstGeom>
           <a:solidFill>
@@ -3303,18 +5297,18 @@
       </p:sp>
       <p:sp>
         <p:nvSpPr>
-          <p:cNvPr id="7" name="Shape 5"/>
-          <p:cNvSpPr/>
-          <p:nvPr/>
-        </p:nvSpPr>
-        <p:spPr>
-          <a:xfrm>
-            <a:off x="5549036" y="4862779"/>
-            <a:ext cx="43891" cy="124358"/>
+          <p:cNvPr id="5" name="Shape 3"/>
+          <p:cNvSpPr/>
+          <p:nvPr/>
+        </p:nvSpPr>
+        <p:spPr>
+          <a:xfrm>
+            <a:off x="744322" y="6406286"/>
+            <a:ext cx="32918" cy="93269"/>
           </a:xfrm>
           <a:prstGeom prst="roundRect">
             <a:avLst>
-              <a:gd name="adj" fmla="val 50000"/>
+              <a:gd name="adj" fmla="val 50001"/>
             </a:avLst>
           </a:prstGeom>
           <a:solidFill>
@@ -3325,18 +5319,18 @@
       </p:sp>
       <p:sp>
         <p:nvSpPr>
-          <p:cNvPr id="8" name="Shape 6"/>
-          <p:cNvSpPr/>
-          <p:nvPr/>
-        </p:nvSpPr>
-        <p:spPr>
-          <a:xfrm>
-            <a:off x="5614873" y="4811573"/>
-            <a:ext cx="43891" cy="175565"/>
+          <p:cNvPr id="6" name="Shape 4"/>
+          <p:cNvSpPr/>
+          <p:nvPr/>
+        </p:nvSpPr>
+        <p:spPr>
+          <a:xfrm>
+            <a:off x="793699" y="6367882"/>
+            <a:ext cx="32918" cy="131674"/>
           </a:xfrm>
           <a:prstGeom prst="roundRect">
             <a:avLst>
-              <a:gd name="adj" fmla="val 50000"/>
+              <a:gd name="adj" fmla="val 50001"/>
             </a:avLst>
           </a:prstGeom>
           <a:solidFill>
@@ -3347,18 +5341,18 @@
       </p:sp>
       <p:sp>
         <p:nvSpPr>
-          <p:cNvPr id="9" name="Shape 7"/>
-          <p:cNvSpPr/>
-          <p:nvPr/>
-        </p:nvSpPr>
-        <p:spPr>
-          <a:xfrm>
-            <a:off x="5680710" y="4760366"/>
-            <a:ext cx="43891" cy="226771"/>
+          <p:cNvPr id="7" name="Shape 5"/>
+          <p:cNvSpPr/>
+          <p:nvPr/>
+        </p:nvSpPr>
+        <p:spPr>
+          <a:xfrm>
+            <a:off x="843077" y="6329477"/>
+            <a:ext cx="32918" cy="170078"/>
           </a:xfrm>
           <a:prstGeom prst="roundRect">
             <a:avLst>
-              <a:gd name="adj" fmla="val 50000"/>
+              <a:gd name="adj" fmla="val 50001"/>
             </a:avLst>
           </a:prstGeom>
           <a:solidFill>
@@ -3369,14 +5363,14 @@
       </p:sp>
       <p:sp>
         <p:nvSpPr>
-          <p:cNvPr id="10" name="Text 8"/>
-          <p:cNvSpPr/>
-          <p:nvPr/>
-        </p:nvSpPr>
-        <p:spPr>
-          <a:xfrm>
-            <a:off x="5821528" y="4690872"/>
-            <a:ext cx="2743200" cy="402336"/>
+          <p:cNvPr id="8" name="Text 6"/>
+          <p:cNvSpPr/>
+          <p:nvPr/>
+        </p:nvSpPr>
+        <p:spPr>
+          <a:xfrm>
+            <a:off x="1024128" y="6254496"/>
+            <a:ext cx="2743200" cy="347472"/>
           </a:xfrm>
           <a:prstGeom prst="rect">
             <a:avLst/>
@@ -3392,7 +5386,7 @@
               <a:buNone/>
             </a:pPr>
             <a:r>
-              <a:rPr lang="en-US" sz="1400" b="1" dirty="0">
+              <a:rPr lang="en-US" sz="1200" b="1" dirty="0">
                 <a:solidFill>
                   <a:srgbClr val="93A4B8"/>
                 </a:solidFill>
@@ -3400,9 +5394,3543 @@
                 <a:ea typeface="IBM Plex Sans" pitchFamily="34" charset="-122"/>
                 <a:cs typeface="IBM Plex Sans" pitchFamily="34" charset="-120"/>
               </a:rPr>
-              <a:t>Made with IdeaM</a:t>
-            </a:r>
-            <a:endParaRPr lang="en-US" sz="1400" dirty="0"/>
+              <a:t>IdeaM</a:t>
+            </a:r>
+            <a:endParaRPr lang="en-US" sz="1200" dirty="0"/>
+          </a:p>
+        </p:txBody>
+      </p:sp>
+      <p:sp>
+        <p:nvSpPr>
+          <p:cNvPr id="9" name="Text 7"/>
+          <p:cNvSpPr/>
+          <p:nvPr/>
+        </p:nvSpPr>
+        <p:spPr>
+          <a:xfrm>
+            <a:off x="10180015" y="6254496"/>
+            <a:ext cx="1371600" cy="347472"/>
+          </a:xfrm>
+          <a:prstGeom prst="rect">
+            <a:avLst/>
+          </a:prstGeom>
+          <a:noFill/>
+          <a:ln/>
+        </p:spPr>
+        <p:txBody>
+          <a:bodyPr wrap="square" rtlCol="0" anchor="ctr"/>
+          <a:lstStyle/>
+          <a:p>
+            <a:pPr algn="r" indent="0" marL="0">
+              <a:buNone/>
+            </a:pPr>
+            <a:r>
+              <a:rPr lang="en-US" sz="1100" dirty="0">
+                <a:solidFill>
+                  <a:srgbClr val="93A4B8"/>
+                </a:solidFill>
+                <a:latin typeface="IBM Plex Sans" pitchFamily="34" charset="0"/>
+                <a:ea typeface="IBM Plex Sans" pitchFamily="34" charset="-122"/>
+                <a:cs typeface="IBM Plex Sans" pitchFamily="34" charset="-120"/>
+              </a:rPr>
+              <a:t>11 / 26</a:t>
+            </a:r>
+            <a:endParaRPr lang="en-US" sz="1100" dirty="0"/>
+          </a:p>
+        </p:txBody>
+      </p:sp>
+      <p:sp>
+        <p:nvSpPr>
+          <p:cNvPr id="10" name="Text 8"/>
+          <p:cNvSpPr/>
+          <p:nvPr/>
+        </p:nvSpPr>
+        <p:spPr>
+          <a:xfrm>
+            <a:off x="640080" y="502920"/>
+            <a:ext cx="10911535" cy="822960"/>
+          </a:xfrm>
+          <a:prstGeom prst="rect">
+            <a:avLst/>
+          </a:prstGeom>
+          <a:noFill/>
+          <a:ln/>
+        </p:spPr>
+        <p:txBody>
+          <a:bodyPr wrap="square" rtlCol="0" anchor="t"/>
+          <a:lstStyle/>
+          <a:p>
+            <a:pPr algn="l" indent="0" marL="0">
+              <a:buNone/>
+            </a:pPr>
+            <a:r>
+              <a:rPr lang="en-US" sz="2600" b="1" dirty="0">
+                <a:solidFill>
+                  <a:srgbClr val="F5F8FF"/>
+                </a:solidFill>
+                <a:latin typeface="IBM Plex Sans" pitchFamily="34" charset="0"/>
+                <a:ea typeface="IBM Plex Sans" pitchFamily="34" charset="-122"/>
+                <a:cs typeface="IBM Plex Sans" pitchFamily="34" charset="-120"/>
+              </a:rPr>
+              <a:t>The AI Paradox</a:t>
+            </a:r>
+            <a:endParaRPr lang="en-US" sz="2600" dirty="0"/>
+          </a:p>
+        </p:txBody>
+      </p:sp>
+      <p:sp>
+        <p:nvSpPr>
+          <p:cNvPr id="11" name="Shape 9"/>
+          <p:cNvSpPr/>
+          <p:nvPr/>
+        </p:nvSpPr>
+        <p:spPr>
+          <a:xfrm>
+            <a:off x="640080" y="1325880"/>
+            <a:ext cx="1005840" cy="82296"/>
+          </a:xfrm>
+          <a:prstGeom prst="rect">
+            <a:avLst/>
+          </a:prstGeom>
+          <a:solidFill>
+            <a:srgbClr val="3898FF"/>
+          </a:solidFill>
+          <a:ln/>
+        </p:spPr>
+      </p:sp>
+      <p:sp>
+        <p:nvSpPr>
+          <p:cNvPr id="12" name="Text 10"/>
+          <p:cNvSpPr/>
+          <p:nvPr/>
+        </p:nvSpPr>
+        <p:spPr>
+          <a:xfrm>
+            <a:off x="640080" y="1737360"/>
+            <a:ext cx="5120640" cy="4206240"/>
+          </a:xfrm>
+          <a:prstGeom prst="rect">
+            <a:avLst/>
+          </a:prstGeom>
+          <a:noFill/>
+          <a:ln/>
+        </p:spPr>
+        <p:txBody>
+          <a:bodyPr wrap="square" rtlCol="0" anchor="t"/>
+          <a:lstStyle/>
+          <a:p>
+            <a:pPr algn="l" marL="228600" indent="-228600">
+              <a:spcAft>
+                <a:spcPts val="1000"/>
+              </a:spcAft>
+              <a:buSzPct val="100000"/>
+              <a:buChar char="•"/>
+            </a:pPr>
+            <a:r>
+              <a:rPr lang="en-US" sz="1800" dirty="0">
+                <a:solidFill>
+                  <a:srgbClr val="F5F8FF"/>
+                </a:solidFill>
+                <a:latin typeface="IBM Plex Sans" pitchFamily="34" charset="0"/>
+                <a:ea typeface="IBM Plex Sans" pitchFamily="34" charset="-122"/>
+                <a:cs typeface="IBM Plex Sans" pitchFamily="34" charset="-120"/>
+              </a:rPr>
+              <a:t>Open with the contradiction everyone in the room feels but hasn't named.</a:t>
+            </a:r>
+            <a:endParaRPr lang="en-US" sz="1800" dirty="0"/>
+          </a:p>
+          <a:p>
+            <a:pPr algn="l" marL="228600" indent="-228600">
+              <a:spcAft>
+                <a:spcPts val="1000"/>
+              </a:spcAft>
+              <a:buSzPct val="100000"/>
+              <a:buChar char="•"/>
+            </a:pPr>
+            <a:r>
+              <a:rPr lang="en-US" sz="1800" dirty="0">
+                <a:solidFill>
+                  <a:srgbClr val="F5F8FF"/>
+                </a:solidFill>
+                <a:latin typeface="IBM Plex Sans" pitchFamily="34" charset="0"/>
+                <a:ea typeface="IBM Plex Sans" pitchFamily="34" charset="-122"/>
+                <a:cs typeface="IBM Plex Sans" pitchFamily="34" charset="-120"/>
+              </a:rPr>
+              <a:t>In the 2025 Stack Overflow Developer Survey, roughly 80% of developers now use AI in their work — yet only about 29% actually trust the accuracy of…</a:t>
+            </a:r>
+            <a:endParaRPr lang="en-US" sz="1800" dirty="0"/>
+          </a:p>
+          <a:p>
+            <a:pPr algn="l" marL="228600" indent="-228600">
+              <a:spcAft>
+                <a:spcPts val="1000"/>
+              </a:spcAft>
+              <a:buSzPct val="100000"/>
+              <a:buChar char="•"/>
+            </a:pPr>
+            <a:r>
+              <a:rPr lang="en-US" sz="1800" dirty="0">
+                <a:solidFill>
+                  <a:srgbClr val="F5F8FF"/>
+                </a:solidFill>
+                <a:latin typeface="IBM Plex Sans" pitchFamily="34" charset="0"/>
+                <a:ea typeface="IBM Plex Sans" pitchFamily="34" charset="-122"/>
+                <a:cs typeface="IBM Plex Sans" pitchFamily="34" charset="-120"/>
+              </a:rPr>
+              <a:t>So: everyone uses it; almost nobody trusts it.</a:t>
+            </a:r>
+            <a:endParaRPr lang="en-US" sz="1800" dirty="0"/>
+          </a:p>
+          <a:p>
+            <a:pPr algn="l" marL="228600" indent="-228600">
+              <a:spcAft>
+                <a:spcPts val="1000"/>
+              </a:spcAft>
+              <a:buSzPct val="100000"/>
+              <a:buChar char="•"/>
+            </a:pPr>
+            <a:r>
+              <a:rPr lang="en-US" sz="1800" dirty="0">
+                <a:solidFill>
+                  <a:srgbClr val="F5F8FF"/>
+                </a:solidFill>
+                <a:latin typeface="IBM Plex Sans" pitchFamily="34" charset="0"/>
+                <a:ea typeface="IBM Plex Sans" pitchFamily="34" charset="-122"/>
+                <a:cs typeface="IBM Plex Sans" pitchFamily="34" charset="-120"/>
+              </a:rPr>
+              <a:t>That gap is the whole talk.</a:t>
+            </a:r>
+            <a:endParaRPr lang="en-US" sz="1800" dirty="0"/>
+          </a:p>
+          <a:p>
+            <a:pPr algn="l" marL="228600" indent="-228600">
+              <a:spcAft>
+                <a:spcPts val="1000"/>
+              </a:spcAft>
+              <a:buSzPct val="100000"/>
+              <a:buChar char="•"/>
+            </a:pPr>
+            <a:r>
+              <a:rPr lang="en-US" sz="1800" dirty="0">
+                <a:solidFill>
+                  <a:srgbClr val="F5F8FF"/>
+                </a:solidFill>
+                <a:latin typeface="IBM Plex Sans" pitchFamily="34" charset="0"/>
+                <a:ea typeface="IBM Plex Sans" pitchFamily="34" charset="-122"/>
+                <a:cs typeface="IBM Plex Sans" pitchFamily="34" charset="-120"/>
+              </a:rPr>
+              <a:t>Why do we lean on a tool we don't trust — and what would it take to close that gap?</a:t>
+            </a:r>
+            <a:endParaRPr lang="en-US" sz="1800" dirty="0"/>
+          </a:p>
+        </p:txBody>
+      </p:sp>
+      <p:graphicFrame>
+        <p:nvGraphicFramePr>
+          <p:cNvPr id="13" name="Chart 0" descr=""/>
+          <p:cNvGraphicFramePr/>
+          <p:nvPr/>
+        </p:nvGraphicFramePr>
+        <p:xfrm>
+          <a:off x="6126480" y="1737360"/>
+          <a:ext cx="5394960" cy="4023360"/>
+        </p:xfrm>
+        <a:graphic xmlns:a="http://schemas.openxmlformats.org/drawingml/2006/main">
+          <a:graphicData uri="http://schemas.openxmlformats.org/drawingml/2006/chart">
+            <c:chart xmlns:c="http://schemas.openxmlformats.org/drawingml/2006/chart" r:id="rId1"/>
+          </a:graphicData>
+        </a:graphic>
+      </p:graphicFrame>
+    </p:spTree>
+  </p:cSld>
+  <p:clrMapOvr>
+    <a:masterClrMapping/>
+  </p:clrMapOvr>
+</p:sld>
+</file>
+
+<file path=ppt/slides/slide12.xml><?xml version="1.0" encoding="utf-8"?>
+<p:sld xmlns:a="http://schemas.openxmlformats.org/drawingml/2006/main" xmlns:r="http://schemas.openxmlformats.org/officeDocument/2006/relationships" xmlns:p="http://schemas.openxmlformats.org/presentationml/2006/main">
+  <p:cSld name="Slide 12">
+    <p:bg>
+      <p:bgPr>
+        <a:solidFill>
+          <a:srgbClr val="0A1120"/>
+        </a:solidFill>
+      </p:bgPr>
+    </p:bg>
+    <p:spTree>
+      <p:nvGrpSpPr>
+        <p:cNvPr id="1" name=""/>
+        <p:cNvGrpSpPr/>
+        <p:nvPr/>
+      </p:nvGrpSpPr>
+      <p:grpSpPr>
+        <a:xfrm>
+          <a:off x="0" y="0"/>
+          <a:ext cx="0" cy="0"/>
+          <a:chOff x="0" y="0"/>
+          <a:chExt cx="0" cy="0"/>
+        </a:xfrm>
+      </p:grpSpPr>
+      <p:sp>
+        <p:nvSpPr>
+          <p:cNvPr id="2" name="Shape 0"/>
+          <p:cNvSpPr/>
+          <p:nvPr/>
+        </p:nvSpPr>
+        <p:spPr>
+          <a:xfrm>
+            <a:off x="0" y="0"/>
+            <a:ext cx="12191695" cy="109728"/>
+          </a:xfrm>
+          <a:prstGeom prst="rect">
+            <a:avLst/>
+          </a:prstGeom>
+          <a:solidFill>
+            <a:srgbClr val="3898FF"/>
+          </a:solidFill>
+          <a:ln/>
+        </p:spPr>
+      </p:sp>
+      <p:sp>
+        <p:nvSpPr>
+          <p:cNvPr id="3" name="Shape 1"/>
+          <p:cNvSpPr/>
+          <p:nvPr/>
+        </p:nvSpPr>
+        <p:spPr>
+          <a:xfrm>
+            <a:off x="640080" y="6291072"/>
+            <a:ext cx="274320" cy="274320"/>
+          </a:xfrm>
+          <a:prstGeom prst="roundRect">
+            <a:avLst>
+              <a:gd name="adj" fmla="val 22000"/>
+            </a:avLst>
+          </a:prstGeom>
+          <a:solidFill>
+            <a:srgbClr val="2563EB"/>
+          </a:solidFill>
+          <a:ln/>
+        </p:spPr>
+      </p:sp>
+      <p:sp>
+        <p:nvSpPr>
+          <p:cNvPr id="4" name="Shape 2"/>
+          <p:cNvSpPr/>
+          <p:nvPr/>
+        </p:nvSpPr>
+        <p:spPr>
+          <a:xfrm>
+            <a:off x="694944" y="6444691"/>
+            <a:ext cx="32918" cy="54864"/>
+          </a:xfrm>
+          <a:prstGeom prst="roundRect">
+            <a:avLst>
+              <a:gd name="adj" fmla="val 50001"/>
+            </a:avLst>
+          </a:prstGeom>
+          <a:solidFill>
+            <a:srgbClr val="FFFFFF"/>
+          </a:solidFill>
+          <a:ln/>
+        </p:spPr>
+      </p:sp>
+      <p:sp>
+        <p:nvSpPr>
+          <p:cNvPr id="5" name="Shape 3"/>
+          <p:cNvSpPr/>
+          <p:nvPr/>
+        </p:nvSpPr>
+        <p:spPr>
+          <a:xfrm>
+            <a:off x="744322" y="6406286"/>
+            <a:ext cx="32918" cy="93269"/>
+          </a:xfrm>
+          <a:prstGeom prst="roundRect">
+            <a:avLst>
+              <a:gd name="adj" fmla="val 50001"/>
+            </a:avLst>
+          </a:prstGeom>
+          <a:solidFill>
+            <a:srgbClr val="FFFFFF"/>
+          </a:solidFill>
+          <a:ln/>
+        </p:spPr>
+      </p:sp>
+      <p:sp>
+        <p:nvSpPr>
+          <p:cNvPr id="6" name="Shape 4"/>
+          <p:cNvSpPr/>
+          <p:nvPr/>
+        </p:nvSpPr>
+        <p:spPr>
+          <a:xfrm>
+            <a:off x="793699" y="6367882"/>
+            <a:ext cx="32918" cy="131674"/>
+          </a:xfrm>
+          <a:prstGeom prst="roundRect">
+            <a:avLst>
+              <a:gd name="adj" fmla="val 50001"/>
+            </a:avLst>
+          </a:prstGeom>
+          <a:solidFill>
+            <a:srgbClr val="FFFFFF"/>
+          </a:solidFill>
+          <a:ln/>
+        </p:spPr>
+      </p:sp>
+      <p:sp>
+        <p:nvSpPr>
+          <p:cNvPr id="7" name="Shape 5"/>
+          <p:cNvSpPr/>
+          <p:nvPr/>
+        </p:nvSpPr>
+        <p:spPr>
+          <a:xfrm>
+            <a:off x="843077" y="6329477"/>
+            <a:ext cx="32918" cy="170078"/>
+          </a:xfrm>
+          <a:prstGeom prst="roundRect">
+            <a:avLst>
+              <a:gd name="adj" fmla="val 50001"/>
+            </a:avLst>
+          </a:prstGeom>
+          <a:solidFill>
+            <a:srgbClr val="FFFFFF"/>
+          </a:solidFill>
+          <a:ln/>
+        </p:spPr>
+      </p:sp>
+      <p:sp>
+        <p:nvSpPr>
+          <p:cNvPr id="8" name="Text 6"/>
+          <p:cNvSpPr/>
+          <p:nvPr/>
+        </p:nvSpPr>
+        <p:spPr>
+          <a:xfrm>
+            <a:off x="1024128" y="6254496"/>
+            <a:ext cx="2743200" cy="347472"/>
+          </a:xfrm>
+          <a:prstGeom prst="rect">
+            <a:avLst/>
+          </a:prstGeom>
+          <a:noFill/>
+          <a:ln/>
+        </p:spPr>
+        <p:txBody>
+          <a:bodyPr wrap="square" rtlCol="0" anchor="ctr"/>
+          <a:lstStyle/>
+          <a:p>
+            <a:pPr algn="l" indent="0" marL="0">
+              <a:buNone/>
+            </a:pPr>
+            <a:r>
+              <a:rPr lang="en-US" sz="1200" b="1" dirty="0">
+                <a:solidFill>
+                  <a:srgbClr val="93A4B8"/>
+                </a:solidFill>
+                <a:latin typeface="IBM Plex Sans" pitchFamily="34" charset="0"/>
+                <a:ea typeface="IBM Plex Sans" pitchFamily="34" charset="-122"/>
+                <a:cs typeface="IBM Plex Sans" pitchFamily="34" charset="-120"/>
+              </a:rPr>
+              <a:t>IdeaM</a:t>
+            </a:r>
+            <a:endParaRPr lang="en-US" sz="1200" dirty="0"/>
+          </a:p>
+        </p:txBody>
+      </p:sp>
+      <p:sp>
+        <p:nvSpPr>
+          <p:cNvPr id="9" name="Text 7"/>
+          <p:cNvSpPr/>
+          <p:nvPr/>
+        </p:nvSpPr>
+        <p:spPr>
+          <a:xfrm>
+            <a:off x="10180015" y="6254496"/>
+            <a:ext cx="1371600" cy="347472"/>
+          </a:xfrm>
+          <a:prstGeom prst="rect">
+            <a:avLst/>
+          </a:prstGeom>
+          <a:noFill/>
+          <a:ln/>
+        </p:spPr>
+        <p:txBody>
+          <a:bodyPr wrap="square" rtlCol="0" anchor="ctr"/>
+          <a:lstStyle/>
+          <a:p>
+            <a:pPr algn="r" indent="0" marL="0">
+              <a:buNone/>
+            </a:pPr>
+            <a:r>
+              <a:rPr lang="en-US" sz="1100" dirty="0">
+                <a:solidFill>
+                  <a:srgbClr val="93A4B8"/>
+                </a:solidFill>
+                <a:latin typeface="IBM Plex Sans" pitchFamily="34" charset="0"/>
+                <a:ea typeface="IBM Plex Sans" pitchFamily="34" charset="-122"/>
+                <a:cs typeface="IBM Plex Sans" pitchFamily="34" charset="-120"/>
+              </a:rPr>
+              <a:t>12 / 26</a:t>
+            </a:r>
+            <a:endParaRPr lang="en-US" sz="1100" dirty="0"/>
+          </a:p>
+        </p:txBody>
+      </p:sp>
+      <p:sp>
+        <p:nvSpPr>
+          <p:cNvPr id="10" name="Text 8"/>
+          <p:cNvSpPr/>
+          <p:nvPr/>
+        </p:nvSpPr>
+        <p:spPr>
+          <a:xfrm>
+            <a:off x="640080" y="502920"/>
+            <a:ext cx="10911535" cy="822960"/>
+          </a:xfrm>
+          <a:prstGeom prst="rect">
+            <a:avLst/>
+          </a:prstGeom>
+          <a:noFill/>
+          <a:ln/>
+        </p:spPr>
+        <p:txBody>
+          <a:bodyPr wrap="square" rtlCol="0" anchor="t"/>
+          <a:lstStyle/>
+          <a:p>
+            <a:pPr algn="l" indent="0" marL="0">
+              <a:buNone/>
+            </a:pPr>
+            <a:r>
+              <a:rPr lang="en-US" sz="2600" b="1" dirty="0">
+                <a:solidFill>
+                  <a:srgbClr val="F5F8FF"/>
+                </a:solidFill>
+                <a:latin typeface="IBM Plex Sans" pitchFamily="34" charset="0"/>
+                <a:ea typeface="IBM Plex Sans" pitchFamily="34" charset="-122"/>
+                <a:cs typeface="IBM Plex Sans" pitchFamily="34" charset="-120"/>
+              </a:rPr>
+              <a:t>The Case Study: Building IdeaM with AI</a:t>
+            </a:r>
+            <a:endParaRPr lang="en-US" sz="2600" dirty="0"/>
+          </a:p>
+        </p:txBody>
+      </p:sp>
+      <p:sp>
+        <p:nvSpPr>
+          <p:cNvPr id="11" name="Shape 9"/>
+          <p:cNvSpPr/>
+          <p:nvPr/>
+        </p:nvSpPr>
+        <p:spPr>
+          <a:xfrm>
+            <a:off x="640080" y="1325880"/>
+            <a:ext cx="1005840" cy="82296"/>
+          </a:xfrm>
+          <a:prstGeom prst="rect">
+            <a:avLst/>
+          </a:prstGeom>
+          <a:solidFill>
+            <a:srgbClr val="3898FF"/>
+          </a:solidFill>
+          <a:ln/>
+        </p:spPr>
+      </p:sp>
+      <p:sp>
+        <p:nvSpPr>
+          <p:cNvPr id="12" name="Text 10"/>
+          <p:cNvSpPr/>
+          <p:nvPr/>
+        </p:nvSpPr>
+        <p:spPr>
+          <a:xfrm>
+            <a:off x="640080" y="1737360"/>
+            <a:ext cx="5120640" cy="4206240"/>
+          </a:xfrm>
+          <a:prstGeom prst="rect">
+            <a:avLst/>
+          </a:prstGeom>
+          <a:noFill/>
+          <a:ln/>
+        </p:spPr>
+        <p:txBody>
+          <a:bodyPr wrap="square" rtlCol="0" anchor="t"/>
+          <a:lstStyle/>
+          <a:p>
+            <a:pPr algn="l" marL="228600" indent="-228600">
+              <a:spcAft>
+                <a:spcPts val="1000"/>
+              </a:spcAft>
+              <a:buSzPct val="100000"/>
+              <a:buChar char="•"/>
+            </a:pPr>
+            <a:r>
+              <a:rPr lang="en-US" sz="1800" dirty="0">
+                <a:solidFill>
+                  <a:srgbClr val="F5F8FF"/>
+                </a:solidFill>
+                <a:latin typeface="IBM Plex Sans" pitchFamily="34" charset="0"/>
+                <a:ea typeface="IBM Plex Sans" pitchFamily="34" charset="-122"/>
+                <a:cs typeface="IBM Plex Sans" pitchFamily="34" charset="-120"/>
+              </a:rPr>
+              <a:t>Now turn the tool around and tell the story of how it was built — because that story is itself the proof.</a:t>
+            </a:r>
+            <a:endParaRPr lang="en-US" sz="1800" dirty="0"/>
+          </a:p>
+          <a:p>
+            <a:pPr algn="l" marL="228600" indent="-228600">
+              <a:spcAft>
+                <a:spcPts val="1000"/>
+              </a:spcAft>
+              <a:buSzPct val="100000"/>
+              <a:buChar char="•"/>
+            </a:pPr>
+            <a:r>
+              <a:rPr lang="en-US" sz="1800" dirty="0">
+                <a:solidFill>
+                  <a:srgbClr val="F5F8FF"/>
+                </a:solidFill>
+                <a:latin typeface="IBM Plex Sans" pitchFamily="34" charset="0"/>
+                <a:ea typeface="IBM Plex Sans" pitchFamily="34" charset="-122"/>
+                <a:cs typeface="IBM Plex Sans" pitchFamily="34" charset="-120"/>
+              </a:rPr>
+              <a:t>A solo founder.</a:t>
+            </a:r>
+            <a:endParaRPr lang="en-US" sz="1800" dirty="0"/>
+          </a:p>
+          <a:p>
+            <a:pPr algn="l" marL="228600" indent="-228600">
+              <a:spcAft>
+                <a:spcPts val="1000"/>
+              </a:spcAft>
+              <a:buSzPct val="100000"/>
+              <a:buChar char="•"/>
+            </a:pPr>
+            <a:r>
+              <a:rPr lang="en-US" sz="1800" dirty="0">
+                <a:solidFill>
+                  <a:srgbClr val="F5F8FF"/>
+                </a:solidFill>
+                <a:latin typeface="IBM Plex Sans" pitchFamily="34" charset="0"/>
+                <a:ea typeface="IBM Plex Sans" pitchFamily="34" charset="-122"/>
+                <a:cs typeface="IBM Plex Sans" pitchFamily="34" charset="-120"/>
+              </a:rPr>
+              <a:t>Roughly 135,000 lines of code.</a:t>
+            </a:r>
+            <a:endParaRPr lang="en-US" sz="1800" dirty="0"/>
+          </a:p>
+          <a:p>
+            <a:pPr algn="l" marL="228600" indent="-228600">
+              <a:spcAft>
+                <a:spcPts val="1000"/>
+              </a:spcAft>
+              <a:buSzPct val="100000"/>
+              <a:buChar char="•"/>
+            </a:pPr>
+            <a:r>
+              <a:rPr lang="en-US" sz="1800" dirty="0">
+                <a:solidFill>
+                  <a:srgbClr val="F5F8FF"/>
+                </a:solidFill>
+                <a:latin typeface="IBM Plex Sans" pitchFamily="34" charset="0"/>
+                <a:ea typeface="IBM Plex Sans" pitchFamily="34" charset="-122"/>
+                <a:cs typeface="IBM Plex Sans" pitchFamily="34" charset="-120"/>
+              </a:rPr>
+              <a:t>Largely AI-built.</a:t>
+            </a:r>
+            <a:endParaRPr lang="en-US" sz="1800" dirty="0"/>
+          </a:p>
+          <a:p>
+            <a:pPr algn="l" marL="228600" indent="-228600">
+              <a:spcAft>
+                <a:spcPts val="1000"/>
+              </a:spcAft>
+              <a:buSzPct val="100000"/>
+              <a:buChar char="•"/>
+            </a:pPr>
+            <a:r>
+              <a:rPr lang="en-US" sz="1800" dirty="0">
+                <a:solidFill>
+                  <a:srgbClr val="F5F8FF"/>
+                </a:solidFill>
+                <a:latin typeface="IBM Plex Sans" pitchFamily="34" charset="0"/>
+                <a:ea typeface="IBM Plex Sans" pitchFamily="34" charset="-122"/>
+                <a:cs typeface="IBM Plex Sans" pitchFamily="34" charset="-120"/>
+              </a:rPr>
+              <a:t>The honest question a skeptical room will ask: is it any good, or is it a house of cards?</a:t>
+            </a:r>
+            <a:endParaRPr lang="en-US" sz="1800" dirty="0"/>
+          </a:p>
+        </p:txBody>
+      </p:sp>
+      <p:graphicFrame>
+        <p:nvGraphicFramePr>
+          <p:cNvPr id="13" name="Chart 0" descr=""/>
+          <p:cNvGraphicFramePr/>
+          <p:nvPr/>
+        </p:nvGraphicFramePr>
+        <p:xfrm>
+          <a:off x="6126480" y="1737360"/>
+          <a:ext cx="5394960" cy="4023360"/>
+        </p:xfrm>
+        <a:graphic xmlns:a="http://schemas.openxmlformats.org/drawingml/2006/main">
+          <a:graphicData uri="http://schemas.openxmlformats.org/drawingml/2006/chart">
+            <c:chart xmlns:c="http://schemas.openxmlformats.org/drawingml/2006/chart" r:id="rId1"/>
+          </a:graphicData>
+        </a:graphic>
+      </p:graphicFrame>
+    </p:spTree>
+  </p:cSld>
+  <p:clrMapOvr>
+    <a:masterClrMapping/>
+  </p:clrMapOvr>
+</p:sld>
+</file>
+
+<file path=ppt/slides/slide13.xml><?xml version="1.0" encoding="utf-8"?>
+<p:sld xmlns:a="http://schemas.openxmlformats.org/drawingml/2006/main" xmlns:r="http://schemas.openxmlformats.org/officeDocument/2006/relationships" xmlns:p="http://schemas.openxmlformats.org/presentationml/2006/main">
+  <p:cSld name="Slide 13">
+    <p:bg>
+      <p:bgPr>
+        <a:solidFill>
+          <a:srgbClr val="0A1120"/>
+        </a:solidFill>
+      </p:bgPr>
+    </p:bg>
+    <p:spTree>
+      <p:nvGrpSpPr>
+        <p:cNvPr id="1" name=""/>
+        <p:cNvGrpSpPr/>
+        <p:nvPr/>
+      </p:nvGrpSpPr>
+      <p:grpSpPr>
+        <a:xfrm>
+          <a:off x="0" y="0"/>
+          <a:ext cx="0" cy="0"/>
+          <a:chOff x="0" y="0"/>
+          <a:chExt cx="0" cy="0"/>
+        </a:xfrm>
+      </p:grpSpPr>
+      <p:sp>
+        <p:nvSpPr>
+          <p:cNvPr id="2" name="Shape 0"/>
+          <p:cNvSpPr/>
+          <p:nvPr/>
+        </p:nvSpPr>
+        <p:spPr>
+          <a:xfrm>
+            <a:off x="0" y="0"/>
+            <a:ext cx="12191695" cy="109728"/>
+          </a:xfrm>
+          <a:prstGeom prst="rect">
+            <a:avLst/>
+          </a:prstGeom>
+          <a:solidFill>
+            <a:srgbClr val="3898FF"/>
+          </a:solidFill>
+          <a:ln/>
+        </p:spPr>
+      </p:sp>
+      <p:sp>
+        <p:nvSpPr>
+          <p:cNvPr id="3" name="Shape 1"/>
+          <p:cNvSpPr/>
+          <p:nvPr/>
+        </p:nvSpPr>
+        <p:spPr>
+          <a:xfrm>
+            <a:off x="640080" y="6291072"/>
+            <a:ext cx="274320" cy="274320"/>
+          </a:xfrm>
+          <a:prstGeom prst="roundRect">
+            <a:avLst>
+              <a:gd name="adj" fmla="val 22000"/>
+            </a:avLst>
+          </a:prstGeom>
+          <a:solidFill>
+            <a:srgbClr val="2563EB"/>
+          </a:solidFill>
+          <a:ln/>
+        </p:spPr>
+      </p:sp>
+      <p:sp>
+        <p:nvSpPr>
+          <p:cNvPr id="4" name="Shape 2"/>
+          <p:cNvSpPr/>
+          <p:nvPr/>
+        </p:nvSpPr>
+        <p:spPr>
+          <a:xfrm>
+            <a:off x="694944" y="6444691"/>
+            <a:ext cx="32918" cy="54864"/>
+          </a:xfrm>
+          <a:prstGeom prst="roundRect">
+            <a:avLst>
+              <a:gd name="adj" fmla="val 50001"/>
+            </a:avLst>
+          </a:prstGeom>
+          <a:solidFill>
+            <a:srgbClr val="FFFFFF"/>
+          </a:solidFill>
+          <a:ln/>
+        </p:spPr>
+      </p:sp>
+      <p:sp>
+        <p:nvSpPr>
+          <p:cNvPr id="5" name="Shape 3"/>
+          <p:cNvSpPr/>
+          <p:nvPr/>
+        </p:nvSpPr>
+        <p:spPr>
+          <a:xfrm>
+            <a:off x="744322" y="6406286"/>
+            <a:ext cx="32918" cy="93269"/>
+          </a:xfrm>
+          <a:prstGeom prst="roundRect">
+            <a:avLst>
+              <a:gd name="adj" fmla="val 50001"/>
+            </a:avLst>
+          </a:prstGeom>
+          <a:solidFill>
+            <a:srgbClr val="FFFFFF"/>
+          </a:solidFill>
+          <a:ln/>
+        </p:spPr>
+      </p:sp>
+      <p:sp>
+        <p:nvSpPr>
+          <p:cNvPr id="6" name="Shape 4"/>
+          <p:cNvSpPr/>
+          <p:nvPr/>
+        </p:nvSpPr>
+        <p:spPr>
+          <a:xfrm>
+            <a:off x="793699" y="6367882"/>
+            <a:ext cx="32918" cy="131674"/>
+          </a:xfrm>
+          <a:prstGeom prst="roundRect">
+            <a:avLst>
+              <a:gd name="adj" fmla="val 50001"/>
+            </a:avLst>
+          </a:prstGeom>
+          <a:solidFill>
+            <a:srgbClr val="FFFFFF"/>
+          </a:solidFill>
+          <a:ln/>
+        </p:spPr>
+      </p:sp>
+      <p:sp>
+        <p:nvSpPr>
+          <p:cNvPr id="7" name="Shape 5"/>
+          <p:cNvSpPr/>
+          <p:nvPr/>
+        </p:nvSpPr>
+        <p:spPr>
+          <a:xfrm>
+            <a:off x="843077" y="6329477"/>
+            <a:ext cx="32918" cy="170078"/>
+          </a:xfrm>
+          <a:prstGeom prst="roundRect">
+            <a:avLst>
+              <a:gd name="adj" fmla="val 50001"/>
+            </a:avLst>
+          </a:prstGeom>
+          <a:solidFill>
+            <a:srgbClr val="FFFFFF"/>
+          </a:solidFill>
+          <a:ln/>
+        </p:spPr>
+      </p:sp>
+      <p:sp>
+        <p:nvSpPr>
+          <p:cNvPr id="8" name="Text 6"/>
+          <p:cNvSpPr/>
+          <p:nvPr/>
+        </p:nvSpPr>
+        <p:spPr>
+          <a:xfrm>
+            <a:off x="1024128" y="6254496"/>
+            <a:ext cx="2743200" cy="347472"/>
+          </a:xfrm>
+          <a:prstGeom prst="rect">
+            <a:avLst/>
+          </a:prstGeom>
+          <a:noFill/>
+          <a:ln/>
+        </p:spPr>
+        <p:txBody>
+          <a:bodyPr wrap="square" rtlCol="0" anchor="ctr"/>
+          <a:lstStyle/>
+          <a:p>
+            <a:pPr algn="l" indent="0" marL="0">
+              <a:buNone/>
+            </a:pPr>
+            <a:r>
+              <a:rPr lang="en-US" sz="1200" b="1" dirty="0">
+                <a:solidFill>
+                  <a:srgbClr val="93A4B8"/>
+                </a:solidFill>
+                <a:latin typeface="IBM Plex Sans" pitchFamily="34" charset="0"/>
+                <a:ea typeface="IBM Plex Sans" pitchFamily="34" charset="-122"/>
+                <a:cs typeface="IBM Plex Sans" pitchFamily="34" charset="-120"/>
+              </a:rPr>
+              <a:t>IdeaM</a:t>
+            </a:r>
+            <a:endParaRPr lang="en-US" sz="1200" dirty="0"/>
+          </a:p>
+        </p:txBody>
+      </p:sp>
+      <p:sp>
+        <p:nvSpPr>
+          <p:cNvPr id="9" name="Text 7"/>
+          <p:cNvSpPr/>
+          <p:nvPr/>
+        </p:nvSpPr>
+        <p:spPr>
+          <a:xfrm>
+            <a:off x="10180015" y="6254496"/>
+            <a:ext cx="1371600" cy="347472"/>
+          </a:xfrm>
+          <a:prstGeom prst="rect">
+            <a:avLst/>
+          </a:prstGeom>
+          <a:noFill/>
+          <a:ln/>
+        </p:spPr>
+        <p:txBody>
+          <a:bodyPr wrap="square" rtlCol="0" anchor="ctr"/>
+          <a:lstStyle/>
+          <a:p>
+            <a:pPr algn="r" indent="0" marL="0">
+              <a:buNone/>
+            </a:pPr>
+            <a:r>
+              <a:rPr lang="en-US" sz="1100" dirty="0">
+                <a:solidFill>
+                  <a:srgbClr val="93A4B8"/>
+                </a:solidFill>
+                <a:latin typeface="IBM Plex Sans" pitchFamily="34" charset="0"/>
+                <a:ea typeface="IBM Plex Sans" pitchFamily="34" charset="-122"/>
+                <a:cs typeface="IBM Plex Sans" pitchFamily="34" charset="-120"/>
+              </a:rPr>
+              <a:t>13 / 26</a:t>
+            </a:r>
+            <a:endParaRPr lang="en-US" sz="1100" dirty="0"/>
+          </a:p>
+        </p:txBody>
+      </p:sp>
+      <p:sp>
+        <p:nvSpPr>
+          <p:cNvPr id="10" name="Text 8"/>
+          <p:cNvSpPr/>
+          <p:nvPr/>
+        </p:nvSpPr>
+        <p:spPr>
+          <a:xfrm>
+            <a:off x="640080" y="502920"/>
+            <a:ext cx="10911535" cy="822960"/>
+          </a:xfrm>
+          <a:prstGeom prst="rect">
+            <a:avLst/>
+          </a:prstGeom>
+          <a:noFill/>
+          <a:ln/>
+        </p:spPr>
+        <p:txBody>
+          <a:bodyPr wrap="square" rtlCol="0" anchor="t"/>
+          <a:lstStyle/>
+          <a:p>
+            <a:pPr algn="l" indent="0" marL="0">
+              <a:buNone/>
+            </a:pPr>
+            <a:r>
+              <a:rPr lang="en-US" sz="2600" b="1" dirty="0">
+                <a:solidFill>
+                  <a:srgbClr val="F5F8FF"/>
+                </a:solidFill>
+                <a:latin typeface="IBM Plex Sans" pitchFamily="34" charset="0"/>
+                <a:ea typeface="IBM Plex Sans" pitchFamily="34" charset="-122"/>
+                <a:cs typeface="IBM Plex Sans" pitchFamily="34" charset="-120"/>
+              </a:rPr>
+              <a:t>The honest audit</a:t>
+            </a:r>
+            <a:endParaRPr lang="en-US" sz="2600" dirty="0"/>
+          </a:p>
+        </p:txBody>
+      </p:sp>
+      <p:sp>
+        <p:nvSpPr>
+          <p:cNvPr id="11" name="Shape 9"/>
+          <p:cNvSpPr/>
+          <p:nvPr/>
+        </p:nvSpPr>
+        <p:spPr>
+          <a:xfrm>
+            <a:off x="640080" y="1325880"/>
+            <a:ext cx="1005840" cy="82296"/>
+          </a:xfrm>
+          <a:prstGeom prst="rect">
+            <a:avLst/>
+          </a:prstGeom>
+          <a:solidFill>
+            <a:srgbClr val="3898FF"/>
+          </a:solidFill>
+          <a:ln/>
+        </p:spPr>
+      </p:sp>
+      <p:sp>
+        <p:nvSpPr>
+          <p:cNvPr id="12" name="Text 10"/>
+          <p:cNvSpPr/>
+          <p:nvPr/>
+        </p:nvSpPr>
+        <p:spPr>
+          <a:xfrm>
+            <a:off x="640080" y="1737360"/>
+            <a:ext cx="10911535" cy="4206240"/>
+          </a:xfrm>
+          <a:prstGeom prst="rect">
+            <a:avLst/>
+          </a:prstGeom>
+          <a:noFill/>
+          <a:ln/>
+        </p:spPr>
+        <p:txBody>
+          <a:bodyPr wrap="square" rtlCol="0" anchor="t"/>
+          <a:lstStyle/>
+          <a:p>
+            <a:pPr algn="l" marL="228600" indent="-228600">
+              <a:spcAft>
+                <a:spcPts val="1000"/>
+              </a:spcAft>
+              <a:buSzPct val="100000"/>
+              <a:buChar char="•"/>
+            </a:pPr>
+            <a:r>
+              <a:rPr lang="en-US" sz="1800" dirty="0">
+                <a:solidFill>
+                  <a:srgbClr val="F5F8FF"/>
+                </a:solidFill>
+                <a:latin typeface="IBM Plex Sans" pitchFamily="34" charset="0"/>
+                <a:ea typeface="IBM Plex Sans" pitchFamily="34" charset="-122"/>
+                <a:cs typeface="IBM Plex Sans" pitchFamily="34" charset="-120"/>
+              </a:rPr>
+              <a:t>An independent-style architecture audit graded the codebase a B — above the median for hand-written production code.</a:t>
+            </a:r>
+            <a:endParaRPr lang="en-US" sz="1800" dirty="0"/>
+          </a:p>
+          <a:p>
+            <a:pPr algn="l" marL="228600" indent="-228600">
+              <a:spcAft>
+                <a:spcPts val="1000"/>
+              </a:spcAft>
+              <a:buSzPct val="100000"/>
+              <a:buChar char="•"/>
+            </a:pPr>
+            <a:r>
+              <a:rPr lang="en-US" sz="1800" dirty="0">
+                <a:solidFill>
+                  <a:srgbClr val="F5F8FF"/>
+                </a:solidFill>
+                <a:latin typeface="IBM Plex Sans" pitchFamily="34" charset="0"/>
+                <a:ea typeface="IBM Plex Sans" pitchFamily="34" charset="-122"/>
+                <a:cs typeface="IBM Plex Sans" pitchFamily="34" charset="-120"/>
+              </a:rPr>
+              <a:t>Zero circular dependencies across 388 files.</a:t>
+            </a:r>
+            <a:endParaRPr lang="en-US" sz="1800" dirty="0"/>
+          </a:p>
+          <a:p>
+            <a:pPr algn="l" marL="228600" indent="-228600">
+              <a:spcAft>
+                <a:spcPts val="1000"/>
+              </a:spcAft>
+              <a:buSzPct val="100000"/>
+              <a:buChar char="•"/>
+            </a:pPr>
+            <a:r>
+              <a:rPr lang="en-US" sz="1800" dirty="0">
+                <a:solidFill>
+                  <a:srgbClr val="F5F8FF"/>
+                </a:solidFill>
+                <a:latin typeface="IBM Plex Sans" pitchFamily="34" charset="0"/>
+                <a:ea typeface="IBM Plex Sans" pitchFamily="34" charset="-122"/>
+                <a:cs typeface="IBM Plex Sans" pitchFamily="34" charset="-120"/>
+              </a:rPr>
+              <a:t>Clean, modular architecture.</a:t>
+            </a:r>
+            <a:endParaRPr lang="en-US" sz="1800" dirty="0"/>
+          </a:p>
+          <a:p>
+            <a:pPr algn="l" marL="228600" indent="-228600">
+              <a:spcAft>
+                <a:spcPts val="1000"/>
+              </a:spcAft>
+              <a:buSzPct val="100000"/>
+              <a:buChar char="•"/>
+            </a:pPr>
+            <a:r>
+              <a:rPr lang="en-US" sz="1800" dirty="0">
+                <a:solidFill>
+                  <a:srgbClr val="F5F8FF"/>
+                </a:solidFill>
+                <a:latin typeface="IBM Plex Sans" pitchFamily="34" charset="0"/>
+                <a:ea typeface="IBM Plex Sans" pitchFamily="34" charset="-122"/>
+                <a:cs typeface="IBM Plex Sans" pitchFamily="34" charset="-120"/>
+              </a:rPr>
+              <a:t>The one real blemish: a few oversized “god-files” that do too much — the universal debt of fast development, AI-built or not.</a:t>
+            </a:r>
+            <a:endParaRPr lang="en-US" sz="1800" dirty="0"/>
+          </a:p>
+          <a:p>
+            <a:pPr algn="l" marL="228600" indent="-228600">
+              <a:spcAft>
+                <a:spcPts val="1000"/>
+              </a:spcAft>
+              <a:buSzPct val="100000"/>
+              <a:buChar char="•"/>
+            </a:pPr>
+            <a:r>
+              <a:rPr lang="en-US" sz="1800" dirty="0">
+                <a:solidFill>
+                  <a:srgbClr val="F5F8FF"/>
+                </a:solidFill>
+                <a:latin typeface="IBM Plex Sans" pitchFamily="34" charset="0"/>
+                <a:ea typeface="IBM Plex Sans" pitchFamily="34" charset="-122"/>
+                <a:cs typeface="IBM Plex Sans" pitchFamily="34" charset="-120"/>
+              </a:rPr>
+              <a:t>Don't hide it; naming the flaw is what makes the grade believable.</a:t>
+            </a:r>
+            <a:endParaRPr lang="en-US" sz="1800" dirty="0"/>
+          </a:p>
+        </p:txBody>
+      </p:sp>
+    </p:spTree>
+  </p:cSld>
+  <p:clrMapOvr>
+    <a:masterClrMapping/>
+  </p:clrMapOvr>
+</p:sld>
+</file>
+
+<file path=ppt/slides/slide14.xml><?xml version="1.0" encoding="utf-8"?>
+<p:sld xmlns:a="http://schemas.openxmlformats.org/drawingml/2006/main" xmlns:r="http://schemas.openxmlformats.org/officeDocument/2006/relationships" xmlns:p="http://schemas.openxmlformats.org/presentationml/2006/main">
+  <p:cSld name="Slide 14">
+    <p:bg>
+      <p:bgPr>
+        <a:solidFill>
+          <a:srgbClr val="0A1120"/>
+        </a:solidFill>
+      </p:bgPr>
+    </p:bg>
+    <p:spTree>
+      <p:nvGrpSpPr>
+        <p:cNvPr id="1" name=""/>
+        <p:cNvGrpSpPr/>
+        <p:nvPr/>
+      </p:nvGrpSpPr>
+      <p:grpSpPr>
+        <a:xfrm>
+          <a:off x="0" y="0"/>
+          <a:ext cx="0" cy="0"/>
+          <a:chOff x="0" y="0"/>
+          <a:chExt cx="0" cy="0"/>
+        </a:xfrm>
+      </p:grpSpPr>
+      <p:sp>
+        <p:nvSpPr>
+          <p:cNvPr id="2" name="Shape 0"/>
+          <p:cNvSpPr/>
+          <p:nvPr/>
+        </p:nvSpPr>
+        <p:spPr>
+          <a:xfrm>
+            <a:off x="0" y="0"/>
+            <a:ext cx="12191695" cy="109728"/>
+          </a:xfrm>
+          <a:prstGeom prst="rect">
+            <a:avLst/>
+          </a:prstGeom>
+          <a:solidFill>
+            <a:srgbClr val="3898FF"/>
+          </a:solidFill>
+          <a:ln/>
+        </p:spPr>
+      </p:sp>
+      <p:sp>
+        <p:nvSpPr>
+          <p:cNvPr id="3" name="Shape 1"/>
+          <p:cNvSpPr/>
+          <p:nvPr/>
+        </p:nvSpPr>
+        <p:spPr>
+          <a:xfrm>
+            <a:off x="640080" y="6291072"/>
+            <a:ext cx="274320" cy="274320"/>
+          </a:xfrm>
+          <a:prstGeom prst="roundRect">
+            <a:avLst>
+              <a:gd name="adj" fmla="val 22000"/>
+            </a:avLst>
+          </a:prstGeom>
+          <a:solidFill>
+            <a:srgbClr val="2563EB"/>
+          </a:solidFill>
+          <a:ln/>
+        </p:spPr>
+      </p:sp>
+      <p:sp>
+        <p:nvSpPr>
+          <p:cNvPr id="4" name="Shape 2"/>
+          <p:cNvSpPr/>
+          <p:nvPr/>
+        </p:nvSpPr>
+        <p:spPr>
+          <a:xfrm>
+            <a:off x="694944" y="6444691"/>
+            <a:ext cx="32918" cy="54864"/>
+          </a:xfrm>
+          <a:prstGeom prst="roundRect">
+            <a:avLst>
+              <a:gd name="adj" fmla="val 50001"/>
+            </a:avLst>
+          </a:prstGeom>
+          <a:solidFill>
+            <a:srgbClr val="FFFFFF"/>
+          </a:solidFill>
+          <a:ln/>
+        </p:spPr>
+      </p:sp>
+      <p:sp>
+        <p:nvSpPr>
+          <p:cNvPr id="5" name="Shape 3"/>
+          <p:cNvSpPr/>
+          <p:nvPr/>
+        </p:nvSpPr>
+        <p:spPr>
+          <a:xfrm>
+            <a:off x="744322" y="6406286"/>
+            <a:ext cx="32918" cy="93269"/>
+          </a:xfrm>
+          <a:prstGeom prst="roundRect">
+            <a:avLst>
+              <a:gd name="adj" fmla="val 50001"/>
+            </a:avLst>
+          </a:prstGeom>
+          <a:solidFill>
+            <a:srgbClr val="FFFFFF"/>
+          </a:solidFill>
+          <a:ln/>
+        </p:spPr>
+      </p:sp>
+      <p:sp>
+        <p:nvSpPr>
+          <p:cNvPr id="6" name="Shape 4"/>
+          <p:cNvSpPr/>
+          <p:nvPr/>
+        </p:nvSpPr>
+        <p:spPr>
+          <a:xfrm>
+            <a:off x="793699" y="6367882"/>
+            <a:ext cx="32918" cy="131674"/>
+          </a:xfrm>
+          <a:prstGeom prst="roundRect">
+            <a:avLst>
+              <a:gd name="adj" fmla="val 50001"/>
+            </a:avLst>
+          </a:prstGeom>
+          <a:solidFill>
+            <a:srgbClr val="FFFFFF"/>
+          </a:solidFill>
+          <a:ln/>
+        </p:spPr>
+      </p:sp>
+      <p:sp>
+        <p:nvSpPr>
+          <p:cNvPr id="7" name="Shape 5"/>
+          <p:cNvSpPr/>
+          <p:nvPr/>
+        </p:nvSpPr>
+        <p:spPr>
+          <a:xfrm>
+            <a:off x="843077" y="6329477"/>
+            <a:ext cx="32918" cy="170078"/>
+          </a:xfrm>
+          <a:prstGeom prst="roundRect">
+            <a:avLst>
+              <a:gd name="adj" fmla="val 50001"/>
+            </a:avLst>
+          </a:prstGeom>
+          <a:solidFill>
+            <a:srgbClr val="FFFFFF"/>
+          </a:solidFill>
+          <a:ln/>
+        </p:spPr>
+      </p:sp>
+      <p:sp>
+        <p:nvSpPr>
+          <p:cNvPr id="8" name="Text 6"/>
+          <p:cNvSpPr/>
+          <p:nvPr/>
+        </p:nvSpPr>
+        <p:spPr>
+          <a:xfrm>
+            <a:off x="1024128" y="6254496"/>
+            <a:ext cx="2743200" cy="347472"/>
+          </a:xfrm>
+          <a:prstGeom prst="rect">
+            <a:avLst/>
+          </a:prstGeom>
+          <a:noFill/>
+          <a:ln/>
+        </p:spPr>
+        <p:txBody>
+          <a:bodyPr wrap="square" rtlCol="0" anchor="ctr"/>
+          <a:lstStyle/>
+          <a:p>
+            <a:pPr algn="l" indent="0" marL="0">
+              <a:buNone/>
+            </a:pPr>
+            <a:r>
+              <a:rPr lang="en-US" sz="1200" b="1" dirty="0">
+                <a:solidFill>
+                  <a:srgbClr val="93A4B8"/>
+                </a:solidFill>
+                <a:latin typeface="IBM Plex Sans" pitchFamily="34" charset="0"/>
+                <a:ea typeface="IBM Plex Sans" pitchFamily="34" charset="-122"/>
+                <a:cs typeface="IBM Plex Sans" pitchFamily="34" charset="-120"/>
+              </a:rPr>
+              <a:t>IdeaM</a:t>
+            </a:r>
+            <a:endParaRPr lang="en-US" sz="1200" dirty="0"/>
+          </a:p>
+        </p:txBody>
+      </p:sp>
+      <p:sp>
+        <p:nvSpPr>
+          <p:cNvPr id="9" name="Text 7"/>
+          <p:cNvSpPr/>
+          <p:nvPr/>
+        </p:nvSpPr>
+        <p:spPr>
+          <a:xfrm>
+            <a:off x="10180015" y="6254496"/>
+            <a:ext cx="1371600" cy="347472"/>
+          </a:xfrm>
+          <a:prstGeom prst="rect">
+            <a:avLst/>
+          </a:prstGeom>
+          <a:noFill/>
+          <a:ln/>
+        </p:spPr>
+        <p:txBody>
+          <a:bodyPr wrap="square" rtlCol="0" anchor="ctr"/>
+          <a:lstStyle/>
+          <a:p>
+            <a:pPr algn="r" indent="0" marL="0">
+              <a:buNone/>
+            </a:pPr>
+            <a:r>
+              <a:rPr lang="en-US" sz="1100" dirty="0">
+                <a:solidFill>
+                  <a:srgbClr val="93A4B8"/>
+                </a:solidFill>
+                <a:latin typeface="IBM Plex Sans" pitchFamily="34" charset="0"/>
+                <a:ea typeface="IBM Plex Sans" pitchFamily="34" charset="-122"/>
+                <a:cs typeface="IBM Plex Sans" pitchFamily="34" charset="-120"/>
+              </a:rPr>
+              <a:t>14 / 26</a:t>
+            </a:r>
+            <a:endParaRPr lang="en-US" sz="1100" dirty="0"/>
+          </a:p>
+        </p:txBody>
+      </p:sp>
+      <p:sp>
+        <p:nvSpPr>
+          <p:cNvPr id="10" name="Text 8"/>
+          <p:cNvSpPr/>
+          <p:nvPr/>
+        </p:nvSpPr>
+        <p:spPr>
+          <a:xfrm>
+            <a:off x="640080" y="502920"/>
+            <a:ext cx="10911535" cy="822960"/>
+          </a:xfrm>
+          <a:prstGeom prst="rect">
+            <a:avLst/>
+          </a:prstGeom>
+          <a:noFill/>
+          <a:ln/>
+        </p:spPr>
+        <p:txBody>
+          <a:bodyPr wrap="square" rtlCol="0" anchor="t"/>
+          <a:lstStyle/>
+          <a:p>
+            <a:pPr algn="l" indent="0" marL="0">
+              <a:buNone/>
+            </a:pPr>
+            <a:r>
+              <a:rPr lang="en-US" sz="2600" b="1" dirty="0">
+                <a:solidFill>
+                  <a:srgbClr val="F5F8FF"/>
+                </a:solidFill>
+                <a:latin typeface="IBM Plex Sans" pitchFamily="34" charset="0"/>
+                <a:ea typeface="IBM Plex Sans" pitchFamily="34" charset="-122"/>
+                <a:cs typeface="IBM Plex Sans" pitchFamily="34" charset="-120"/>
+              </a:rPr>
+              <a:t>The frontier — assisted vs. driven</a:t>
+            </a:r>
+            <a:endParaRPr lang="en-US" sz="2600" dirty="0"/>
+          </a:p>
+        </p:txBody>
+      </p:sp>
+      <p:sp>
+        <p:nvSpPr>
+          <p:cNvPr id="11" name="Shape 9"/>
+          <p:cNvSpPr/>
+          <p:nvPr/>
+        </p:nvSpPr>
+        <p:spPr>
+          <a:xfrm>
+            <a:off x="640080" y="1325880"/>
+            <a:ext cx="1005840" cy="82296"/>
+          </a:xfrm>
+          <a:prstGeom prst="rect">
+            <a:avLst/>
+          </a:prstGeom>
+          <a:solidFill>
+            <a:srgbClr val="3898FF"/>
+          </a:solidFill>
+          <a:ln/>
+        </p:spPr>
+      </p:sp>
+      <p:sp>
+        <p:nvSpPr>
+          <p:cNvPr id="12" name="Text 10"/>
+          <p:cNvSpPr/>
+          <p:nvPr/>
+        </p:nvSpPr>
+        <p:spPr>
+          <a:xfrm>
+            <a:off x="640080" y="1737360"/>
+            <a:ext cx="5120640" cy="4206240"/>
+          </a:xfrm>
+          <a:prstGeom prst="rect">
+            <a:avLst/>
+          </a:prstGeom>
+          <a:noFill/>
+          <a:ln/>
+        </p:spPr>
+        <p:txBody>
+          <a:bodyPr wrap="square" rtlCol="0" anchor="t"/>
+          <a:lstStyle/>
+          <a:p>
+            <a:pPr algn="l" marL="228600" indent="-228600">
+              <a:spcAft>
+                <a:spcPts val="1000"/>
+              </a:spcAft>
+              <a:buSzPct val="100000"/>
+              <a:buChar char="•"/>
+            </a:pPr>
+            <a:r>
+              <a:rPr lang="en-US" sz="1800" dirty="0">
+                <a:solidFill>
+                  <a:srgbClr val="F5F8FF"/>
+                </a:solidFill>
+                <a:latin typeface="IBM Plex Sans" pitchFamily="34" charset="0"/>
+                <a:ea typeface="IBM Plex Sans" pitchFamily="34" charset="-122"/>
+                <a:cs typeface="IBM Plex Sans" pitchFamily="34" charset="-120"/>
+              </a:rPr>
+              <a:t>Draw the line the industry blurs.</a:t>
+            </a:r>
+            <a:endParaRPr lang="en-US" sz="1800" dirty="0"/>
+          </a:p>
+          <a:p>
+            <a:pPr algn="l" marL="228600" indent="-228600">
+              <a:spcAft>
+                <a:spcPts val="1000"/>
+              </a:spcAft>
+              <a:buSzPct val="100000"/>
+              <a:buChar char="•"/>
+            </a:pPr>
+            <a:r>
+              <a:rPr lang="en-US" sz="1800" dirty="0">
+                <a:solidFill>
+                  <a:srgbClr val="F5F8FF"/>
+                </a:solidFill>
+                <a:latin typeface="IBM Plex Sans" pitchFamily="34" charset="0"/>
+                <a:ea typeface="IBM Plex Sans" pitchFamily="34" charset="-122"/>
+                <a:cs typeface="IBM Plex Sans" pitchFamily="34" charset="-120"/>
+              </a:rPr>
+              <a:t>About 80% of developers use AI as an assistant (it helps; the human still writes most of it).</a:t>
+            </a:r>
+            <a:endParaRPr lang="en-US" sz="1800" dirty="0"/>
+          </a:p>
+          <a:p>
+            <a:pPr algn="l" marL="228600" indent="-228600">
+              <a:spcAft>
+                <a:spcPts val="1000"/>
+              </a:spcAft>
+              <a:buSzPct val="100000"/>
+              <a:buChar char="•"/>
+            </a:pPr>
+            <a:r>
+              <a:rPr lang="en-US" sz="1800" dirty="0">
+                <a:solidFill>
+                  <a:srgbClr val="F5F8FF"/>
+                </a:solidFill>
+                <a:latin typeface="IBM Plex Sans" pitchFamily="34" charset="0"/>
+                <a:ea typeface="IBM Plex Sans" pitchFamily="34" charset="-122"/>
+                <a:cs typeface="IBM Plex Sans" pitchFamily="34" charset="-120"/>
+              </a:rPr>
+              <a:t>Only an estimated 10–25% of development is truly AI-driven — real "vibe coding," where AI does the heavy lifting and the human directs.</a:t>
+            </a:r>
+            <a:endParaRPr lang="en-US" sz="1800" dirty="0"/>
+          </a:p>
+          <a:p>
+            <a:pPr algn="l" marL="228600" indent="-228600">
+              <a:spcAft>
+                <a:spcPts val="1000"/>
+              </a:spcAft>
+              <a:buSzPct val="100000"/>
+              <a:buChar char="•"/>
+            </a:pPr>
+            <a:r>
+              <a:rPr lang="en-US" sz="1800" dirty="0">
+                <a:solidFill>
+                  <a:srgbClr val="F5F8FF"/>
+                </a:solidFill>
+                <a:latin typeface="IBM Plex Sans" pitchFamily="34" charset="0"/>
+                <a:ea typeface="IBM Plex Sans" pitchFamily="34" charset="-122"/>
+                <a:cs typeface="IBM Plex Sans" pitchFamily="34" charset="-120"/>
+              </a:rPr>
+              <a:t>IdeaM sits in that roughly 15% frontier.</a:t>
+            </a:r>
+            <a:endParaRPr lang="en-US" sz="1800" dirty="0"/>
+          </a:p>
+          <a:p>
+            <a:pPr algn="l" marL="228600" indent="-228600">
+              <a:spcAft>
+                <a:spcPts val="1000"/>
+              </a:spcAft>
+              <a:buSzPct val="100000"/>
+              <a:buChar char="•"/>
+            </a:pPr>
+            <a:r>
+              <a:rPr lang="en-US" sz="1800" dirty="0">
+                <a:solidFill>
+                  <a:srgbClr val="F5F8FF"/>
+                </a:solidFill>
+                <a:latin typeface="IBM Plex Sans" pitchFamily="34" charset="0"/>
+                <a:ea typeface="IBM Plex Sans" pitchFamily="34" charset="-122"/>
+                <a:cs typeface="IBM Plex Sans" pitchFamily="34" charset="-120"/>
+              </a:rPr>
+              <a:t>This isn't autocomplete-with-extra-steps; it's a different way of building.</a:t>
+            </a:r>
+            <a:endParaRPr lang="en-US" sz="1800" dirty="0"/>
+          </a:p>
+        </p:txBody>
+      </p:sp>
+      <p:graphicFrame>
+        <p:nvGraphicFramePr>
+          <p:cNvPr id="13" name="Chart 0" descr=""/>
+          <p:cNvGraphicFramePr/>
+          <p:nvPr/>
+        </p:nvGraphicFramePr>
+        <p:xfrm>
+          <a:off x="6126480" y="1737360"/>
+          <a:ext cx="5394960" cy="4023360"/>
+        </p:xfrm>
+        <a:graphic xmlns:a="http://schemas.openxmlformats.org/drawingml/2006/main">
+          <a:graphicData uri="http://schemas.openxmlformats.org/drawingml/2006/chart">
+            <c:chart xmlns:c="http://schemas.openxmlformats.org/drawingml/2006/chart" r:id="rId1"/>
+          </a:graphicData>
+        </a:graphic>
+      </p:graphicFrame>
+    </p:spTree>
+  </p:cSld>
+  <p:clrMapOvr>
+    <a:masterClrMapping/>
+  </p:clrMapOvr>
+</p:sld>
+</file>
+
+<file path=ppt/slides/slide15.xml><?xml version="1.0" encoding="utf-8"?>
+<p:sld xmlns:a="http://schemas.openxmlformats.org/drawingml/2006/main" xmlns:r="http://schemas.openxmlformats.org/officeDocument/2006/relationships" xmlns:p="http://schemas.openxmlformats.org/presentationml/2006/main">
+  <p:cSld name="Slide 15">
+    <p:bg>
+      <p:bgPr>
+        <a:solidFill>
+          <a:srgbClr val="0A1120"/>
+        </a:solidFill>
+      </p:bgPr>
+    </p:bg>
+    <p:spTree>
+      <p:nvGrpSpPr>
+        <p:cNvPr id="1" name=""/>
+        <p:cNvGrpSpPr/>
+        <p:nvPr/>
+      </p:nvGrpSpPr>
+      <p:grpSpPr>
+        <a:xfrm>
+          <a:off x="0" y="0"/>
+          <a:ext cx="0" cy="0"/>
+          <a:chOff x="0" y="0"/>
+          <a:chExt cx="0" cy="0"/>
+        </a:xfrm>
+      </p:grpSpPr>
+      <p:sp>
+        <p:nvSpPr>
+          <p:cNvPr id="2" name="Shape 0"/>
+          <p:cNvSpPr/>
+          <p:nvPr/>
+        </p:nvSpPr>
+        <p:spPr>
+          <a:xfrm>
+            <a:off x="0" y="0"/>
+            <a:ext cx="12191695" cy="109728"/>
+          </a:xfrm>
+          <a:prstGeom prst="rect">
+            <a:avLst/>
+          </a:prstGeom>
+          <a:solidFill>
+            <a:srgbClr val="3898FF"/>
+          </a:solidFill>
+          <a:ln/>
+        </p:spPr>
+      </p:sp>
+      <p:sp>
+        <p:nvSpPr>
+          <p:cNvPr id="3" name="Shape 1"/>
+          <p:cNvSpPr/>
+          <p:nvPr/>
+        </p:nvSpPr>
+        <p:spPr>
+          <a:xfrm>
+            <a:off x="640080" y="6291072"/>
+            <a:ext cx="274320" cy="274320"/>
+          </a:xfrm>
+          <a:prstGeom prst="roundRect">
+            <a:avLst>
+              <a:gd name="adj" fmla="val 22000"/>
+            </a:avLst>
+          </a:prstGeom>
+          <a:solidFill>
+            <a:srgbClr val="2563EB"/>
+          </a:solidFill>
+          <a:ln/>
+        </p:spPr>
+      </p:sp>
+      <p:sp>
+        <p:nvSpPr>
+          <p:cNvPr id="4" name="Shape 2"/>
+          <p:cNvSpPr/>
+          <p:nvPr/>
+        </p:nvSpPr>
+        <p:spPr>
+          <a:xfrm>
+            <a:off x="694944" y="6444691"/>
+            <a:ext cx="32918" cy="54864"/>
+          </a:xfrm>
+          <a:prstGeom prst="roundRect">
+            <a:avLst>
+              <a:gd name="adj" fmla="val 50001"/>
+            </a:avLst>
+          </a:prstGeom>
+          <a:solidFill>
+            <a:srgbClr val="FFFFFF"/>
+          </a:solidFill>
+          <a:ln/>
+        </p:spPr>
+      </p:sp>
+      <p:sp>
+        <p:nvSpPr>
+          <p:cNvPr id="5" name="Shape 3"/>
+          <p:cNvSpPr/>
+          <p:nvPr/>
+        </p:nvSpPr>
+        <p:spPr>
+          <a:xfrm>
+            <a:off x="744322" y="6406286"/>
+            <a:ext cx="32918" cy="93269"/>
+          </a:xfrm>
+          <a:prstGeom prst="roundRect">
+            <a:avLst>
+              <a:gd name="adj" fmla="val 50001"/>
+            </a:avLst>
+          </a:prstGeom>
+          <a:solidFill>
+            <a:srgbClr val="FFFFFF"/>
+          </a:solidFill>
+          <a:ln/>
+        </p:spPr>
+      </p:sp>
+      <p:sp>
+        <p:nvSpPr>
+          <p:cNvPr id="6" name="Shape 4"/>
+          <p:cNvSpPr/>
+          <p:nvPr/>
+        </p:nvSpPr>
+        <p:spPr>
+          <a:xfrm>
+            <a:off x="793699" y="6367882"/>
+            <a:ext cx="32918" cy="131674"/>
+          </a:xfrm>
+          <a:prstGeom prst="roundRect">
+            <a:avLst>
+              <a:gd name="adj" fmla="val 50001"/>
+            </a:avLst>
+          </a:prstGeom>
+          <a:solidFill>
+            <a:srgbClr val="FFFFFF"/>
+          </a:solidFill>
+          <a:ln/>
+        </p:spPr>
+      </p:sp>
+      <p:sp>
+        <p:nvSpPr>
+          <p:cNvPr id="7" name="Shape 5"/>
+          <p:cNvSpPr/>
+          <p:nvPr/>
+        </p:nvSpPr>
+        <p:spPr>
+          <a:xfrm>
+            <a:off x="843077" y="6329477"/>
+            <a:ext cx="32918" cy="170078"/>
+          </a:xfrm>
+          <a:prstGeom prst="roundRect">
+            <a:avLst>
+              <a:gd name="adj" fmla="val 50001"/>
+            </a:avLst>
+          </a:prstGeom>
+          <a:solidFill>
+            <a:srgbClr val="FFFFFF"/>
+          </a:solidFill>
+          <a:ln/>
+        </p:spPr>
+      </p:sp>
+      <p:sp>
+        <p:nvSpPr>
+          <p:cNvPr id="8" name="Text 6"/>
+          <p:cNvSpPr/>
+          <p:nvPr/>
+        </p:nvSpPr>
+        <p:spPr>
+          <a:xfrm>
+            <a:off x="1024128" y="6254496"/>
+            <a:ext cx="2743200" cy="347472"/>
+          </a:xfrm>
+          <a:prstGeom prst="rect">
+            <a:avLst/>
+          </a:prstGeom>
+          <a:noFill/>
+          <a:ln/>
+        </p:spPr>
+        <p:txBody>
+          <a:bodyPr wrap="square" rtlCol="0" anchor="ctr"/>
+          <a:lstStyle/>
+          <a:p>
+            <a:pPr algn="l" indent="0" marL="0">
+              <a:buNone/>
+            </a:pPr>
+            <a:r>
+              <a:rPr lang="en-US" sz="1200" b="1" dirty="0">
+                <a:solidFill>
+                  <a:srgbClr val="93A4B8"/>
+                </a:solidFill>
+                <a:latin typeface="IBM Plex Sans" pitchFamily="34" charset="0"/>
+                <a:ea typeface="IBM Plex Sans" pitchFamily="34" charset="-122"/>
+                <a:cs typeface="IBM Plex Sans" pitchFamily="34" charset="-120"/>
+              </a:rPr>
+              <a:t>IdeaM</a:t>
+            </a:r>
+            <a:endParaRPr lang="en-US" sz="1200" dirty="0"/>
+          </a:p>
+        </p:txBody>
+      </p:sp>
+      <p:sp>
+        <p:nvSpPr>
+          <p:cNvPr id="9" name="Text 7"/>
+          <p:cNvSpPr/>
+          <p:nvPr/>
+        </p:nvSpPr>
+        <p:spPr>
+          <a:xfrm>
+            <a:off x="10180015" y="6254496"/>
+            <a:ext cx="1371600" cy="347472"/>
+          </a:xfrm>
+          <a:prstGeom prst="rect">
+            <a:avLst/>
+          </a:prstGeom>
+          <a:noFill/>
+          <a:ln/>
+        </p:spPr>
+        <p:txBody>
+          <a:bodyPr wrap="square" rtlCol="0" anchor="ctr"/>
+          <a:lstStyle/>
+          <a:p>
+            <a:pPr algn="r" indent="0" marL="0">
+              <a:buNone/>
+            </a:pPr>
+            <a:r>
+              <a:rPr lang="en-US" sz="1100" dirty="0">
+                <a:solidFill>
+                  <a:srgbClr val="93A4B8"/>
+                </a:solidFill>
+                <a:latin typeface="IBM Plex Sans" pitchFamily="34" charset="0"/>
+                <a:ea typeface="IBM Plex Sans" pitchFamily="34" charset="-122"/>
+                <a:cs typeface="IBM Plex Sans" pitchFamily="34" charset="-120"/>
+              </a:rPr>
+              <a:t>15 / 26</a:t>
+            </a:r>
+            <a:endParaRPr lang="en-US" sz="1100" dirty="0"/>
+          </a:p>
+        </p:txBody>
+      </p:sp>
+      <p:sp>
+        <p:nvSpPr>
+          <p:cNvPr id="10" name="Text 8"/>
+          <p:cNvSpPr/>
+          <p:nvPr/>
+        </p:nvSpPr>
+        <p:spPr>
+          <a:xfrm>
+            <a:off x="640080" y="502920"/>
+            <a:ext cx="10911535" cy="822960"/>
+          </a:xfrm>
+          <a:prstGeom prst="rect">
+            <a:avLst/>
+          </a:prstGeom>
+          <a:noFill/>
+          <a:ln/>
+        </p:spPr>
+        <p:txBody>
+          <a:bodyPr wrap="square" rtlCol="0" anchor="t"/>
+          <a:lstStyle/>
+          <a:p>
+            <a:pPr algn="l" indent="0" marL="0">
+              <a:buNone/>
+            </a:pPr>
+            <a:r>
+              <a:rPr lang="en-US" sz="2600" b="1" dirty="0">
+                <a:solidFill>
+                  <a:srgbClr val="F5F8FF"/>
+                </a:solidFill>
+                <a:latin typeface="IBM Plex Sans" pitchFamily="34" charset="0"/>
+                <a:ea typeface="IBM Plex Sans" pitchFamily="34" charset="-122"/>
+                <a:cs typeface="IBM Plex Sans" pitchFamily="34" charset="-120"/>
+              </a:rPr>
+              <a:t>Why It Works: The Discipline</a:t>
+            </a:r>
+            <a:endParaRPr lang="en-US" sz="2600" dirty="0"/>
+          </a:p>
+        </p:txBody>
+      </p:sp>
+      <p:sp>
+        <p:nvSpPr>
+          <p:cNvPr id="11" name="Shape 9"/>
+          <p:cNvSpPr/>
+          <p:nvPr/>
+        </p:nvSpPr>
+        <p:spPr>
+          <a:xfrm>
+            <a:off x="640080" y="1325880"/>
+            <a:ext cx="1005840" cy="82296"/>
+          </a:xfrm>
+          <a:prstGeom prst="rect">
+            <a:avLst/>
+          </a:prstGeom>
+          <a:solidFill>
+            <a:srgbClr val="3898FF"/>
+          </a:solidFill>
+          <a:ln/>
+        </p:spPr>
+      </p:sp>
+      <p:sp>
+        <p:nvSpPr>
+          <p:cNvPr id="12" name="Text 10"/>
+          <p:cNvSpPr/>
+          <p:nvPr/>
+        </p:nvSpPr>
+        <p:spPr>
+          <a:xfrm>
+            <a:off x="640080" y="1737360"/>
+            <a:ext cx="10911535" cy="4206240"/>
+          </a:xfrm>
+          <a:prstGeom prst="rect">
+            <a:avLst/>
+          </a:prstGeom>
+          <a:noFill/>
+          <a:ln/>
+        </p:spPr>
+        <p:txBody>
+          <a:bodyPr wrap="square" rtlCol="0" anchor="t"/>
+          <a:lstStyle/>
+          <a:p>
+            <a:pPr algn="l" marL="228600" indent="-228600">
+              <a:spcAft>
+                <a:spcPts val="1000"/>
+              </a:spcAft>
+              <a:buSzPct val="100000"/>
+              <a:buChar char="•"/>
+            </a:pPr>
+            <a:r>
+              <a:rPr lang="en-US" sz="1800" dirty="0">
+                <a:solidFill>
+                  <a:srgbClr val="F5F8FF"/>
+                </a:solidFill>
+                <a:latin typeface="IBM Plex Sans" pitchFamily="34" charset="0"/>
+                <a:ea typeface="IBM Plex Sans" pitchFamily="34" charset="-122"/>
+                <a:cs typeface="IBM Plex Sans" pitchFamily="34" charset="-120"/>
+              </a:rPr>
+              <a:t>Return to the paradox from the opening and answer it.</a:t>
+            </a:r>
+            <a:endParaRPr lang="en-US" sz="1800" dirty="0"/>
+          </a:p>
+          <a:p>
+            <a:pPr algn="l" marL="228600" indent="-228600">
+              <a:spcAft>
+                <a:spcPts val="1000"/>
+              </a:spcAft>
+              <a:buSzPct val="100000"/>
+              <a:buChar char="•"/>
+            </a:pPr>
+            <a:r>
+              <a:rPr lang="en-US" sz="1800" dirty="0">
+                <a:solidFill>
+                  <a:srgbClr val="F5F8FF"/>
+                </a:solidFill>
+                <a:latin typeface="IBM Plex Sans" pitchFamily="34" charset="0"/>
+                <a:ea typeface="IBM Plex Sans" pitchFamily="34" charset="-122"/>
+                <a:cs typeface="IBM Plex Sans" pitchFamily="34" charset="-120"/>
+              </a:rPr>
+              <a:t>The reason 45% lose time debugging AI output is that they prompt and hope.</a:t>
+            </a:r>
+            <a:endParaRPr lang="en-US" sz="1800" dirty="0"/>
+          </a:p>
+          <a:p>
+            <a:pPr algn="l" marL="228600" indent="-228600">
+              <a:spcAft>
+                <a:spcPts val="1000"/>
+              </a:spcAft>
+              <a:buSzPct val="100000"/>
+              <a:buChar char="•"/>
+            </a:pPr>
+            <a:r>
+              <a:rPr lang="en-US" sz="1800" dirty="0">
+                <a:solidFill>
+                  <a:srgbClr val="F5F8FF"/>
+                </a:solidFill>
+                <a:latin typeface="IBM Plex Sans" pitchFamily="34" charset="0"/>
+                <a:ea typeface="IBM Plex Sans" pitchFamily="34" charset="-122"/>
+                <a:cs typeface="IBM Plex Sans" pitchFamily="34" charset="-120"/>
+              </a:rPr>
+              <a:t>The fix is not a better model — it's a discipline.</a:t>
+            </a:r>
+            <a:endParaRPr lang="en-US" sz="1800" dirty="0"/>
+          </a:p>
+          <a:p>
+            <a:pPr algn="l" marL="228600" indent="-228600">
+              <a:spcAft>
+                <a:spcPts val="1000"/>
+              </a:spcAft>
+              <a:buSzPct val="100000"/>
+              <a:buChar char="•"/>
+            </a:pPr>
+            <a:r>
+              <a:rPr lang="en-US" sz="1800" dirty="0">
+                <a:solidFill>
+                  <a:srgbClr val="F5F8FF"/>
+                </a:solidFill>
+                <a:latin typeface="IBM Plex Sans" pitchFamily="34" charset="0"/>
+                <a:ea typeface="IBM Plex Sans" pitchFamily="34" charset="-122"/>
+                <a:cs typeface="IBM Plex Sans" pitchFamily="34" charset="-120"/>
+              </a:rPr>
+              <a:t>AI + discipline = trustworthy output.</a:t>
+            </a:r>
+            <a:endParaRPr lang="en-US" sz="1800" dirty="0"/>
+          </a:p>
+          <a:p>
+            <a:pPr algn="l" marL="228600" indent="-228600">
+              <a:spcAft>
+                <a:spcPts val="1000"/>
+              </a:spcAft>
+              <a:buSzPct val="100000"/>
+              <a:buChar char="•"/>
+            </a:pPr>
+            <a:r>
+              <a:rPr lang="en-US" sz="1800" dirty="0">
+                <a:solidFill>
+                  <a:srgbClr val="F5F8FF"/>
+                </a:solidFill>
+                <a:latin typeface="IBM Plex Sans" pitchFamily="34" charset="0"/>
+                <a:ea typeface="IBM Plex Sans" pitchFamily="34" charset="-122"/>
+                <a:cs typeface="IBM Plex Sans" pitchFamily="34" charset="-120"/>
+              </a:rPr>
+              <a:t>That equation is the heart of the talk.</a:t>
+            </a:r>
+            <a:endParaRPr lang="en-US" sz="1800" dirty="0"/>
+          </a:p>
+        </p:txBody>
+      </p:sp>
+    </p:spTree>
+  </p:cSld>
+  <p:clrMapOvr>
+    <a:masterClrMapping/>
+  </p:clrMapOvr>
+</p:sld>
+</file>
+
+<file path=ppt/slides/slide16.xml><?xml version="1.0" encoding="utf-8"?>
+<p:sld xmlns:a="http://schemas.openxmlformats.org/drawingml/2006/main" xmlns:r="http://schemas.openxmlformats.org/officeDocument/2006/relationships" xmlns:p="http://schemas.openxmlformats.org/presentationml/2006/main">
+  <p:cSld name="Slide 16">
+    <p:bg>
+      <p:bgPr>
+        <a:solidFill>
+          <a:srgbClr val="0A1120"/>
+        </a:solidFill>
+      </p:bgPr>
+    </p:bg>
+    <p:spTree>
+      <p:nvGrpSpPr>
+        <p:cNvPr id="1" name=""/>
+        <p:cNvGrpSpPr/>
+        <p:nvPr/>
+      </p:nvGrpSpPr>
+      <p:grpSpPr>
+        <a:xfrm>
+          <a:off x="0" y="0"/>
+          <a:ext cx="0" cy="0"/>
+          <a:chOff x="0" y="0"/>
+          <a:chExt cx="0" cy="0"/>
+        </a:xfrm>
+      </p:grpSpPr>
+      <p:sp>
+        <p:nvSpPr>
+          <p:cNvPr id="2" name="Shape 0"/>
+          <p:cNvSpPr/>
+          <p:nvPr/>
+        </p:nvSpPr>
+        <p:spPr>
+          <a:xfrm>
+            <a:off x="0" y="0"/>
+            <a:ext cx="12191695" cy="109728"/>
+          </a:xfrm>
+          <a:prstGeom prst="rect">
+            <a:avLst/>
+          </a:prstGeom>
+          <a:solidFill>
+            <a:srgbClr val="3898FF"/>
+          </a:solidFill>
+          <a:ln/>
+        </p:spPr>
+      </p:sp>
+      <p:sp>
+        <p:nvSpPr>
+          <p:cNvPr id="3" name="Shape 1"/>
+          <p:cNvSpPr/>
+          <p:nvPr/>
+        </p:nvSpPr>
+        <p:spPr>
+          <a:xfrm>
+            <a:off x="640080" y="6291072"/>
+            <a:ext cx="274320" cy="274320"/>
+          </a:xfrm>
+          <a:prstGeom prst="roundRect">
+            <a:avLst>
+              <a:gd name="adj" fmla="val 22000"/>
+            </a:avLst>
+          </a:prstGeom>
+          <a:solidFill>
+            <a:srgbClr val="2563EB"/>
+          </a:solidFill>
+          <a:ln/>
+        </p:spPr>
+      </p:sp>
+      <p:sp>
+        <p:nvSpPr>
+          <p:cNvPr id="4" name="Shape 2"/>
+          <p:cNvSpPr/>
+          <p:nvPr/>
+        </p:nvSpPr>
+        <p:spPr>
+          <a:xfrm>
+            <a:off x="694944" y="6444691"/>
+            <a:ext cx="32918" cy="54864"/>
+          </a:xfrm>
+          <a:prstGeom prst="roundRect">
+            <a:avLst>
+              <a:gd name="adj" fmla="val 50001"/>
+            </a:avLst>
+          </a:prstGeom>
+          <a:solidFill>
+            <a:srgbClr val="FFFFFF"/>
+          </a:solidFill>
+          <a:ln/>
+        </p:spPr>
+      </p:sp>
+      <p:sp>
+        <p:nvSpPr>
+          <p:cNvPr id="5" name="Shape 3"/>
+          <p:cNvSpPr/>
+          <p:nvPr/>
+        </p:nvSpPr>
+        <p:spPr>
+          <a:xfrm>
+            <a:off x="744322" y="6406286"/>
+            <a:ext cx="32918" cy="93269"/>
+          </a:xfrm>
+          <a:prstGeom prst="roundRect">
+            <a:avLst>
+              <a:gd name="adj" fmla="val 50001"/>
+            </a:avLst>
+          </a:prstGeom>
+          <a:solidFill>
+            <a:srgbClr val="FFFFFF"/>
+          </a:solidFill>
+          <a:ln/>
+        </p:spPr>
+      </p:sp>
+      <p:sp>
+        <p:nvSpPr>
+          <p:cNvPr id="6" name="Shape 4"/>
+          <p:cNvSpPr/>
+          <p:nvPr/>
+        </p:nvSpPr>
+        <p:spPr>
+          <a:xfrm>
+            <a:off x="793699" y="6367882"/>
+            <a:ext cx="32918" cy="131674"/>
+          </a:xfrm>
+          <a:prstGeom prst="roundRect">
+            <a:avLst>
+              <a:gd name="adj" fmla="val 50001"/>
+            </a:avLst>
+          </a:prstGeom>
+          <a:solidFill>
+            <a:srgbClr val="FFFFFF"/>
+          </a:solidFill>
+          <a:ln/>
+        </p:spPr>
+      </p:sp>
+      <p:sp>
+        <p:nvSpPr>
+          <p:cNvPr id="7" name="Shape 5"/>
+          <p:cNvSpPr/>
+          <p:nvPr/>
+        </p:nvSpPr>
+        <p:spPr>
+          <a:xfrm>
+            <a:off x="843077" y="6329477"/>
+            <a:ext cx="32918" cy="170078"/>
+          </a:xfrm>
+          <a:prstGeom prst="roundRect">
+            <a:avLst>
+              <a:gd name="adj" fmla="val 50001"/>
+            </a:avLst>
+          </a:prstGeom>
+          <a:solidFill>
+            <a:srgbClr val="FFFFFF"/>
+          </a:solidFill>
+          <a:ln/>
+        </p:spPr>
+      </p:sp>
+      <p:sp>
+        <p:nvSpPr>
+          <p:cNvPr id="8" name="Text 6"/>
+          <p:cNvSpPr/>
+          <p:nvPr/>
+        </p:nvSpPr>
+        <p:spPr>
+          <a:xfrm>
+            <a:off x="1024128" y="6254496"/>
+            <a:ext cx="2743200" cy="347472"/>
+          </a:xfrm>
+          <a:prstGeom prst="rect">
+            <a:avLst/>
+          </a:prstGeom>
+          <a:noFill/>
+          <a:ln/>
+        </p:spPr>
+        <p:txBody>
+          <a:bodyPr wrap="square" rtlCol="0" anchor="ctr"/>
+          <a:lstStyle/>
+          <a:p>
+            <a:pPr algn="l" indent="0" marL="0">
+              <a:buNone/>
+            </a:pPr>
+            <a:r>
+              <a:rPr lang="en-US" sz="1200" b="1" dirty="0">
+                <a:solidFill>
+                  <a:srgbClr val="93A4B8"/>
+                </a:solidFill>
+                <a:latin typeface="IBM Plex Sans" pitchFamily="34" charset="0"/>
+                <a:ea typeface="IBM Plex Sans" pitchFamily="34" charset="-122"/>
+                <a:cs typeface="IBM Plex Sans" pitchFamily="34" charset="-120"/>
+              </a:rPr>
+              <a:t>IdeaM</a:t>
+            </a:r>
+            <a:endParaRPr lang="en-US" sz="1200" dirty="0"/>
+          </a:p>
+        </p:txBody>
+      </p:sp>
+      <p:sp>
+        <p:nvSpPr>
+          <p:cNvPr id="9" name="Text 7"/>
+          <p:cNvSpPr/>
+          <p:nvPr/>
+        </p:nvSpPr>
+        <p:spPr>
+          <a:xfrm>
+            <a:off x="10180015" y="6254496"/>
+            <a:ext cx="1371600" cy="347472"/>
+          </a:xfrm>
+          <a:prstGeom prst="rect">
+            <a:avLst/>
+          </a:prstGeom>
+          <a:noFill/>
+          <a:ln/>
+        </p:spPr>
+        <p:txBody>
+          <a:bodyPr wrap="square" rtlCol="0" anchor="ctr"/>
+          <a:lstStyle/>
+          <a:p>
+            <a:pPr algn="r" indent="0" marL="0">
+              <a:buNone/>
+            </a:pPr>
+            <a:r>
+              <a:rPr lang="en-US" sz="1100" dirty="0">
+                <a:solidFill>
+                  <a:srgbClr val="93A4B8"/>
+                </a:solidFill>
+                <a:latin typeface="IBM Plex Sans" pitchFamily="34" charset="0"/>
+                <a:ea typeface="IBM Plex Sans" pitchFamily="34" charset="-122"/>
+                <a:cs typeface="IBM Plex Sans" pitchFamily="34" charset="-120"/>
+              </a:rPr>
+              <a:t>16 / 26</a:t>
+            </a:r>
+            <a:endParaRPr lang="en-US" sz="1100" dirty="0"/>
+          </a:p>
+        </p:txBody>
+      </p:sp>
+      <p:sp>
+        <p:nvSpPr>
+          <p:cNvPr id="10" name="Text 8"/>
+          <p:cNvSpPr/>
+          <p:nvPr/>
+        </p:nvSpPr>
+        <p:spPr>
+          <a:xfrm>
+            <a:off x="640080" y="502920"/>
+            <a:ext cx="10911535" cy="822960"/>
+          </a:xfrm>
+          <a:prstGeom prst="rect">
+            <a:avLst/>
+          </a:prstGeom>
+          <a:noFill/>
+          <a:ln/>
+        </p:spPr>
+        <p:txBody>
+          <a:bodyPr wrap="square" rtlCol="0" anchor="t"/>
+          <a:lstStyle/>
+          <a:p>
+            <a:pPr algn="l" indent="0" marL="0">
+              <a:buNone/>
+            </a:pPr>
+            <a:r>
+              <a:rPr lang="en-US" sz="2600" b="1" dirty="0">
+                <a:solidFill>
+                  <a:srgbClr val="F5F8FF"/>
+                </a:solidFill>
+                <a:latin typeface="IBM Plex Sans" pitchFamily="34" charset="0"/>
+                <a:ea typeface="IBM Plex Sans" pitchFamily="34" charset="-122"/>
+                <a:cs typeface="IBM Plex Sans" pitchFamily="34" charset="-120"/>
+              </a:rPr>
+              <a:t>The practices</a:t>
+            </a:r>
+            <a:endParaRPr lang="en-US" sz="2600" dirty="0"/>
+          </a:p>
+        </p:txBody>
+      </p:sp>
+      <p:sp>
+        <p:nvSpPr>
+          <p:cNvPr id="11" name="Shape 9"/>
+          <p:cNvSpPr/>
+          <p:nvPr/>
+        </p:nvSpPr>
+        <p:spPr>
+          <a:xfrm>
+            <a:off x="640080" y="1325880"/>
+            <a:ext cx="1005840" cy="82296"/>
+          </a:xfrm>
+          <a:prstGeom prst="rect">
+            <a:avLst/>
+          </a:prstGeom>
+          <a:solidFill>
+            <a:srgbClr val="3898FF"/>
+          </a:solidFill>
+          <a:ln/>
+        </p:spPr>
+      </p:sp>
+      <p:sp>
+        <p:nvSpPr>
+          <p:cNvPr id="12" name="Text 10"/>
+          <p:cNvSpPr/>
+          <p:nvPr/>
+        </p:nvSpPr>
+        <p:spPr>
+          <a:xfrm>
+            <a:off x="640080" y="1737360"/>
+            <a:ext cx="10911535" cy="4206240"/>
+          </a:xfrm>
+          <a:prstGeom prst="rect">
+            <a:avLst/>
+          </a:prstGeom>
+          <a:noFill/>
+          <a:ln/>
+        </p:spPr>
+        <p:txBody>
+          <a:bodyPr wrap="square" rtlCol="0" anchor="t"/>
+          <a:lstStyle/>
+          <a:p>
+            <a:pPr algn="l" marL="228600" indent="-228600">
+              <a:spcAft>
+                <a:spcPts val="1000"/>
+              </a:spcAft>
+              <a:buSzPct val="100000"/>
+              <a:buChar char="•"/>
+            </a:pPr>
+            <a:r>
+              <a:rPr lang="en-US" sz="1800" dirty="0">
+                <a:solidFill>
+                  <a:srgbClr val="F5F8FF"/>
+                </a:solidFill>
+                <a:latin typeface="IBM Plex Sans" pitchFamily="34" charset="0"/>
+                <a:ea typeface="IBM Plex Sans" pitchFamily="34" charset="-122"/>
+                <a:cs typeface="IBM Plex Sans" pitchFamily="34" charset="-120"/>
+              </a:rPr>
+              <a:t>Concretely, what "discipline" means in this project:</a:t>
+            </a:r>
+            <a:endParaRPr lang="en-US" sz="1800" dirty="0"/>
+          </a:p>
+          <a:p>
+            <a:pPr algn="l" marL="228600" indent="-228600">
+              <a:spcAft>
+                <a:spcPts val="1000"/>
+              </a:spcAft>
+              <a:buSzPct val="100000"/>
+              <a:buChar char="•"/>
+            </a:pPr>
+            <a:r>
+              <a:rPr lang="en-US" sz="1800" dirty="0">
+                <a:solidFill>
+                  <a:srgbClr val="F5F8FF"/>
+                </a:solidFill>
+                <a:latin typeface="IBM Plex Sans" pitchFamily="34" charset="0"/>
+                <a:ea typeface="IBM Plex Sans" pitchFamily="34" charset="-122"/>
+                <a:cs typeface="IBM Plex Sans" pitchFamily="34" charset="-120"/>
+              </a:rPr>
+              <a:t>Tiered testing — deterministic code is tested once; AI-powered features are run 5× and checked for invariants (did it stay true to the rules?) rather…</a:t>
+            </a:r>
+            <a:endParaRPr lang="en-US" sz="1800" dirty="0"/>
+          </a:p>
+          <a:p>
+            <a:pPr algn="l" marL="228600" indent="-228600">
+              <a:spcAft>
+                <a:spcPts val="1000"/>
+              </a:spcAft>
+              <a:buSzPct val="100000"/>
+              <a:buChar char="•"/>
+            </a:pPr>
+            <a:r>
+              <a:rPr lang="en-US" sz="1800" dirty="0">
+                <a:solidFill>
+                  <a:srgbClr val="F5F8FF"/>
+                </a:solidFill>
+                <a:latin typeface="IBM Plex Sans" pitchFamily="34" charset="0"/>
+                <a:ea typeface="IBM Plex Sans" pitchFamily="34" charset="-122"/>
+                <a:cs typeface="IBM Plex Sans" pitchFamily="34" charset="-120"/>
+              </a:rPr>
+              <a:t>Adversarial guardrails on anything touching money or privacy — assume the AI will try the wrong thing and block it.</a:t>
+            </a:r>
+            <a:endParaRPr lang="en-US" sz="1800" dirty="0"/>
+          </a:p>
+          <a:p>
+            <a:pPr algn="l" marL="228600" indent="-228600">
+              <a:spcAft>
+                <a:spcPts val="1000"/>
+              </a:spcAft>
+              <a:buSzPct val="100000"/>
+              <a:buChar char="•"/>
+            </a:pPr>
+            <a:r>
+              <a:rPr lang="en-US" sz="1800" dirty="0">
+                <a:solidFill>
+                  <a:srgbClr val="F5F8FF"/>
+                </a:solidFill>
+                <a:latin typeface="IBM Plex Sans" pitchFamily="34" charset="0"/>
+                <a:ea typeface="IBM Plex Sans" pitchFamily="34" charset="-122"/>
+                <a:cs typeface="IBM Plex Sans" pitchFamily="34" charset="-120"/>
+              </a:rPr>
+              <a:t>An always-on hallucination verifier checking AI output for invented facts.</a:t>
+            </a:r>
+            <a:endParaRPr lang="en-US" sz="1800" dirty="0"/>
+          </a:p>
+          <a:p>
+            <a:pPr algn="l" marL="228600" indent="-228600">
+              <a:spcAft>
+                <a:spcPts val="1000"/>
+              </a:spcAft>
+              <a:buSzPct val="100000"/>
+              <a:buChar char="•"/>
+            </a:pPr>
+            <a:r>
+              <a:rPr lang="en-US" sz="1800" dirty="0">
+                <a:solidFill>
+                  <a:srgbClr val="F5F8FF"/>
+                </a:solidFill>
+                <a:latin typeface="IBM Plex Sans" pitchFamily="34" charset="0"/>
+                <a:ea typeface="IBM Plex Sans" pitchFamily="34" charset="-122"/>
+                <a:cs typeface="IBM Plex Sans" pitchFamily="34" charset="-120"/>
+              </a:rPr>
+              <a:t>"Review before you trust" — a human reads the output before it counts.</a:t>
+            </a:r>
+            <a:endParaRPr lang="en-US" sz="1800" dirty="0"/>
+          </a:p>
+          <a:p>
+            <a:pPr algn="l" marL="228600" indent="-228600">
+              <a:spcAft>
+                <a:spcPts val="1000"/>
+              </a:spcAft>
+              <a:buSzPct val="100000"/>
+              <a:buChar char="•"/>
+            </a:pPr>
+            <a:r>
+              <a:rPr lang="en-US" sz="1800" dirty="0">
+                <a:solidFill>
+                  <a:srgbClr val="F5F8FF"/>
+                </a:solidFill>
+                <a:latin typeface="IBM Plex Sans" pitchFamily="34" charset="0"/>
+                <a:ea typeface="IBM Plex Sans" pitchFamily="34" charset="-122"/>
+                <a:cs typeface="IBM Plex Sans" pitchFamily="34" charset="-120"/>
+              </a:rPr>
+              <a:t>Periodic refactoring and keeping coupling low so the codebase stays healthy as it grows.</a:t>
+            </a:r>
+            <a:endParaRPr lang="en-US" sz="1800" dirty="0"/>
+          </a:p>
+        </p:txBody>
+      </p:sp>
+    </p:spTree>
+  </p:cSld>
+  <p:clrMapOvr>
+    <a:masterClrMapping/>
+  </p:clrMapOvr>
+</p:sld>
+</file>
+
+<file path=ppt/slides/slide17.xml><?xml version="1.0" encoding="utf-8"?>
+<p:sld xmlns:a="http://schemas.openxmlformats.org/drawingml/2006/main" xmlns:r="http://schemas.openxmlformats.org/officeDocument/2006/relationships" xmlns:p="http://schemas.openxmlformats.org/presentationml/2006/main">
+  <p:cSld name="Slide 17">
+    <p:bg>
+      <p:bgPr>
+        <a:solidFill>
+          <a:srgbClr val="0A1120"/>
+        </a:solidFill>
+      </p:bgPr>
+    </p:bg>
+    <p:spTree>
+      <p:nvGrpSpPr>
+        <p:cNvPr id="1" name=""/>
+        <p:cNvGrpSpPr/>
+        <p:nvPr/>
+      </p:nvGrpSpPr>
+      <p:grpSpPr>
+        <a:xfrm>
+          <a:off x="0" y="0"/>
+          <a:ext cx="0" cy="0"/>
+          <a:chOff x="0" y="0"/>
+          <a:chExt cx="0" cy="0"/>
+        </a:xfrm>
+      </p:grpSpPr>
+      <p:sp>
+        <p:nvSpPr>
+          <p:cNvPr id="2" name="Shape 0"/>
+          <p:cNvSpPr/>
+          <p:nvPr/>
+        </p:nvSpPr>
+        <p:spPr>
+          <a:xfrm>
+            <a:off x="0" y="0"/>
+            <a:ext cx="12191695" cy="109728"/>
+          </a:xfrm>
+          <a:prstGeom prst="rect">
+            <a:avLst/>
+          </a:prstGeom>
+          <a:solidFill>
+            <a:srgbClr val="3898FF"/>
+          </a:solidFill>
+          <a:ln/>
+        </p:spPr>
+      </p:sp>
+      <p:sp>
+        <p:nvSpPr>
+          <p:cNvPr id="3" name="Shape 1"/>
+          <p:cNvSpPr/>
+          <p:nvPr/>
+        </p:nvSpPr>
+        <p:spPr>
+          <a:xfrm>
+            <a:off x="640080" y="6291072"/>
+            <a:ext cx="274320" cy="274320"/>
+          </a:xfrm>
+          <a:prstGeom prst="roundRect">
+            <a:avLst>
+              <a:gd name="adj" fmla="val 22000"/>
+            </a:avLst>
+          </a:prstGeom>
+          <a:solidFill>
+            <a:srgbClr val="2563EB"/>
+          </a:solidFill>
+          <a:ln/>
+        </p:spPr>
+      </p:sp>
+      <p:sp>
+        <p:nvSpPr>
+          <p:cNvPr id="4" name="Shape 2"/>
+          <p:cNvSpPr/>
+          <p:nvPr/>
+        </p:nvSpPr>
+        <p:spPr>
+          <a:xfrm>
+            <a:off x="694944" y="6444691"/>
+            <a:ext cx="32918" cy="54864"/>
+          </a:xfrm>
+          <a:prstGeom prst="roundRect">
+            <a:avLst>
+              <a:gd name="adj" fmla="val 50001"/>
+            </a:avLst>
+          </a:prstGeom>
+          <a:solidFill>
+            <a:srgbClr val="FFFFFF"/>
+          </a:solidFill>
+          <a:ln/>
+        </p:spPr>
+      </p:sp>
+      <p:sp>
+        <p:nvSpPr>
+          <p:cNvPr id="5" name="Shape 3"/>
+          <p:cNvSpPr/>
+          <p:nvPr/>
+        </p:nvSpPr>
+        <p:spPr>
+          <a:xfrm>
+            <a:off x="744322" y="6406286"/>
+            <a:ext cx="32918" cy="93269"/>
+          </a:xfrm>
+          <a:prstGeom prst="roundRect">
+            <a:avLst>
+              <a:gd name="adj" fmla="val 50001"/>
+            </a:avLst>
+          </a:prstGeom>
+          <a:solidFill>
+            <a:srgbClr val="FFFFFF"/>
+          </a:solidFill>
+          <a:ln/>
+        </p:spPr>
+      </p:sp>
+      <p:sp>
+        <p:nvSpPr>
+          <p:cNvPr id="6" name="Shape 4"/>
+          <p:cNvSpPr/>
+          <p:nvPr/>
+        </p:nvSpPr>
+        <p:spPr>
+          <a:xfrm>
+            <a:off x="793699" y="6367882"/>
+            <a:ext cx="32918" cy="131674"/>
+          </a:xfrm>
+          <a:prstGeom prst="roundRect">
+            <a:avLst>
+              <a:gd name="adj" fmla="val 50001"/>
+            </a:avLst>
+          </a:prstGeom>
+          <a:solidFill>
+            <a:srgbClr val="FFFFFF"/>
+          </a:solidFill>
+          <a:ln/>
+        </p:spPr>
+      </p:sp>
+      <p:sp>
+        <p:nvSpPr>
+          <p:cNvPr id="7" name="Shape 5"/>
+          <p:cNvSpPr/>
+          <p:nvPr/>
+        </p:nvSpPr>
+        <p:spPr>
+          <a:xfrm>
+            <a:off x="843077" y="6329477"/>
+            <a:ext cx="32918" cy="170078"/>
+          </a:xfrm>
+          <a:prstGeom prst="roundRect">
+            <a:avLst>
+              <a:gd name="adj" fmla="val 50001"/>
+            </a:avLst>
+          </a:prstGeom>
+          <a:solidFill>
+            <a:srgbClr val="FFFFFF"/>
+          </a:solidFill>
+          <a:ln/>
+        </p:spPr>
+      </p:sp>
+      <p:sp>
+        <p:nvSpPr>
+          <p:cNvPr id="8" name="Text 6"/>
+          <p:cNvSpPr/>
+          <p:nvPr/>
+        </p:nvSpPr>
+        <p:spPr>
+          <a:xfrm>
+            <a:off x="1024128" y="6254496"/>
+            <a:ext cx="2743200" cy="347472"/>
+          </a:xfrm>
+          <a:prstGeom prst="rect">
+            <a:avLst/>
+          </a:prstGeom>
+          <a:noFill/>
+          <a:ln/>
+        </p:spPr>
+        <p:txBody>
+          <a:bodyPr wrap="square" rtlCol="0" anchor="ctr"/>
+          <a:lstStyle/>
+          <a:p>
+            <a:pPr algn="l" indent="0" marL="0">
+              <a:buNone/>
+            </a:pPr>
+            <a:r>
+              <a:rPr lang="en-US" sz="1200" b="1" dirty="0">
+                <a:solidFill>
+                  <a:srgbClr val="93A4B8"/>
+                </a:solidFill>
+                <a:latin typeface="IBM Plex Sans" pitchFamily="34" charset="0"/>
+                <a:ea typeface="IBM Plex Sans" pitchFamily="34" charset="-122"/>
+                <a:cs typeface="IBM Plex Sans" pitchFamily="34" charset="-120"/>
+              </a:rPr>
+              <a:t>IdeaM</a:t>
+            </a:r>
+            <a:endParaRPr lang="en-US" sz="1200" dirty="0"/>
+          </a:p>
+        </p:txBody>
+      </p:sp>
+      <p:sp>
+        <p:nvSpPr>
+          <p:cNvPr id="9" name="Text 7"/>
+          <p:cNvSpPr/>
+          <p:nvPr/>
+        </p:nvSpPr>
+        <p:spPr>
+          <a:xfrm>
+            <a:off x="10180015" y="6254496"/>
+            <a:ext cx="1371600" cy="347472"/>
+          </a:xfrm>
+          <a:prstGeom prst="rect">
+            <a:avLst/>
+          </a:prstGeom>
+          <a:noFill/>
+          <a:ln/>
+        </p:spPr>
+        <p:txBody>
+          <a:bodyPr wrap="square" rtlCol="0" anchor="ctr"/>
+          <a:lstStyle/>
+          <a:p>
+            <a:pPr algn="r" indent="0" marL="0">
+              <a:buNone/>
+            </a:pPr>
+            <a:r>
+              <a:rPr lang="en-US" sz="1100" dirty="0">
+                <a:solidFill>
+                  <a:srgbClr val="93A4B8"/>
+                </a:solidFill>
+                <a:latin typeface="IBM Plex Sans" pitchFamily="34" charset="0"/>
+                <a:ea typeface="IBM Plex Sans" pitchFamily="34" charset="-122"/>
+                <a:cs typeface="IBM Plex Sans" pitchFamily="34" charset="-120"/>
+              </a:rPr>
+              <a:t>17 / 26</a:t>
+            </a:r>
+            <a:endParaRPr lang="en-US" sz="1100" dirty="0"/>
+          </a:p>
+        </p:txBody>
+      </p:sp>
+      <p:sp>
+        <p:nvSpPr>
+          <p:cNvPr id="10" name="Text 8"/>
+          <p:cNvSpPr/>
+          <p:nvPr/>
+        </p:nvSpPr>
+        <p:spPr>
+          <a:xfrm>
+            <a:off x="640080" y="502920"/>
+            <a:ext cx="10911535" cy="822960"/>
+          </a:xfrm>
+          <a:prstGeom prst="rect">
+            <a:avLst/>
+          </a:prstGeom>
+          <a:noFill/>
+          <a:ln/>
+        </p:spPr>
+        <p:txBody>
+          <a:bodyPr wrap="square" rtlCol="0" anchor="t"/>
+          <a:lstStyle/>
+          <a:p>
+            <a:pPr algn="l" indent="0" marL="0">
+              <a:buNone/>
+            </a:pPr>
+            <a:r>
+              <a:rPr lang="en-US" sz="2600" b="1" dirty="0">
+                <a:solidFill>
+                  <a:srgbClr val="F5F8FF"/>
+                </a:solidFill>
+                <a:latin typeface="IBM Plex Sans" pitchFamily="34" charset="0"/>
+                <a:ea typeface="IBM Plex Sans" pitchFamily="34" charset="-122"/>
+                <a:cs typeface="IBM Plex Sans" pitchFamily="34" charset="-120"/>
+              </a:rPr>
+              <a:t>The lesson for students</a:t>
+            </a:r>
+            <a:endParaRPr lang="en-US" sz="2600" dirty="0"/>
+          </a:p>
+        </p:txBody>
+      </p:sp>
+      <p:sp>
+        <p:nvSpPr>
+          <p:cNvPr id="11" name="Shape 9"/>
+          <p:cNvSpPr/>
+          <p:nvPr/>
+        </p:nvSpPr>
+        <p:spPr>
+          <a:xfrm>
+            <a:off x="640080" y="1325880"/>
+            <a:ext cx="1005840" cy="82296"/>
+          </a:xfrm>
+          <a:prstGeom prst="rect">
+            <a:avLst/>
+          </a:prstGeom>
+          <a:solidFill>
+            <a:srgbClr val="3898FF"/>
+          </a:solidFill>
+          <a:ln/>
+        </p:spPr>
+      </p:sp>
+      <p:sp>
+        <p:nvSpPr>
+          <p:cNvPr id="12" name="Text 10"/>
+          <p:cNvSpPr/>
+          <p:nvPr/>
+        </p:nvSpPr>
+        <p:spPr>
+          <a:xfrm>
+            <a:off x="640080" y="1737360"/>
+            <a:ext cx="10911535" cy="4206240"/>
+          </a:xfrm>
+          <a:prstGeom prst="rect">
+            <a:avLst/>
+          </a:prstGeom>
+          <a:noFill/>
+          <a:ln/>
+        </p:spPr>
+        <p:txBody>
+          <a:bodyPr wrap="square" rtlCol="0" anchor="t"/>
+          <a:lstStyle/>
+          <a:p>
+            <a:pPr algn="l" marL="228600" indent="-228600">
+              <a:spcAft>
+                <a:spcPts val="1000"/>
+              </a:spcAft>
+              <a:buSzPct val="100000"/>
+              <a:buChar char="•"/>
+            </a:pPr>
+            <a:r>
+              <a:rPr lang="en-US" sz="1800" dirty="0">
+                <a:solidFill>
+                  <a:srgbClr val="F5F8FF"/>
+                </a:solidFill>
+                <a:latin typeface="IBM Plex Sans" pitchFamily="34" charset="0"/>
+                <a:ea typeface="IBM Plex Sans" pitchFamily="34" charset="-122"/>
+                <a:cs typeface="IBM Plex Sans" pitchFamily="34" charset="-120"/>
+              </a:rPr>
+              <a:t>AI-first development is not magic and it is not a threat to skill — it is a new discipline.</a:t>
+            </a:r>
+            <a:endParaRPr lang="en-US" sz="1800" dirty="0"/>
+          </a:p>
+          <a:p>
+            <a:pPr algn="l" marL="228600" indent="-228600">
+              <a:spcAft>
+                <a:spcPts val="1000"/>
+              </a:spcAft>
+              <a:buSzPct val="100000"/>
+              <a:buChar char="•"/>
+            </a:pPr>
+            <a:r>
+              <a:rPr lang="en-US" sz="1800" dirty="0">
+                <a:solidFill>
+                  <a:srgbClr val="F5F8FF"/>
+                </a:solidFill>
+                <a:latin typeface="IBM Plex Sans" pitchFamily="34" charset="0"/>
+                <a:ea typeface="IBM Plex Sans" pitchFamily="34" charset="-122"/>
+                <a:cs typeface="IBM Plex Sans" pitchFamily="34" charset="-120"/>
+              </a:rPr>
+              <a:t>The skill shifts from writing every line to directing and verifying.</a:t>
+            </a:r>
+            <a:endParaRPr lang="en-US" sz="1800" dirty="0"/>
+          </a:p>
+          <a:p>
+            <a:pPr algn="l" marL="228600" indent="-228600">
+              <a:spcAft>
+                <a:spcPts val="1000"/>
+              </a:spcAft>
+              <a:buSzPct val="100000"/>
+              <a:buChar char="•"/>
+            </a:pPr>
+            <a:r>
+              <a:rPr lang="en-US" sz="1800" dirty="0">
+                <a:solidFill>
+                  <a:srgbClr val="F5F8FF"/>
+                </a:solidFill>
+                <a:latin typeface="IBM Plex Sans" pitchFamily="34" charset="0"/>
+                <a:ea typeface="IBM Plex Sans" pitchFamily="34" charset="-122"/>
+                <a:cs typeface="IBM Plex Sans" pitchFamily="34" charset="-120"/>
+              </a:rPr>
+              <a:t>Don't just prompt; direct and verify.</a:t>
+            </a:r>
+            <a:endParaRPr lang="en-US" sz="1800" dirty="0"/>
+          </a:p>
+          <a:p>
+            <a:pPr algn="l" marL="228600" indent="-228600">
+              <a:spcAft>
+                <a:spcPts val="1000"/>
+              </a:spcAft>
+              <a:buSzPct val="100000"/>
+              <a:buChar char="•"/>
+            </a:pPr>
+            <a:r>
+              <a:rPr lang="en-US" sz="1800" dirty="0">
+                <a:solidFill>
+                  <a:srgbClr val="F5F8FF"/>
+                </a:solidFill>
+                <a:latin typeface="IBM Plex Sans" pitchFamily="34" charset="0"/>
+                <a:ea typeface="IBM Plex Sans" pitchFamily="34" charset="-122"/>
+                <a:cs typeface="IBM Plex Sans" pitchFamily="34" charset="-120"/>
+              </a:rPr>
+              <a:t>That sentence is the one students should leave with.</a:t>
+            </a:r>
+            <a:endParaRPr lang="en-US" sz="1800" dirty="0"/>
+          </a:p>
+        </p:txBody>
+      </p:sp>
+    </p:spTree>
+  </p:cSld>
+  <p:clrMapOvr>
+    <a:masterClrMapping/>
+  </p:clrMapOvr>
+</p:sld>
+</file>
+
+<file path=ppt/slides/slide18.xml><?xml version="1.0" encoding="utf-8"?>
+<p:sld xmlns:a="http://schemas.openxmlformats.org/drawingml/2006/main" xmlns:r="http://schemas.openxmlformats.org/officeDocument/2006/relationships" xmlns:p="http://schemas.openxmlformats.org/presentationml/2006/main">
+  <p:cSld name="Slide 18">
+    <p:bg>
+      <p:bgPr>
+        <a:solidFill>
+          <a:srgbClr val="0A1120"/>
+        </a:solidFill>
+      </p:bgPr>
+    </p:bg>
+    <p:spTree>
+      <p:nvGrpSpPr>
+        <p:cNvPr id="1" name=""/>
+        <p:cNvGrpSpPr/>
+        <p:nvPr/>
+      </p:nvGrpSpPr>
+      <p:grpSpPr>
+        <a:xfrm>
+          <a:off x="0" y="0"/>
+          <a:ext cx="0" cy="0"/>
+          <a:chOff x="0" y="0"/>
+          <a:chExt cx="0" cy="0"/>
+        </a:xfrm>
+      </p:grpSpPr>
+      <p:sp>
+        <p:nvSpPr>
+          <p:cNvPr id="2" name="Shape 0"/>
+          <p:cNvSpPr/>
+          <p:nvPr/>
+        </p:nvSpPr>
+        <p:spPr>
+          <a:xfrm>
+            <a:off x="0" y="0"/>
+            <a:ext cx="12191695" cy="109728"/>
+          </a:xfrm>
+          <a:prstGeom prst="rect">
+            <a:avLst/>
+          </a:prstGeom>
+          <a:solidFill>
+            <a:srgbClr val="3898FF"/>
+          </a:solidFill>
+          <a:ln/>
+        </p:spPr>
+      </p:sp>
+      <p:sp>
+        <p:nvSpPr>
+          <p:cNvPr id="3" name="Shape 1"/>
+          <p:cNvSpPr/>
+          <p:nvPr/>
+        </p:nvSpPr>
+        <p:spPr>
+          <a:xfrm>
+            <a:off x="640080" y="6291072"/>
+            <a:ext cx="274320" cy="274320"/>
+          </a:xfrm>
+          <a:prstGeom prst="roundRect">
+            <a:avLst>
+              <a:gd name="adj" fmla="val 22000"/>
+            </a:avLst>
+          </a:prstGeom>
+          <a:solidFill>
+            <a:srgbClr val="2563EB"/>
+          </a:solidFill>
+          <a:ln/>
+        </p:spPr>
+      </p:sp>
+      <p:sp>
+        <p:nvSpPr>
+          <p:cNvPr id="4" name="Shape 2"/>
+          <p:cNvSpPr/>
+          <p:nvPr/>
+        </p:nvSpPr>
+        <p:spPr>
+          <a:xfrm>
+            <a:off x="694944" y="6444691"/>
+            <a:ext cx="32918" cy="54864"/>
+          </a:xfrm>
+          <a:prstGeom prst="roundRect">
+            <a:avLst>
+              <a:gd name="adj" fmla="val 50001"/>
+            </a:avLst>
+          </a:prstGeom>
+          <a:solidFill>
+            <a:srgbClr val="FFFFFF"/>
+          </a:solidFill>
+          <a:ln/>
+        </p:spPr>
+      </p:sp>
+      <p:sp>
+        <p:nvSpPr>
+          <p:cNvPr id="5" name="Shape 3"/>
+          <p:cNvSpPr/>
+          <p:nvPr/>
+        </p:nvSpPr>
+        <p:spPr>
+          <a:xfrm>
+            <a:off x="744322" y="6406286"/>
+            <a:ext cx="32918" cy="93269"/>
+          </a:xfrm>
+          <a:prstGeom prst="roundRect">
+            <a:avLst>
+              <a:gd name="adj" fmla="val 50001"/>
+            </a:avLst>
+          </a:prstGeom>
+          <a:solidFill>
+            <a:srgbClr val="FFFFFF"/>
+          </a:solidFill>
+          <a:ln/>
+        </p:spPr>
+      </p:sp>
+      <p:sp>
+        <p:nvSpPr>
+          <p:cNvPr id="6" name="Shape 4"/>
+          <p:cNvSpPr/>
+          <p:nvPr/>
+        </p:nvSpPr>
+        <p:spPr>
+          <a:xfrm>
+            <a:off x="793699" y="6367882"/>
+            <a:ext cx="32918" cy="131674"/>
+          </a:xfrm>
+          <a:prstGeom prst="roundRect">
+            <a:avLst>
+              <a:gd name="adj" fmla="val 50001"/>
+            </a:avLst>
+          </a:prstGeom>
+          <a:solidFill>
+            <a:srgbClr val="FFFFFF"/>
+          </a:solidFill>
+          <a:ln/>
+        </p:spPr>
+      </p:sp>
+      <p:sp>
+        <p:nvSpPr>
+          <p:cNvPr id="7" name="Shape 5"/>
+          <p:cNvSpPr/>
+          <p:nvPr/>
+        </p:nvSpPr>
+        <p:spPr>
+          <a:xfrm>
+            <a:off x="843077" y="6329477"/>
+            <a:ext cx="32918" cy="170078"/>
+          </a:xfrm>
+          <a:prstGeom prst="roundRect">
+            <a:avLst>
+              <a:gd name="adj" fmla="val 50001"/>
+            </a:avLst>
+          </a:prstGeom>
+          <a:solidFill>
+            <a:srgbClr val="FFFFFF"/>
+          </a:solidFill>
+          <a:ln/>
+        </p:spPr>
+      </p:sp>
+      <p:sp>
+        <p:nvSpPr>
+          <p:cNvPr id="8" name="Text 6"/>
+          <p:cNvSpPr/>
+          <p:nvPr/>
+        </p:nvSpPr>
+        <p:spPr>
+          <a:xfrm>
+            <a:off x="1024128" y="6254496"/>
+            <a:ext cx="2743200" cy="347472"/>
+          </a:xfrm>
+          <a:prstGeom prst="rect">
+            <a:avLst/>
+          </a:prstGeom>
+          <a:noFill/>
+          <a:ln/>
+        </p:spPr>
+        <p:txBody>
+          <a:bodyPr wrap="square" rtlCol="0" anchor="ctr"/>
+          <a:lstStyle/>
+          <a:p>
+            <a:pPr algn="l" indent="0" marL="0">
+              <a:buNone/>
+            </a:pPr>
+            <a:r>
+              <a:rPr lang="en-US" sz="1200" b="1" dirty="0">
+                <a:solidFill>
+                  <a:srgbClr val="93A4B8"/>
+                </a:solidFill>
+                <a:latin typeface="IBM Plex Sans" pitchFamily="34" charset="0"/>
+                <a:ea typeface="IBM Plex Sans" pitchFamily="34" charset="-122"/>
+                <a:cs typeface="IBM Plex Sans" pitchFamily="34" charset="-120"/>
+              </a:rPr>
+              <a:t>IdeaM</a:t>
+            </a:r>
+            <a:endParaRPr lang="en-US" sz="1200" dirty="0"/>
+          </a:p>
+        </p:txBody>
+      </p:sp>
+      <p:sp>
+        <p:nvSpPr>
+          <p:cNvPr id="9" name="Text 7"/>
+          <p:cNvSpPr/>
+          <p:nvPr/>
+        </p:nvSpPr>
+        <p:spPr>
+          <a:xfrm>
+            <a:off x="10180015" y="6254496"/>
+            <a:ext cx="1371600" cy="347472"/>
+          </a:xfrm>
+          <a:prstGeom prst="rect">
+            <a:avLst/>
+          </a:prstGeom>
+          <a:noFill/>
+          <a:ln/>
+        </p:spPr>
+        <p:txBody>
+          <a:bodyPr wrap="square" rtlCol="0" anchor="ctr"/>
+          <a:lstStyle/>
+          <a:p>
+            <a:pPr algn="r" indent="0" marL="0">
+              <a:buNone/>
+            </a:pPr>
+            <a:r>
+              <a:rPr lang="en-US" sz="1100" dirty="0">
+                <a:solidFill>
+                  <a:srgbClr val="93A4B8"/>
+                </a:solidFill>
+                <a:latin typeface="IBM Plex Sans" pitchFamily="34" charset="0"/>
+                <a:ea typeface="IBM Plex Sans" pitchFamily="34" charset="-122"/>
+                <a:cs typeface="IBM Plex Sans" pitchFamily="34" charset="-120"/>
+              </a:rPr>
+              <a:t>18 / 26</a:t>
+            </a:r>
+            <a:endParaRPr lang="en-US" sz="1100" dirty="0"/>
+          </a:p>
+        </p:txBody>
+      </p:sp>
+      <p:sp>
+        <p:nvSpPr>
+          <p:cNvPr id="10" name="Text 8"/>
+          <p:cNvSpPr/>
+          <p:nvPr/>
+        </p:nvSpPr>
+        <p:spPr>
+          <a:xfrm>
+            <a:off x="640080" y="502920"/>
+            <a:ext cx="10911535" cy="822960"/>
+          </a:xfrm>
+          <a:prstGeom prst="rect">
+            <a:avLst/>
+          </a:prstGeom>
+          <a:noFill/>
+          <a:ln/>
+        </p:spPr>
+        <p:txBody>
+          <a:bodyPr wrap="square" rtlCol="0" anchor="t"/>
+          <a:lstStyle/>
+          <a:p>
+            <a:pPr algn="l" indent="0" marL="0">
+              <a:buNone/>
+            </a:pPr>
+            <a:r>
+              <a:rPr lang="en-US" sz="2600" b="1" dirty="0">
+                <a:solidFill>
+                  <a:srgbClr val="F5F8FF"/>
+                </a:solidFill>
+                <a:latin typeface="IBM Plex Sans" pitchFamily="34" charset="0"/>
+                <a:ea typeface="IBM Plex Sans" pitchFamily="34" charset="-122"/>
+                <a:cs typeface="IBM Plex Sans" pitchFamily="34" charset="-120"/>
+              </a:rPr>
+              <a:t>Takeaways for the University</a:t>
+            </a:r>
+            <a:endParaRPr lang="en-US" sz="2600" dirty="0"/>
+          </a:p>
+        </p:txBody>
+      </p:sp>
+      <p:sp>
+        <p:nvSpPr>
+          <p:cNvPr id="11" name="Shape 9"/>
+          <p:cNvSpPr/>
+          <p:nvPr/>
+        </p:nvSpPr>
+        <p:spPr>
+          <a:xfrm>
+            <a:off x="640080" y="1325880"/>
+            <a:ext cx="1005840" cy="82296"/>
+          </a:xfrm>
+          <a:prstGeom prst="rect">
+            <a:avLst/>
+          </a:prstGeom>
+          <a:solidFill>
+            <a:srgbClr val="3898FF"/>
+          </a:solidFill>
+          <a:ln/>
+        </p:spPr>
+      </p:sp>
+      <p:sp>
+        <p:nvSpPr>
+          <p:cNvPr id="12" name="Text 10"/>
+          <p:cNvSpPr/>
+          <p:nvPr/>
+        </p:nvSpPr>
+        <p:spPr>
+          <a:xfrm>
+            <a:off x="640080" y="1737360"/>
+            <a:ext cx="10911535" cy="4206240"/>
+          </a:xfrm>
+          <a:prstGeom prst="rect">
+            <a:avLst/>
+          </a:prstGeom>
+          <a:noFill/>
+          <a:ln/>
+        </p:spPr>
+        <p:txBody>
+          <a:bodyPr wrap="square" rtlCol="0" anchor="t"/>
+          <a:lstStyle/>
+          <a:p>
+            <a:pPr algn="l" marL="228600" indent="-228600">
+              <a:spcAft>
+                <a:spcPts val="1000"/>
+              </a:spcAft>
+              <a:buSzPct val="100000"/>
+              <a:buChar char="•"/>
+            </a:pPr>
+            <a:r>
+              <a:rPr lang="en-US" sz="1800" dirty="0">
+                <a:solidFill>
+                  <a:srgbClr val="F5F8FF"/>
+                </a:solidFill>
+                <a:latin typeface="IBM Plex Sans" pitchFamily="34" charset="0"/>
+                <a:ea typeface="IBM Plex Sans" pitchFamily="34" charset="-122"/>
+                <a:cs typeface="IBM Plex Sans" pitchFamily="34" charset="-120"/>
+              </a:rPr>
+              <a:t>Land the talk with something for each part of the room.</a:t>
+            </a:r>
+            <a:endParaRPr lang="en-US" sz="1800" dirty="0"/>
+          </a:p>
+        </p:txBody>
+      </p:sp>
+    </p:spTree>
+  </p:cSld>
+  <p:clrMapOvr>
+    <a:masterClrMapping/>
+  </p:clrMapOvr>
+</p:sld>
+</file>
+
+<file path=ppt/slides/slide19.xml><?xml version="1.0" encoding="utf-8"?>
+<p:sld xmlns:a="http://schemas.openxmlformats.org/drawingml/2006/main" xmlns:r="http://schemas.openxmlformats.org/officeDocument/2006/relationships" xmlns:p="http://schemas.openxmlformats.org/presentationml/2006/main">
+  <p:cSld name="Slide 19">
+    <p:bg>
+      <p:bgPr>
+        <a:solidFill>
+          <a:srgbClr val="0A1120"/>
+        </a:solidFill>
+      </p:bgPr>
+    </p:bg>
+    <p:spTree>
+      <p:nvGrpSpPr>
+        <p:cNvPr id="1" name=""/>
+        <p:cNvGrpSpPr/>
+        <p:nvPr/>
+      </p:nvGrpSpPr>
+      <p:grpSpPr>
+        <a:xfrm>
+          <a:off x="0" y="0"/>
+          <a:ext cx="0" cy="0"/>
+          <a:chOff x="0" y="0"/>
+          <a:chExt cx="0" cy="0"/>
+        </a:xfrm>
+      </p:grpSpPr>
+      <p:sp>
+        <p:nvSpPr>
+          <p:cNvPr id="2" name="Shape 0"/>
+          <p:cNvSpPr/>
+          <p:nvPr/>
+        </p:nvSpPr>
+        <p:spPr>
+          <a:xfrm>
+            <a:off x="0" y="0"/>
+            <a:ext cx="12191695" cy="109728"/>
+          </a:xfrm>
+          <a:prstGeom prst="rect">
+            <a:avLst/>
+          </a:prstGeom>
+          <a:solidFill>
+            <a:srgbClr val="3898FF"/>
+          </a:solidFill>
+          <a:ln/>
+        </p:spPr>
+      </p:sp>
+      <p:sp>
+        <p:nvSpPr>
+          <p:cNvPr id="3" name="Shape 1"/>
+          <p:cNvSpPr/>
+          <p:nvPr/>
+        </p:nvSpPr>
+        <p:spPr>
+          <a:xfrm>
+            <a:off x="640080" y="6291072"/>
+            <a:ext cx="274320" cy="274320"/>
+          </a:xfrm>
+          <a:prstGeom prst="roundRect">
+            <a:avLst>
+              <a:gd name="adj" fmla="val 22000"/>
+            </a:avLst>
+          </a:prstGeom>
+          <a:solidFill>
+            <a:srgbClr val="2563EB"/>
+          </a:solidFill>
+          <a:ln/>
+        </p:spPr>
+      </p:sp>
+      <p:sp>
+        <p:nvSpPr>
+          <p:cNvPr id="4" name="Shape 2"/>
+          <p:cNvSpPr/>
+          <p:nvPr/>
+        </p:nvSpPr>
+        <p:spPr>
+          <a:xfrm>
+            <a:off x="694944" y="6444691"/>
+            <a:ext cx="32918" cy="54864"/>
+          </a:xfrm>
+          <a:prstGeom prst="roundRect">
+            <a:avLst>
+              <a:gd name="adj" fmla="val 50001"/>
+            </a:avLst>
+          </a:prstGeom>
+          <a:solidFill>
+            <a:srgbClr val="FFFFFF"/>
+          </a:solidFill>
+          <a:ln/>
+        </p:spPr>
+      </p:sp>
+      <p:sp>
+        <p:nvSpPr>
+          <p:cNvPr id="5" name="Shape 3"/>
+          <p:cNvSpPr/>
+          <p:nvPr/>
+        </p:nvSpPr>
+        <p:spPr>
+          <a:xfrm>
+            <a:off x="744322" y="6406286"/>
+            <a:ext cx="32918" cy="93269"/>
+          </a:xfrm>
+          <a:prstGeom prst="roundRect">
+            <a:avLst>
+              <a:gd name="adj" fmla="val 50001"/>
+            </a:avLst>
+          </a:prstGeom>
+          <a:solidFill>
+            <a:srgbClr val="FFFFFF"/>
+          </a:solidFill>
+          <a:ln/>
+        </p:spPr>
+      </p:sp>
+      <p:sp>
+        <p:nvSpPr>
+          <p:cNvPr id="6" name="Shape 4"/>
+          <p:cNvSpPr/>
+          <p:nvPr/>
+        </p:nvSpPr>
+        <p:spPr>
+          <a:xfrm>
+            <a:off x="793699" y="6367882"/>
+            <a:ext cx="32918" cy="131674"/>
+          </a:xfrm>
+          <a:prstGeom prst="roundRect">
+            <a:avLst>
+              <a:gd name="adj" fmla="val 50001"/>
+            </a:avLst>
+          </a:prstGeom>
+          <a:solidFill>
+            <a:srgbClr val="FFFFFF"/>
+          </a:solidFill>
+          <a:ln/>
+        </p:spPr>
+      </p:sp>
+      <p:sp>
+        <p:nvSpPr>
+          <p:cNvPr id="7" name="Shape 5"/>
+          <p:cNvSpPr/>
+          <p:nvPr/>
+        </p:nvSpPr>
+        <p:spPr>
+          <a:xfrm>
+            <a:off x="843077" y="6329477"/>
+            <a:ext cx="32918" cy="170078"/>
+          </a:xfrm>
+          <a:prstGeom prst="roundRect">
+            <a:avLst>
+              <a:gd name="adj" fmla="val 50001"/>
+            </a:avLst>
+          </a:prstGeom>
+          <a:solidFill>
+            <a:srgbClr val="FFFFFF"/>
+          </a:solidFill>
+          <a:ln/>
+        </p:spPr>
+      </p:sp>
+      <p:sp>
+        <p:nvSpPr>
+          <p:cNvPr id="8" name="Text 6"/>
+          <p:cNvSpPr/>
+          <p:nvPr/>
+        </p:nvSpPr>
+        <p:spPr>
+          <a:xfrm>
+            <a:off x="1024128" y="6254496"/>
+            <a:ext cx="2743200" cy="347472"/>
+          </a:xfrm>
+          <a:prstGeom prst="rect">
+            <a:avLst/>
+          </a:prstGeom>
+          <a:noFill/>
+          <a:ln/>
+        </p:spPr>
+        <p:txBody>
+          <a:bodyPr wrap="square" rtlCol="0" anchor="ctr"/>
+          <a:lstStyle/>
+          <a:p>
+            <a:pPr algn="l" indent="0" marL="0">
+              <a:buNone/>
+            </a:pPr>
+            <a:r>
+              <a:rPr lang="en-US" sz="1200" b="1" dirty="0">
+                <a:solidFill>
+                  <a:srgbClr val="93A4B8"/>
+                </a:solidFill>
+                <a:latin typeface="IBM Plex Sans" pitchFamily="34" charset="0"/>
+                <a:ea typeface="IBM Plex Sans" pitchFamily="34" charset="-122"/>
+                <a:cs typeface="IBM Plex Sans" pitchFamily="34" charset="-120"/>
+              </a:rPr>
+              <a:t>IdeaM</a:t>
+            </a:r>
+            <a:endParaRPr lang="en-US" sz="1200" dirty="0"/>
+          </a:p>
+        </p:txBody>
+      </p:sp>
+      <p:sp>
+        <p:nvSpPr>
+          <p:cNvPr id="9" name="Text 7"/>
+          <p:cNvSpPr/>
+          <p:nvPr/>
+        </p:nvSpPr>
+        <p:spPr>
+          <a:xfrm>
+            <a:off x="10180015" y="6254496"/>
+            <a:ext cx="1371600" cy="347472"/>
+          </a:xfrm>
+          <a:prstGeom prst="rect">
+            <a:avLst/>
+          </a:prstGeom>
+          <a:noFill/>
+          <a:ln/>
+        </p:spPr>
+        <p:txBody>
+          <a:bodyPr wrap="square" rtlCol="0" anchor="ctr"/>
+          <a:lstStyle/>
+          <a:p>
+            <a:pPr algn="r" indent="0" marL="0">
+              <a:buNone/>
+            </a:pPr>
+            <a:r>
+              <a:rPr lang="en-US" sz="1100" dirty="0">
+                <a:solidFill>
+                  <a:srgbClr val="93A4B8"/>
+                </a:solidFill>
+                <a:latin typeface="IBM Plex Sans" pitchFamily="34" charset="0"/>
+                <a:ea typeface="IBM Plex Sans" pitchFamily="34" charset="-122"/>
+                <a:cs typeface="IBM Plex Sans" pitchFamily="34" charset="-120"/>
+              </a:rPr>
+              <a:t>19 / 26</a:t>
+            </a:r>
+            <a:endParaRPr lang="en-US" sz="1100" dirty="0"/>
+          </a:p>
+        </p:txBody>
+      </p:sp>
+      <p:sp>
+        <p:nvSpPr>
+          <p:cNvPr id="10" name="Text 8"/>
+          <p:cNvSpPr/>
+          <p:nvPr/>
+        </p:nvSpPr>
+        <p:spPr>
+          <a:xfrm>
+            <a:off x="640080" y="502920"/>
+            <a:ext cx="10911535" cy="822960"/>
+          </a:xfrm>
+          <a:prstGeom prst="rect">
+            <a:avLst/>
+          </a:prstGeom>
+          <a:noFill/>
+          <a:ln/>
+        </p:spPr>
+        <p:txBody>
+          <a:bodyPr wrap="square" rtlCol="0" anchor="t"/>
+          <a:lstStyle/>
+          <a:p>
+            <a:pPr algn="l" indent="0" marL="0">
+              <a:buNone/>
+            </a:pPr>
+            <a:r>
+              <a:rPr lang="en-US" sz="2600" b="1" dirty="0">
+                <a:solidFill>
+                  <a:srgbClr val="F5F8FF"/>
+                </a:solidFill>
+                <a:latin typeface="IBM Plex Sans" pitchFamily="34" charset="0"/>
+                <a:ea typeface="IBM Plex Sans" pitchFamily="34" charset="-122"/>
+                <a:cs typeface="IBM Plex Sans" pitchFamily="34" charset="-120"/>
+              </a:rPr>
+              <a:t>For students &amp; researchers</a:t>
+            </a:r>
+            <a:endParaRPr lang="en-US" sz="2600" dirty="0"/>
+          </a:p>
+        </p:txBody>
+      </p:sp>
+      <p:sp>
+        <p:nvSpPr>
+          <p:cNvPr id="11" name="Shape 9"/>
+          <p:cNvSpPr/>
+          <p:nvPr/>
+        </p:nvSpPr>
+        <p:spPr>
+          <a:xfrm>
+            <a:off x="640080" y="1325880"/>
+            <a:ext cx="1005840" cy="82296"/>
+          </a:xfrm>
+          <a:prstGeom prst="rect">
+            <a:avLst/>
+          </a:prstGeom>
+          <a:solidFill>
+            <a:srgbClr val="3898FF"/>
+          </a:solidFill>
+          <a:ln/>
+        </p:spPr>
+      </p:sp>
+      <p:sp>
+        <p:nvSpPr>
+          <p:cNvPr id="12" name="Text 10"/>
+          <p:cNvSpPr/>
+          <p:nvPr/>
+        </p:nvSpPr>
+        <p:spPr>
+          <a:xfrm>
+            <a:off x="640080" y="1737360"/>
+            <a:ext cx="10911535" cy="4206240"/>
+          </a:xfrm>
+          <a:prstGeom prst="rect">
+            <a:avLst/>
+          </a:prstGeom>
+          <a:noFill/>
+          <a:ln/>
+        </p:spPr>
+        <p:txBody>
+          <a:bodyPr wrap="square" rtlCol="0" anchor="t"/>
+          <a:lstStyle/>
+          <a:p>
+            <a:pPr algn="l" marL="228600" indent="-228600">
+              <a:spcAft>
+                <a:spcPts val="1000"/>
+              </a:spcAft>
+              <a:buSzPct val="100000"/>
+              <a:buChar char="•"/>
+            </a:pPr>
+            <a:r>
+              <a:rPr lang="en-US" sz="1800" dirty="0">
+                <a:solidFill>
+                  <a:srgbClr val="F5F8FF"/>
+                </a:solidFill>
+                <a:latin typeface="IBM Plex Sans" pitchFamily="34" charset="0"/>
+                <a:ea typeface="IBM Plex Sans" pitchFamily="34" charset="-122"/>
+                <a:cs typeface="IBM Plex Sans" pitchFamily="34" charset="-120"/>
+              </a:rPr>
+              <a:t>Idea Engineering is a skill and a tool: think faster, produce more, publish in your own voice, and keep it private.</a:t>
+            </a:r>
+            <a:endParaRPr lang="en-US" sz="1800" dirty="0"/>
+          </a:p>
+          <a:p>
+            <a:pPr algn="l" marL="228600" indent="-228600">
+              <a:spcAft>
+                <a:spcPts val="1000"/>
+              </a:spcAft>
+              <a:buSzPct val="100000"/>
+              <a:buChar char="•"/>
+            </a:pPr>
+            <a:r>
+              <a:rPr lang="en-US" sz="1800" dirty="0">
+                <a:solidFill>
+                  <a:srgbClr val="F5F8FF"/>
+                </a:solidFill>
+                <a:latin typeface="IBM Plex Sans" pitchFamily="34" charset="0"/>
+                <a:ea typeface="IBM Plex Sans" pitchFamily="34" charset="-122"/>
+                <a:cs typeface="IBM Plex Sans" pitchFamily="34" charset="-120"/>
+              </a:rPr>
+              <a:t>It's leverage on the exact work a degree is made of.</a:t>
+            </a:r>
+            <a:endParaRPr lang="en-US" sz="1800" dirty="0"/>
           </a:p>
         </p:txBody>
       </p:sp>
@@ -3640,7 +9168,7 @@
                 <a:ea typeface="IBM Plex Sans" pitchFamily="34" charset="-122"/>
                 <a:cs typeface="IBM Plex Sans" pitchFamily="34" charset="-120"/>
               </a:rPr>
-              <a:t>2 / 11</a:t>
+              <a:t>2 / 26</a:t>
             </a:r>
             <a:endParaRPr lang="en-US" sz="1100" dirty="0"/>
           </a:p>
@@ -4122,6 +9650,2721 @@
               <a:t>Publish</a:t>
             </a:r>
             <a:endParaRPr lang="en-US" sz="1800" dirty="0"/>
+          </a:p>
+        </p:txBody>
+      </p:sp>
+    </p:spTree>
+  </p:cSld>
+  <p:clrMapOvr>
+    <a:masterClrMapping/>
+  </p:clrMapOvr>
+</p:sld>
+</file>
+
+<file path=ppt/slides/slide20.xml><?xml version="1.0" encoding="utf-8"?>
+<p:sld xmlns:a="http://schemas.openxmlformats.org/drawingml/2006/main" xmlns:r="http://schemas.openxmlformats.org/officeDocument/2006/relationships" xmlns:p="http://schemas.openxmlformats.org/presentationml/2006/main">
+  <p:cSld name="Slide 20">
+    <p:bg>
+      <p:bgPr>
+        <a:solidFill>
+          <a:srgbClr val="0A1120"/>
+        </a:solidFill>
+      </p:bgPr>
+    </p:bg>
+    <p:spTree>
+      <p:nvGrpSpPr>
+        <p:cNvPr id="1" name=""/>
+        <p:cNvGrpSpPr/>
+        <p:nvPr/>
+      </p:nvGrpSpPr>
+      <p:grpSpPr>
+        <a:xfrm>
+          <a:off x="0" y="0"/>
+          <a:ext cx="0" cy="0"/>
+          <a:chOff x="0" y="0"/>
+          <a:chExt cx="0" cy="0"/>
+        </a:xfrm>
+      </p:grpSpPr>
+      <p:sp>
+        <p:nvSpPr>
+          <p:cNvPr id="2" name="Shape 0"/>
+          <p:cNvSpPr/>
+          <p:nvPr/>
+        </p:nvSpPr>
+        <p:spPr>
+          <a:xfrm>
+            <a:off x="0" y="0"/>
+            <a:ext cx="12191695" cy="109728"/>
+          </a:xfrm>
+          <a:prstGeom prst="rect">
+            <a:avLst/>
+          </a:prstGeom>
+          <a:solidFill>
+            <a:srgbClr val="3898FF"/>
+          </a:solidFill>
+          <a:ln/>
+        </p:spPr>
+      </p:sp>
+      <p:sp>
+        <p:nvSpPr>
+          <p:cNvPr id="3" name="Shape 1"/>
+          <p:cNvSpPr/>
+          <p:nvPr/>
+        </p:nvSpPr>
+        <p:spPr>
+          <a:xfrm>
+            <a:off x="640080" y="6291072"/>
+            <a:ext cx="274320" cy="274320"/>
+          </a:xfrm>
+          <a:prstGeom prst="roundRect">
+            <a:avLst>
+              <a:gd name="adj" fmla="val 22000"/>
+            </a:avLst>
+          </a:prstGeom>
+          <a:solidFill>
+            <a:srgbClr val="2563EB"/>
+          </a:solidFill>
+          <a:ln/>
+        </p:spPr>
+      </p:sp>
+      <p:sp>
+        <p:nvSpPr>
+          <p:cNvPr id="4" name="Shape 2"/>
+          <p:cNvSpPr/>
+          <p:nvPr/>
+        </p:nvSpPr>
+        <p:spPr>
+          <a:xfrm>
+            <a:off x="694944" y="6444691"/>
+            <a:ext cx="32918" cy="54864"/>
+          </a:xfrm>
+          <a:prstGeom prst="roundRect">
+            <a:avLst>
+              <a:gd name="adj" fmla="val 50001"/>
+            </a:avLst>
+          </a:prstGeom>
+          <a:solidFill>
+            <a:srgbClr val="FFFFFF"/>
+          </a:solidFill>
+          <a:ln/>
+        </p:spPr>
+      </p:sp>
+      <p:sp>
+        <p:nvSpPr>
+          <p:cNvPr id="5" name="Shape 3"/>
+          <p:cNvSpPr/>
+          <p:nvPr/>
+        </p:nvSpPr>
+        <p:spPr>
+          <a:xfrm>
+            <a:off x="744322" y="6406286"/>
+            <a:ext cx="32918" cy="93269"/>
+          </a:xfrm>
+          <a:prstGeom prst="roundRect">
+            <a:avLst>
+              <a:gd name="adj" fmla="val 50001"/>
+            </a:avLst>
+          </a:prstGeom>
+          <a:solidFill>
+            <a:srgbClr val="FFFFFF"/>
+          </a:solidFill>
+          <a:ln/>
+        </p:spPr>
+      </p:sp>
+      <p:sp>
+        <p:nvSpPr>
+          <p:cNvPr id="6" name="Shape 4"/>
+          <p:cNvSpPr/>
+          <p:nvPr/>
+        </p:nvSpPr>
+        <p:spPr>
+          <a:xfrm>
+            <a:off x="793699" y="6367882"/>
+            <a:ext cx="32918" cy="131674"/>
+          </a:xfrm>
+          <a:prstGeom prst="roundRect">
+            <a:avLst>
+              <a:gd name="adj" fmla="val 50001"/>
+            </a:avLst>
+          </a:prstGeom>
+          <a:solidFill>
+            <a:srgbClr val="FFFFFF"/>
+          </a:solidFill>
+          <a:ln/>
+        </p:spPr>
+      </p:sp>
+      <p:sp>
+        <p:nvSpPr>
+          <p:cNvPr id="7" name="Shape 5"/>
+          <p:cNvSpPr/>
+          <p:nvPr/>
+        </p:nvSpPr>
+        <p:spPr>
+          <a:xfrm>
+            <a:off x="843077" y="6329477"/>
+            <a:ext cx="32918" cy="170078"/>
+          </a:xfrm>
+          <a:prstGeom prst="roundRect">
+            <a:avLst>
+              <a:gd name="adj" fmla="val 50001"/>
+            </a:avLst>
+          </a:prstGeom>
+          <a:solidFill>
+            <a:srgbClr val="FFFFFF"/>
+          </a:solidFill>
+          <a:ln/>
+        </p:spPr>
+      </p:sp>
+      <p:sp>
+        <p:nvSpPr>
+          <p:cNvPr id="8" name="Text 6"/>
+          <p:cNvSpPr/>
+          <p:nvPr/>
+        </p:nvSpPr>
+        <p:spPr>
+          <a:xfrm>
+            <a:off x="1024128" y="6254496"/>
+            <a:ext cx="2743200" cy="347472"/>
+          </a:xfrm>
+          <a:prstGeom prst="rect">
+            <a:avLst/>
+          </a:prstGeom>
+          <a:noFill/>
+          <a:ln/>
+        </p:spPr>
+        <p:txBody>
+          <a:bodyPr wrap="square" rtlCol="0" anchor="ctr"/>
+          <a:lstStyle/>
+          <a:p>
+            <a:pPr algn="l" indent="0" marL="0">
+              <a:buNone/>
+            </a:pPr>
+            <a:r>
+              <a:rPr lang="en-US" sz="1200" b="1" dirty="0">
+                <a:solidFill>
+                  <a:srgbClr val="93A4B8"/>
+                </a:solidFill>
+                <a:latin typeface="IBM Plex Sans" pitchFamily="34" charset="0"/>
+                <a:ea typeface="IBM Plex Sans" pitchFamily="34" charset="-122"/>
+                <a:cs typeface="IBM Plex Sans" pitchFamily="34" charset="-120"/>
+              </a:rPr>
+              <a:t>IdeaM</a:t>
+            </a:r>
+            <a:endParaRPr lang="en-US" sz="1200" dirty="0"/>
+          </a:p>
+        </p:txBody>
+      </p:sp>
+      <p:sp>
+        <p:nvSpPr>
+          <p:cNvPr id="9" name="Text 7"/>
+          <p:cNvSpPr/>
+          <p:nvPr/>
+        </p:nvSpPr>
+        <p:spPr>
+          <a:xfrm>
+            <a:off x="10180015" y="6254496"/>
+            <a:ext cx="1371600" cy="347472"/>
+          </a:xfrm>
+          <a:prstGeom prst="rect">
+            <a:avLst/>
+          </a:prstGeom>
+          <a:noFill/>
+          <a:ln/>
+        </p:spPr>
+        <p:txBody>
+          <a:bodyPr wrap="square" rtlCol="0" anchor="ctr"/>
+          <a:lstStyle/>
+          <a:p>
+            <a:pPr algn="r" indent="0" marL="0">
+              <a:buNone/>
+            </a:pPr>
+            <a:r>
+              <a:rPr lang="en-US" sz="1100" dirty="0">
+                <a:solidFill>
+                  <a:srgbClr val="93A4B8"/>
+                </a:solidFill>
+                <a:latin typeface="IBM Plex Sans" pitchFamily="34" charset="0"/>
+                <a:ea typeface="IBM Plex Sans" pitchFamily="34" charset="-122"/>
+                <a:cs typeface="IBM Plex Sans" pitchFamily="34" charset="-120"/>
+              </a:rPr>
+              <a:t>20 / 26</a:t>
+            </a:r>
+            <a:endParaRPr lang="en-US" sz="1100" dirty="0"/>
+          </a:p>
+        </p:txBody>
+      </p:sp>
+      <p:sp>
+        <p:nvSpPr>
+          <p:cNvPr id="10" name="Text 8"/>
+          <p:cNvSpPr/>
+          <p:nvPr/>
+        </p:nvSpPr>
+        <p:spPr>
+          <a:xfrm>
+            <a:off x="640080" y="502920"/>
+            <a:ext cx="10911535" cy="822960"/>
+          </a:xfrm>
+          <a:prstGeom prst="rect">
+            <a:avLst/>
+          </a:prstGeom>
+          <a:noFill/>
+          <a:ln/>
+        </p:spPr>
+        <p:txBody>
+          <a:bodyPr wrap="square" rtlCol="0" anchor="t"/>
+          <a:lstStyle/>
+          <a:p>
+            <a:pPr algn="l" indent="0" marL="0">
+              <a:buNone/>
+            </a:pPr>
+            <a:r>
+              <a:rPr lang="en-US" sz="2600" b="1" dirty="0">
+                <a:solidFill>
+                  <a:srgbClr val="F5F8FF"/>
+                </a:solidFill>
+                <a:latin typeface="IBM Plex Sans" pitchFamily="34" charset="0"/>
+                <a:ea typeface="IBM Plex Sans" pitchFamily="34" charset="-122"/>
+                <a:cs typeface="IBM Plex Sans" pitchFamily="34" charset="-120"/>
+              </a:rPr>
+              <a:t>For CS students</a:t>
+            </a:r>
+            <a:endParaRPr lang="en-US" sz="2600" dirty="0"/>
+          </a:p>
+        </p:txBody>
+      </p:sp>
+      <p:sp>
+        <p:nvSpPr>
+          <p:cNvPr id="11" name="Shape 9"/>
+          <p:cNvSpPr/>
+          <p:nvPr/>
+        </p:nvSpPr>
+        <p:spPr>
+          <a:xfrm>
+            <a:off x="640080" y="1325880"/>
+            <a:ext cx="1005840" cy="82296"/>
+          </a:xfrm>
+          <a:prstGeom prst="rect">
+            <a:avLst/>
+          </a:prstGeom>
+          <a:solidFill>
+            <a:srgbClr val="3898FF"/>
+          </a:solidFill>
+          <a:ln/>
+        </p:spPr>
+      </p:sp>
+      <p:sp>
+        <p:nvSpPr>
+          <p:cNvPr id="12" name="Text 10"/>
+          <p:cNvSpPr/>
+          <p:nvPr/>
+        </p:nvSpPr>
+        <p:spPr>
+          <a:xfrm>
+            <a:off x="640080" y="1737360"/>
+            <a:ext cx="10911535" cy="4206240"/>
+          </a:xfrm>
+          <a:prstGeom prst="rect">
+            <a:avLst/>
+          </a:prstGeom>
+          <a:noFill/>
+          <a:ln/>
+        </p:spPr>
+        <p:txBody>
+          <a:bodyPr wrap="square" rtlCol="0" anchor="t"/>
+          <a:lstStyle/>
+          <a:p>
+            <a:pPr algn="l" marL="228600" indent="-228600">
+              <a:spcAft>
+                <a:spcPts val="1000"/>
+              </a:spcAft>
+              <a:buSzPct val="100000"/>
+              <a:buChar char="•"/>
+            </a:pPr>
+            <a:r>
+              <a:rPr lang="en-US" sz="1800" dirty="0">
+                <a:solidFill>
+                  <a:srgbClr val="F5F8FF"/>
+                </a:solidFill>
+                <a:latin typeface="IBM Plex Sans" pitchFamily="34" charset="0"/>
+                <a:ea typeface="IBM Plex Sans" pitchFamily="34" charset="-122"/>
+                <a:cs typeface="IBM Plex Sans" pitchFamily="34" charset="-120"/>
+              </a:rPr>
+              <a:t>AI-first development is a discipline to master — architecture, testing, verification — not a shortcut to fear.</a:t>
+            </a:r>
+            <a:endParaRPr lang="en-US" sz="1800" dirty="0"/>
+          </a:p>
+          <a:p>
+            <a:pPr algn="l" marL="228600" indent="-228600">
+              <a:spcAft>
+                <a:spcPts val="1000"/>
+              </a:spcAft>
+              <a:buSzPct val="100000"/>
+              <a:buChar char="•"/>
+            </a:pPr>
+            <a:r>
+              <a:rPr lang="en-US" sz="1800" dirty="0">
+                <a:solidFill>
+                  <a:srgbClr val="F5F8FF"/>
+                </a:solidFill>
+                <a:latin typeface="IBM Plex Sans" pitchFamily="34" charset="0"/>
+                <a:ea typeface="IBM Plex Sans" pitchFamily="34" charset="-122"/>
+                <a:cs typeface="IBM Plex Sans" pitchFamily="34" charset="-120"/>
+              </a:rPr>
+              <a:t>The graduates who thrive won't be the ones who can out-type the AI; they'll be the ones who can direct and verify it.</a:t>
+            </a:r>
+            <a:endParaRPr lang="en-US" sz="1800" dirty="0"/>
+          </a:p>
+        </p:txBody>
+      </p:sp>
+    </p:spTree>
+  </p:cSld>
+  <p:clrMapOvr>
+    <a:masterClrMapping/>
+  </p:clrMapOvr>
+</p:sld>
+</file>
+
+<file path=ppt/slides/slide21.xml><?xml version="1.0" encoding="utf-8"?>
+<p:sld xmlns:a="http://schemas.openxmlformats.org/drawingml/2006/main" xmlns:r="http://schemas.openxmlformats.org/officeDocument/2006/relationships" xmlns:p="http://schemas.openxmlformats.org/presentationml/2006/main">
+  <p:cSld name="Slide 21">
+    <p:bg>
+      <p:bgPr>
+        <a:solidFill>
+          <a:srgbClr val="0A1120"/>
+        </a:solidFill>
+      </p:bgPr>
+    </p:bg>
+    <p:spTree>
+      <p:nvGrpSpPr>
+        <p:cNvPr id="1" name=""/>
+        <p:cNvGrpSpPr/>
+        <p:nvPr/>
+      </p:nvGrpSpPr>
+      <p:grpSpPr>
+        <a:xfrm>
+          <a:off x="0" y="0"/>
+          <a:ext cx="0" cy="0"/>
+          <a:chOff x="0" y="0"/>
+          <a:chExt cx="0" cy="0"/>
+        </a:xfrm>
+      </p:grpSpPr>
+      <p:sp>
+        <p:nvSpPr>
+          <p:cNvPr id="2" name="Shape 0"/>
+          <p:cNvSpPr/>
+          <p:nvPr/>
+        </p:nvSpPr>
+        <p:spPr>
+          <a:xfrm>
+            <a:off x="0" y="0"/>
+            <a:ext cx="12191695" cy="109728"/>
+          </a:xfrm>
+          <a:prstGeom prst="rect">
+            <a:avLst/>
+          </a:prstGeom>
+          <a:solidFill>
+            <a:srgbClr val="3898FF"/>
+          </a:solidFill>
+          <a:ln/>
+        </p:spPr>
+      </p:sp>
+      <p:sp>
+        <p:nvSpPr>
+          <p:cNvPr id="3" name="Shape 1"/>
+          <p:cNvSpPr/>
+          <p:nvPr/>
+        </p:nvSpPr>
+        <p:spPr>
+          <a:xfrm>
+            <a:off x="640080" y="6291072"/>
+            <a:ext cx="274320" cy="274320"/>
+          </a:xfrm>
+          <a:prstGeom prst="roundRect">
+            <a:avLst>
+              <a:gd name="adj" fmla="val 22000"/>
+            </a:avLst>
+          </a:prstGeom>
+          <a:solidFill>
+            <a:srgbClr val="2563EB"/>
+          </a:solidFill>
+          <a:ln/>
+        </p:spPr>
+      </p:sp>
+      <p:sp>
+        <p:nvSpPr>
+          <p:cNvPr id="4" name="Shape 2"/>
+          <p:cNvSpPr/>
+          <p:nvPr/>
+        </p:nvSpPr>
+        <p:spPr>
+          <a:xfrm>
+            <a:off x="694944" y="6444691"/>
+            <a:ext cx="32918" cy="54864"/>
+          </a:xfrm>
+          <a:prstGeom prst="roundRect">
+            <a:avLst>
+              <a:gd name="adj" fmla="val 50001"/>
+            </a:avLst>
+          </a:prstGeom>
+          <a:solidFill>
+            <a:srgbClr val="FFFFFF"/>
+          </a:solidFill>
+          <a:ln/>
+        </p:spPr>
+      </p:sp>
+      <p:sp>
+        <p:nvSpPr>
+          <p:cNvPr id="5" name="Shape 3"/>
+          <p:cNvSpPr/>
+          <p:nvPr/>
+        </p:nvSpPr>
+        <p:spPr>
+          <a:xfrm>
+            <a:off x="744322" y="6406286"/>
+            <a:ext cx="32918" cy="93269"/>
+          </a:xfrm>
+          <a:prstGeom prst="roundRect">
+            <a:avLst>
+              <a:gd name="adj" fmla="val 50001"/>
+            </a:avLst>
+          </a:prstGeom>
+          <a:solidFill>
+            <a:srgbClr val="FFFFFF"/>
+          </a:solidFill>
+          <a:ln/>
+        </p:spPr>
+      </p:sp>
+      <p:sp>
+        <p:nvSpPr>
+          <p:cNvPr id="6" name="Shape 4"/>
+          <p:cNvSpPr/>
+          <p:nvPr/>
+        </p:nvSpPr>
+        <p:spPr>
+          <a:xfrm>
+            <a:off x="793699" y="6367882"/>
+            <a:ext cx="32918" cy="131674"/>
+          </a:xfrm>
+          <a:prstGeom prst="roundRect">
+            <a:avLst>
+              <a:gd name="adj" fmla="val 50001"/>
+            </a:avLst>
+          </a:prstGeom>
+          <a:solidFill>
+            <a:srgbClr val="FFFFFF"/>
+          </a:solidFill>
+          <a:ln/>
+        </p:spPr>
+      </p:sp>
+      <p:sp>
+        <p:nvSpPr>
+          <p:cNvPr id="7" name="Shape 5"/>
+          <p:cNvSpPr/>
+          <p:nvPr/>
+        </p:nvSpPr>
+        <p:spPr>
+          <a:xfrm>
+            <a:off x="843077" y="6329477"/>
+            <a:ext cx="32918" cy="170078"/>
+          </a:xfrm>
+          <a:prstGeom prst="roundRect">
+            <a:avLst>
+              <a:gd name="adj" fmla="val 50001"/>
+            </a:avLst>
+          </a:prstGeom>
+          <a:solidFill>
+            <a:srgbClr val="FFFFFF"/>
+          </a:solidFill>
+          <a:ln/>
+        </p:spPr>
+      </p:sp>
+      <p:sp>
+        <p:nvSpPr>
+          <p:cNvPr id="8" name="Text 6"/>
+          <p:cNvSpPr/>
+          <p:nvPr/>
+        </p:nvSpPr>
+        <p:spPr>
+          <a:xfrm>
+            <a:off x="1024128" y="6254496"/>
+            <a:ext cx="2743200" cy="347472"/>
+          </a:xfrm>
+          <a:prstGeom prst="rect">
+            <a:avLst/>
+          </a:prstGeom>
+          <a:noFill/>
+          <a:ln/>
+        </p:spPr>
+        <p:txBody>
+          <a:bodyPr wrap="square" rtlCol="0" anchor="ctr"/>
+          <a:lstStyle/>
+          <a:p>
+            <a:pPr algn="l" indent="0" marL="0">
+              <a:buNone/>
+            </a:pPr>
+            <a:r>
+              <a:rPr lang="en-US" sz="1200" b="1" dirty="0">
+                <a:solidFill>
+                  <a:srgbClr val="93A4B8"/>
+                </a:solidFill>
+                <a:latin typeface="IBM Plex Sans" pitchFamily="34" charset="0"/>
+                <a:ea typeface="IBM Plex Sans" pitchFamily="34" charset="-122"/>
+                <a:cs typeface="IBM Plex Sans" pitchFamily="34" charset="-120"/>
+              </a:rPr>
+              <a:t>IdeaM</a:t>
+            </a:r>
+            <a:endParaRPr lang="en-US" sz="1200" dirty="0"/>
+          </a:p>
+        </p:txBody>
+      </p:sp>
+      <p:sp>
+        <p:nvSpPr>
+          <p:cNvPr id="9" name="Text 7"/>
+          <p:cNvSpPr/>
+          <p:nvPr/>
+        </p:nvSpPr>
+        <p:spPr>
+          <a:xfrm>
+            <a:off x="10180015" y="6254496"/>
+            <a:ext cx="1371600" cy="347472"/>
+          </a:xfrm>
+          <a:prstGeom prst="rect">
+            <a:avLst/>
+          </a:prstGeom>
+          <a:noFill/>
+          <a:ln/>
+        </p:spPr>
+        <p:txBody>
+          <a:bodyPr wrap="square" rtlCol="0" anchor="ctr"/>
+          <a:lstStyle/>
+          <a:p>
+            <a:pPr algn="r" indent="0" marL="0">
+              <a:buNone/>
+            </a:pPr>
+            <a:r>
+              <a:rPr lang="en-US" sz="1100" dirty="0">
+                <a:solidFill>
+                  <a:srgbClr val="93A4B8"/>
+                </a:solidFill>
+                <a:latin typeface="IBM Plex Sans" pitchFamily="34" charset="0"/>
+                <a:ea typeface="IBM Plex Sans" pitchFamily="34" charset="-122"/>
+                <a:cs typeface="IBM Plex Sans" pitchFamily="34" charset="-120"/>
+              </a:rPr>
+              <a:t>21 / 26</a:t>
+            </a:r>
+            <a:endParaRPr lang="en-US" sz="1100" dirty="0"/>
+          </a:p>
+        </p:txBody>
+      </p:sp>
+      <p:sp>
+        <p:nvSpPr>
+          <p:cNvPr id="10" name="Text 8"/>
+          <p:cNvSpPr/>
+          <p:nvPr/>
+        </p:nvSpPr>
+        <p:spPr>
+          <a:xfrm>
+            <a:off x="640080" y="502920"/>
+            <a:ext cx="10911535" cy="822960"/>
+          </a:xfrm>
+          <a:prstGeom prst="rect">
+            <a:avLst/>
+          </a:prstGeom>
+          <a:noFill/>
+          <a:ln/>
+        </p:spPr>
+        <p:txBody>
+          <a:bodyPr wrap="square" rtlCol="0" anchor="t"/>
+          <a:lstStyle/>
+          <a:p>
+            <a:pPr algn="l" indent="0" marL="0">
+              <a:buNone/>
+            </a:pPr>
+            <a:r>
+              <a:rPr lang="en-US" sz="2600" b="1" dirty="0">
+                <a:solidFill>
+                  <a:srgbClr val="F5F8FF"/>
+                </a:solidFill>
+                <a:latin typeface="IBM Plex Sans" pitchFamily="34" charset="0"/>
+                <a:ea typeface="IBM Plex Sans" pitchFamily="34" charset="-122"/>
+                <a:cs typeface="IBM Plex Sans" pitchFamily="34" charset="-120"/>
+              </a:rPr>
+              <a:t>For the institution</a:t>
+            </a:r>
+            <a:endParaRPr lang="en-US" sz="2600" dirty="0"/>
+          </a:p>
+        </p:txBody>
+      </p:sp>
+      <p:sp>
+        <p:nvSpPr>
+          <p:cNvPr id="11" name="Shape 9"/>
+          <p:cNvSpPr/>
+          <p:nvPr/>
+        </p:nvSpPr>
+        <p:spPr>
+          <a:xfrm>
+            <a:off x="640080" y="1325880"/>
+            <a:ext cx="1005840" cy="82296"/>
+          </a:xfrm>
+          <a:prstGeom prst="rect">
+            <a:avLst/>
+          </a:prstGeom>
+          <a:solidFill>
+            <a:srgbClr val="3898FF"/>
+          </a:solidFill>
+          <a:ln/>
+        </p:spPr>
+      </p:sp>
+      <p:sp>
+        <p:nvSpPr>
+          <p:cNvPr id="12" name="Text 10"/>
+          <p:cNvSpPr/>
+          <p:nvPr/>
+        </p:nvSpPr>
+        <p:spPr>
+          <a:xfrm>
+            <a:off x="640080" y="1737360"/>
+            <a:ext cx="10911535" cy="4206240"/>
+          </a:xfrm>
+          <a:prstGeom prst="rect">
+            <a:avLst/>
+          </a:prstGeom>
+          <a:noFill/>
+          <a:ln/>
+        </p:spPr>
+        <p:txBody>
+          <a:bodyPr wrap="square" rtlCol="0" anchor="t"/>
+          <a:lstStyle/>
+          <a:p>
+            <a:pPr algn="l" marL="228600" indent="-228600">
+              <a:spcAft>
+                <a:spcPts val="1000"/>
+              </a:spcAft>
+              <a:buSzPct val="100000"/>
+              <a:buChar char="•"/>
+            </a:pPr>
+            <a:r>
+              <a:rPr lang="en-US" sz="1800" dirty="0">
+                <a:solidFill>
+                  <a:srgbClr val="F5F8FF"/>
+                </a:solidFill>
+                <a:latin typeface="IBM Plex Sans" pitchFamily="34" charset="0"/>
+                <a:ea typeface="IBM Plex Sans" pitchFamily="34" charset="-122"/>
+                <a:cs typeface="IBM Plex Sans" pitchFamily="34" charset="-120"/>
+              </a:rPr>
+              <a:t>A new category of software is being born.</a:t>
+            </a:r>
+            <a:endParaRPr lang="en-US" sz="1800" dirty="0"/>
+          </a:p>
+          <a:p>
+            <a:pPr algn="l" marL="228600" indent="-228600">
+              <a:spcAft>
+                <a:spcPts val="1000"/>
+              </a:spcAft>
+              <a:buSzPct val="100000"/>
+              <a:buChar char="•"/>
+            </a:pPr>
+            <a:r>
+              <a:rPr lang="en-US" sz="1800" dirty="0">
+                <a:solidFill>
+                  <a:srgbClr val="F5F8FF"/>
+                </a:solidFill>
+                <a:latin typeface="IBM Plex Sans" pitchFamily="34" charset="0"/>
+                <a:ea typeface="IBM Plex Sans" pitchFamily="34" charset="-122"/>
+                <a:cs typeface="IBM Plex Sans" pitchFamily="34" charset="-120"/>
+              </a:rPr>
+              <a:t>The opportunity is to be the university that understands and adopts it early — including a possible student and faculty pilot of IdeaM.</a:t>
+            </a:r>
+            <a:endParaRPr lang="en-US" sz="1800" dirty="0"/>
+          </a:p>
+          <a:p>
+            <a:pPr algn="l" marL="228600" indent="-228600">
+              <a:spcAft>
+                <a:spcPts val="1000"/>
+              </a:spcAft>
+              <a:buSzPct val="100000"/>
+              <a:buChar char="•"/>
+            </a:pPr>
+            <a:r>
+              <a:rPr lang="en-US" sz="1800" dirty="0">
+                <a:solidFill>
+                  <a:srgbClr val="F5F8FF"/>
+                </a:solidFill>
+                <a:latin typeface="IBM Plex Sans" pitchFamily="34" charset="0"/>
+                <a:ea typeface="IBM Plex Sans" pitchFamily="34" charset="-122"/>
+                <a:cs typeface="IBM Plex Sans" pitchFamily="34" charset="-120"/>
+              </a:rPr>
+              <a:t>(This is the gentle, concrete ask.)</a:t>
+            </a:r>
+            <a:endParaRPr lang="en-US" sz="1800" dirty="0"/>
+          </a:p>
+        </p:txBody>
+      </p:sp>
+    </p:spTree>
+  </p:cSld>
+  <p:clrMapOvr>
+    <a:masterClrMapping/>
+  </p:clrMapOvr>
+</p:sld>
+</file>
+
+<file path=ppt/slides/slide22.xml><?xml version="1.0" encoding="utf-8"?>
+<p:sld xmlns:a="http://schemas.openxmlformats.org/drawingml/2006/main" xmlns:r="http://schemas.openxmlformats.org/officeDocument/2006/relationships" xmlns:p="http://schemas.openxmlformats.org/presentationml/2006/main">
+  <p:cSld name="Slide 22">
+    <p:bg>
+      <p:bgPr>
+        <a:solidFill>
+          <a:srgbClr val="0A1120"/>
+        </a:solidFill>
+      </p:bgPr>
+    </p:bg>
+    <p:spTree>
+      <p:nvGrpSpPr>
+        <p:cNvPr id="1" name=""/>
+        <p:cNvGrpSpPr/>
+        <p:nvPr/>
+      </p:nvGrpSpPr>
+      <p:grpSpPr>
+        <a:xfrm>
+          <a:off x="0" y="0"/>
+          <a:ext cx="0" cy="0"/>
+          <a:chOff x="0" y="0"/>
+          <a:chExt cx="0" cy="0"/>
+        </a:xfrm>
+      </p:grpSpPr>
+      <p:sp>
+        <p:nvSpPr>
+          <p:cNvPr id="2" name="Shape 0"/>
+          <p:cNvSpPr/>
+          <p:nvPr/>
+        </p:nvSpPr>
+        <p:spPr>
+          <a:xfrm>
+            <a:off x="0" y="0"/>
+            <a:ext cx="12191695" cy="109728"/>
+          </a:xfrm>
+          <a:prstGeom prst="rect">
+            <a:avLst/>
+          </a:prstGeom>
+          <a:solidFill>
+            <a:srgbClr val="3898FF"/>
+          </a:solidFill>
+          <a:ln/>
+        </p:spPr>
+      </p:sp>
+      <p:sp>
+        <p:nvSpPr>
+          <p:cNvPr id="3" name="Shape 1"/>
+          <p:cNvSpPr/>
+          <p:nvPr/>
+        </p:nvSpPr>
+        <p:spPr>
+          <a:xfrm>
+            <a:off x="640080" y="6291072"/>
+            <a:ext cx="274320" cy="274320"/>
+          </a:xfrm>
+          <a:prstGeom prst="roundRect">
+            <a:avLst>
+              <a:gd name="adj" fmla="val 22000"/>
+            </a:avLst>
+          </a:prstGeom>
+          <a:solidFill>
+            <a:srgbClr val="2563EB"/>
+          </a:solidFill>
+          <a:ln/>
+        </p:spPr>
+      </p:sp>
+      <p:sp>
+        <p:nvSpPr>
+          <p:cNvPr id="4" name="Shape 2"/>
+          <p:cNvSpPr/>
+          <p:nvPr/>
+        </p:nvSpPr>
+        <p:spPr>
+          <a:xfrm>
+            <a:off x="694944" y="6444691"/>
+            <a:ext cx="32918" cy="54864"/>
+          </a:xfrm>
+          <a:prstGeom prst="roundRect">
+            <a:avLst>
+              <a:gd name="adj" fmla="val 50001"/>
+            </a:avLst>
+          </a:prstGeom>
+          <a:solidFill>
+            <a:srgbClr val="FFFFFF"/>
+          </a:solidFill>
+          <a:ln/>
+        </p:spPr>
+      </p:sp>
+      <p:sp>
+        <p:nvSpPr>
+          <p:cNvPr id="5" name="Shape 3"/>
+          <p:cNvSpPr/>
+          <p:nvPr/>
+        </p:nvSpPr>
+        <p:spPr>
+          <a:xfrm>
+            <a:off x="744322" y="6406286"/>
+            <a:ext cx="32918" cy="93269"/>
+          </a:xfrm>
+          <a:prstGeom prst="roundRect">
+            <a:avLst>
+              <a:gd name="adj" fmla="val 50001"/>
+            </a:avLst>
+          </a:prstGeom>
+          <a:solidFill>
+            <a:srgbClr val="FFFFFF"/>
+          </a:solidFill>
+          <a:ln/>
+        </p:spPr>
+      </p:sp>
+      <p:sp>
+        <p:nvSpPr>
+          <p:cNvPr id="6" name="Shape 4"/>
+          <p:cNvSpPr/>
+          <p:nvPr/>
+        </p:nvSpPr>
+        <p:spPr>
+          <a:xfrm>
+            <a:off x="793699" y="6367882"/>
+            <a:ext cx="32918" cy="131674"/>
+          </a:xfrm>
+          <a:prstGeom prst="roundRect">
+            <a:avLst>
+              <a:gd name="adj" fmla="val 50001"/>
+            </a:avLst>
+          </a:prstGeom>
+          <a:solidFill>
+            <a:srgbClr val="FFFFFF"/>
+          </a:solidFill>
+          <a:ln/>
+        </p:spPr>
+      </p:sp>
+      <p:sp>
+        <p:nvSpPr>
+          <p:cNvPr id="7" name="Shape 5"/>
+          <p:cNvSpPr/>
+          <p:nvPr/>
+        </p:nvSpPr>
+        <p:spPr>
+          <a:xfrm>
+            <a:off x="843077" y="6329477"/>
+            <a:ext cx="32918" cy="170078"/>
+          </a:xfrm>
+          <a:prstGeom prst="roundRect">
+            <a:avLst>
+              <a:gd name="adj" fmla="val 50001"/>
+            </a:avLst>
+          </a:prstGeom>
+          <a:solidFill>
+            <a:srgbClr val="FFFFFF"/>
+          </a:solidFill>
+          <a:ln/>
+        </p:spPr>
+      </p:sp>
+      <p:sp>
+        <p:nvSpPr>
+          <p:cNvPr id="8" name="Text 6"/>
+          <p:cNvSpPr/>
+          <p:nvPr/>
+        </p:nvSpPr>
+        <p:spPr>
+          <a:xfrm>
+            <a:off x="1024128" y="6254496"/>
+            <a:ext cx="2743200" cy="347472"/>
+          </a:xfrm>
+          <a:prstGeom prst="rect">
+            <a:avLst/>
+          </a:prstGeom>
+          <a:noFill/>
+          <a:ln/>
+        </p:spPr>
+        <p:txBody>
+          <a:bodyPr wrap="square" rtlCol="0" anchor="ctr"/>
+          <a:lstStyle/>
+          <a:p>
+            <a:pPr algn="l" indent="0" marL="0">
+              <a:buNone/>
+            </a:pPr>
+            <a:r>
+              <a:rPr lang="en-US" sz="1200" b="1" dirty="0">
+                <a:solidFill>
+                  <a:srgbClr val="93A4B8"/>
+                </a:solidFill>
+                <a:latin typeface="IBM Plex Sans" pitchFamily="34" charset="0"/>
+                <a:ea typeface="IBM Plex Sans" pitchFamily="34" charset="-122"/>
+                <a:cs typeface="IBM Plex Sans" pitchFamily="34" charset="-120"/>
+              </a:rPr>
+              <a:t>IdeaM</a:t>
+            </a:r>
+            <a:endParaRPr lang="en-US" sz="1200" dirty="0"/>
+          </a:p>
+        </p:txBody>
+      </p:sp>
+      <p:sp>
+        <p:nvSpPr>
+          <p:cNvPr id="9" name="Text 7"/>
+          <p:cNvSpPr/>
+          <p:nvPr/>
+        </p:nvSpPr>
+        <p:spPr>
+          <a:xfrm>
+            <a:off x="10180015" y="6254496"/>
+            <a:ext cx="1371600" cy="347472"/>
+          </a:xfrm>
+          <a:prstGeom prst="rect">
+            <a:avLst/>
+          </a:prstGeom>
+          <a:noFill/>
+          <a:ln/>
+        </p:spPr>
+        <p:txBody>
+          <a:bodyPr wrap="square" rtlCol="0" anchor="ctr"/>
+          <a:lstStyle/>
+          <a:p>
+            <a:pPr algn="r" indent="0" marL="0">
+              <a:buNone/>
+            </a:pPr>
+            <a:r>
+              <a:rPr lang="en-US" sz="1100" dirty="0">
+                <a:solidFill>
+                  <a:srgbClr val="93A4B8"/>
+                </a:solidFill>
+                <a:latin typeface="IBM Plex Sans" pitchFamily="34" charset="0"/>
+                <a:ea typeface="IBM Plex Sans" pitchFamily="34" charset="-122"/>
+                <a:cs typeface="IBM Plex Sans" pitchFamily="34" charset="-120"/>
+              </a:rPr>
+              <a:t>22 / 26</a:t>
+            </a:r>
+            <a:endParaRPr lang="en-US" sz="1100" dirty="0"/>
+          </a:p>
+        </p:txBody>
+      </p:sp>
+      <p:sp>
+        <p:nvSpPr>
+          <p:cNvPr id="10" name="Text 8"/>
+          <p:cNvSpPr/>
+          <p:nvPr/>
+        </p:nvSpPr>
+        <p:spPr>
+          <a:xfrm>
+            <a:off x="640080" y="502920"/>
+            <a:ext cx="10911535" cy="822960"/>
+          </a:xfrm>
+          <a:prstGeom prst="rect">
+            <a:avLst/>
+          </a:prstGeom>
+          <a:noFill/>
+          <a:ln/>
+        </p:spPr>
+        <p:txBody>
+          <a:bodyPr wrap="square" rtlCol="0" anchor="t"/>
+          <a:lstStyle/>
+          <a:p>
+            <a:pPr algn="l" indent="0" marL="0">
+              <a:buNone/>
+            </a:pPr>
+            <a:r>
+              <a:rPr lang="en-US" sz="2600" b="1" dirty="0">
+                <a:solidFill>
+                  <a:srgbClr val="F5F8FF"/>
+                </a:solidFill>
+                <a:latin typeface="IBM Plex Sans" pitchFamily="34" charset="0"/>
+                <a:ea typeface="IBM Plex Sans" pitchFamily="34" charset="-122"/>
+                <a:cs typeface="IBM Plex Sans" pitchFamily="34" charset="-120"/>
+              </a:rPr>
+              <a:t>Live Demo &amp; the Mic-Drop</a:t>
+            </a:r>
+            <a:endParaRPr lang="en-US" sz="2600" dirty="0"/>
+          </a:p>
+        </p:txBody>
+      </p:sp>
+      <p:sp>
+        <p:nvSpPr>
+          <p:cNvPr id="11" name="Shape 9"/>
+          <p:cNvSpPr/>
+          <p:nvPr/>
+        </p:nvSpPr>
+        <p:spPr>
+          <a:xfrm>
+            <a:off x="640080" y="1325880"/>
+            <a:ext cx="1005840" cy="82296"/>
+          </a:xfrm>
+          <a:prstGeom prst="rect">
+            <a:avLst/>
+          </a:prstGeom>
+          <a:solidFill>
+            <a:srgbClr val="3898FF"/>
+          </a:solidFill>
+          <a:ln/>
+        </p:spPr>
+      </p:sp>
+      <p:sp>
+        <p:nvSpPr>
+          <p:cNvPr id="12" name="Text 10"/>
+          <p:cNvSpPr/>
+          <p:nvPr/>
+        </p:nvSpPr>
+        <p:spPr>
+          <a:xfrm>
+            <a:off x="640080" y="1737360"/>
+            <a:ext cx="10911535" cy="4206240"/>
+          </a:xfrm>
+          <a:prstGeom prst="rect">
+            <a:avLst/>
+          </a:prstGeom>
+          <a:noFill/>
+          <a:ln/>
+        </p:spPr>
+        <p:txBody>
+          <a:bodyPr wrap="square" rtlCol="0" anchor="t"/>
+          <a:lstStyle/>
+          <a:p>
+            <a:pPr algn="l" marL="228600" indent="-228600">
+              <a:spcAft>
+                <a:spcPts val="1000"/>
+              </a:spcAft>
+              <a:buSzPct val="100000"/>
+              <a:buChar char="•"/>
+            </a:pPr>
+            <a:r>
+              <a:rPr lang="en-US" sz="1800" dirty="0">
+                <a:solidFill>
+                  <a:srgbClr val="F5F8FF"/>
+                </a:solidFill>
+                <a:latin typeface="IBM Plex Sans" pitchFamily="34" charset="0"/>
+                <a:ea typeface="IBM Plex Sans" pitchFamily="34" charset="-122"/>
+                <a:cs typeface="IBM Plex Sans" pitchFamily="34" charset="-120"/>
+              </a:rPr>
+              <a:t>Show, don't tell.</a:t>
+            </a:r>
+            <a:endParaRPr lang="en-US" sz="1800" dirty="0"/>
+          </a:p>
+          <a:p>
+            <a:pPr algn="l" marL="228600" indent="-228600">
+              <a:spcAft>
+                <a:spcPts val="1000"/>
+              </a:spcAft>
+              <a:buSzPct val="100000"/>
+              <a:buChar char="•"/>
+            </a:pPr>
+            <a:r>
+              <a:rPr lang="en-US" sz="1800" dirty="0">
+                <a:solidFill>
+                  <a:srgbClr val="F5F8FF"/>
+                </a:solidFill>
+                <a:latin typeface="IBM Plex Sans" pitchFamily="34" charset="0"/>
+                <a:ea typeface="IBM Plex Sans" pitchFamily="34" charset="-122"/>
+                <a:cs typeface="IBM Plex Sans" pitchFamily="34" charset="-120"/>
+              </a:rPr>
+              <a:t>Run IdeaM live — take a source through the arc to a produced, published piece in front of the room.</a:t>
+            </a:r>
+            <a:endParaRPr lang="en-US" sz="1800" dirty="0"/>
+          </a:p>
+          <a:p>
+            <a:pPr algn="l" marL="228600" indent="-228600">
+              <a:spcAft>
+                <a:spcPts val="1000"/>
+              </a:spcAft>
+              <a:buSzPct val="100000"/>
+              <a:buChar char="•"/>
+            </a:pPr>
+            <a:r>
+              <a:rPr lang="en-US" sz="1800" dirty="0">
+                <a:solidFill>
+                  <a:srgbClr val="F5F8FF"/>
+                </a:solidFill>
+                <a:latin typeface="IBM Plex Sans" pitchFamily="34" charset="0"/>
+                <a:ea typeface="IBM Plex Sans" pitchFamily="34" charset="-122"/>
+                <a:cs typeface="IBM Plex Sans" pitchFamily="34" charset="-120"/>
+              </a:rPr>
+              <a:t>Then the reveal: this entire seminar was built in IdeaM.</a:t>
+            </a:r>
+            <a:endParaRPr lang="en-US" sz="1800" dirty="0"/>
+          </a:p>
+          <a:p>
+            <a:pPr algn="l" marL="228600" indent="-228600">
+              <a:spcAft>
+                <a:spcPts val="1000"/>
+              </a:spcAft>
+              <a:buSzPct val="100000"/>
+              <a:buChar char="•"/>
+            </a:pPr>
+            <a:r>
+              <a:rPr lang="en-US" sz="1800" dirty="0">
+                <a:solidFill>
+                  <a:srgbClr val="F5F8FF"/>
+                </a:solidFill>
+                <a:latin typeface="IBM Plex Sans" pitchFamily="34" charset="0"/>
+                <a:ea typeface="IBM Plex Sans" pitchFamily="34" charset="-122"/>
+                <a:cs typeface="IBM Plex Sans" pitchFamily="34" charset="-120"/>
+              </a:rPr>
+              <a:t>The outline on the screen, the structure, the notes — all of it.</a:t>
+            </a:r>
+            <a:endParaRPr lang="en-US" sz="1800" dirty="0"/>
+          </a:p>
+          <a:p>
+            <a:pPr algn="l" marL="228600" indent="-228600">
+              <a:spcAft>
+                <a:spcPts val="1000"/>
+              </a:spcAft>
+              <a:buSzPct val="100000"/>
+              <a:buChar char="•"/>
+            </a:pPr>
+            <a:r>
+              <a:rPr lang="en-US" sz="1800" dirty="0">
+                <a:solidFill>
+                  <a:srgbClr val="F5F8FF"/>
+                </a:solidFill>
+                <a:latin typeface="IBM Plex Sans" pitchFamily="34" charset="0"/>
+                <a:ea typeface="IBM Plex Sans" pitchFamily="34" charset="-122"/>
+                <a:cs typeface="IBM Plex Sans" pitchFamily="34" charset="-120"/>
+              </a:rPr>
+              <a:t>The medium is the message.</a:t>
+            </a:r>
+            <a:endParaRPr lang="en-US" sz="1800" dirty="0"/>
+          </a:p>
+        </p:txBody>
+      </p:sp>
+    </p:spTree>
+  </p:cSld>
+  <p:clrMapOvr>
+    <a:masterClrMapping/>
+  </p:clrMapOvr>
+</p:sld>
+</file>
+
+<file path=ppt/slides/slide23.xml><?xml version="1.0" encoding="utf-8"?>
+<p:sld xmlns:a="http://schemas.openxmlformats.org/drawingml/2006/main" xmlns:r="http://schemas.openxmlformats.org/officeDocument/2006/relationships" xmlns:p="http://schemas.openxmlformats.org/presentationml/2006/main">
+  <p:cSld name="Slide 23">
+    <p:bg>
+      <p:bgPr>
+        <a:solidFill>
+          <a:srgbClr val="0A1120"/>
+        </a:solidFill>
+      </p:bgPr>
+    </p:bg>
+    <p:spTree>
+      <p:nvGrpSpPr>
+        <p:cNvPr id="1" name=""/>
+        <p:cNvGrpSpPr/>
+        <p:nvPr/>
+      </p:nvGrpSpPr>
+      <p:grpSpPr>
+        <a:xfrm>
+          <a:off x="0" y="0"/>
+          <a:ext cx="0" cy="0"/>
+          <a:chOff x="0" y="0"/>
+          <a:chExt cx="0" cy="0"/>
+        </a:xfrm>
+      </p:grpSpPr>
+      <p:sp>
+        <p:nvSpPr>
+          <p:cNvPr id="2" name="Shape 0"/>
+          <p:cNvSpPr/>
+          <p:nvPr/>
+        </p:nvSpPr>
+        <p:spPr>
+          <a:xfrm>
+            <a:off x="0" y="0"/>
+            <a:ext cx="12191695" cy="109728"/>
+          </a:xfrm>
+          <a:prstGeom prst="rect">
+            <a:avLst/>
+          </a:prstGeom>
+          <a:solidFill>
+            <a:srgbClr val="3898FF"/>
+          </a:solidFill>
+          <a:ln/>
+        </p:spPr>
+      </p:sp>
+      <p:sp>
+        <p:nvSpPr>
+          <p:cNvPr id="3" name="Shape 1"/>
+          <p:cNvSpPr/>
+          <p:nvPr/>
+        </p:nvSpPr>
+        <p:spPr>
+          <a:xfrm>
+            <a:off x="640080" y="6291072"/>
+            <a:ext cx="274320" cy="274320"/>
+          </a:xfrm>
+          <a:prstGeom prst="roundRect">
+            <a:avLst>
+              <a:gd name="adj" fmla="val 22000"/>
+            </a:avLst>
+          </a:prstGeom>
+          <a:solidFill>
+            <a:srgbClr val="2563EB"/>
+          </a:solidFill>
+          <a:ln/>
+        </p:spPr>
+      </p:sp>
+      <p:sp>
+        <p:nvSpPr>
+          <p:cNvPr id="4" name="Shape 2"/>
+          <p:cNvSpPr/>
+          <p:nvPr/>
+        </p:nvSpPr>
+        <p:spPr>
+          <a:xfrm>
+            <a:off x="694944" y="6444691"/>
+            <a:ext cx="32918" cy="54864"/>
+          </a:xfrm>
+          <a:prstGeom prst="roundRect">
+            <a:avLst>
+              <a:gd name="adj" fmla="val 50001"/>
+            </a:avLst>
+          </a:prstGeom>
+          <a:solidFill>
+            <a:srgbClr val="FFFFFF"/>
+          </a:solidFill>
+          <a:ln/>
+        </p:spPr>
+      </p:sp>
+      <p:sp>
+        <p:nvSpPr>
+          <p:cNvPr id="5" name="Shape 3"/>
+          <p:cNvSpPr/>
+          <p:nvPr/>
+        </p:nvSpPr>
+        <p:spPr>
+          <a:xfrm>
+            <a:off x="744322" y="6406286"/>
+            <a:ext cx="32918" cy="93269"/>
+          </a:xfrm>
+          <a:prstGeom prst="roundRect">
+            <a:avLst>
+              <a:gd name="adj" fmla="val 50001"/>
+            </a:avLst>
+          </a:prstGeom>
+          <a:solidFill>
+            <a:srgbClr val="FFFFFF"/>
+          </a:solidFill>
+          <a:ln/>
+        </p:spPr>
+      </p:sp>
+      <p:sp>
+        <p:nvSpPr>
+          <p:cNvPr id="6" name="Shape 4"/>
+          <p:cNvSpPr/>
+          <p:nvPr/>
+        </p:nvSpPr>
+        <p:spPr>
+          <a:xfrm>
+            <a:off x="793699" y="6367882"/>
+            <a:ext cx="32918" cy="131674"/>
+          </a:xfrm>
+          <a:prstGeom prst="roundRect">
+            <a:avLst>
+              <a:gd name="adj" fmla="val 50001"/>
+            </a:avLst>
+          </a:prstGeom>
+          <a:solidFill>
+            <a:srgbClr val="FFFFFF"/>
+          </a:solidFill>
+          <a:ln/>
+        </p:spPr>
+      </p:sp>
+      <p:sp>
+        <p:nvSpPr>
+          <p:cNvPr id="7" name="Shape 5"/>
+          <p:cNvSpPr/>
+          <p:nvPr/>
+        </p:nvSpPr>
+        <p:spPr>
+          <a:xfrm>
+            <a:off x="843077" y="6329477"/>
+            <a:ext cx="32918" cy="170078"/>
+          </a:xfrm>
+          <a:prstGeom prst="roundRect">
+            <a:avLst>
+              <a:gd name="adj" fmla="val 50001"/>
+            </a:avLst>
+          </a:prstGeom>
+          <a:solidFill>
+            <a:srgbClr val="FFFFFF"/>
+          </a:solidFill>
+          <a:ln/>
+        </p:spPr>
+      </p:sp>
+      <p:sp>
+        <p:nvSpPr>
+          <p:cNvPr id="8" name="Text 6"/>
+          <p:cNvSpPr/>
+          <p:nvPr/>
+        </p:nvSpPr>
+        <p:spPr>
+          <a:xfrm>
+            <a:off x="1024128" y="6254496"/>
+            <a:ext cx="2743200" cy="347472"/>
+          </a:xfrm>
+          <a:prstGeom prst="rect">
+            <a:avLst/>
+          </a:prstGeom>
+          <a:noFill/>
+          <a:ln/>
+        </p:spPr>
+        <p:txBody>
+          <a:bodyPr wrap="square" rtlCol="0" anchor="ctr"/>
+          <a:lstStyle/>
+          <a:p>
+            <a:pPr algn="l" indent="0" marL="0">
+              <a:buNone/>
+            </a:pPr>
+            <a:r>
+              <a:rPr lang="en-US" sz="1200" b="1" dirty="0">
+                <a:solidFill>
+                  <a:srgbClr val="93A4B8"/>
+                </a:solidFill>
+                <a:latin typeface="IBM Plex Sans" pitchFamily="34" charset="0"/>
+                <a:ea typeface="IBM Plex Sans" pitchFamily="34" charset="-122"/>
+                <a:cs typeface="IBM Plex Sans" pitchFamily="34" charset="-120"/>
+              </a:rPr>
+              <a:t>IdeaM</a:t>
+            </a:r>
+            <a:endParaRPr lang="en-US" sz="1200" dirty="0"/>
+          </a:p>
+        </p:txBody>
+      </p:sp>
+      <p:sp>
+        <p:nvSpPr>
+          <p:cNvPr id="9" name="Text 7"/>
+          <p:cNvSpPr/>
+          <p:nvPr/>
+        </p:nvSpPr>
+        <p:spPr>
+          <a:xfrm>
+            <a:off x="10180015" y="6254496"/>
+            <a:ext cx="1371600" cy="347472"/>
+          </a:xfrm>
+          <a:prstGeom prst="rect">
+            <a:avLst/>
+          </a:prstGeom>
+          <a:noFill/>
+          <a:ln/>
+        </p:spPr>
+        <p:txBody>
+          <a:bodyPr wrap="square" rtlCol="0" anchor="ctr"/>
+          <a:lstStyle/>
+          <a:p>
+            <a:pPr algn="r" indent="0" marL="0">
+              <a:buNone/>
+            </a:pPr>
+            <a:r>
+              <a:rPr lang="en-US" sz="1100" dirty="0">
+                <a:solidFill>
+                  <a:srgbClr val="93A4B8"/>
+                </a:solidFill>
+                <a:latin typeface="IBM Plex Sans" pitchFamily="34" charset="0"/>
+                <a:ea typeface="IBM Plex Sans" pitchFamily="34" charset="-122"/>
+                <a:cs typeface="IBM Plex Sans" pitchFamily="34" charset="-120"/>
+              </a:rPr>
+              <a:t>23 / 26</a:t>
+            </a:r>
+            <a:endParaRPr lang="en-US" sz="1100" dirty="0"/>
+          </a:p>
+        </p:txBody>
+      </p:sp>
+      <p:sp>
+        <p:nvSpPr>
+          <p:cNvPr id="10" name="Text 8"/>
+          <p:cNvSpPr/>
+          <p:nvPr/>
+        </p:nvSpPr>
+        <p:spPr>
+          <a:xfrm>
+            <a:off x="640080" y="502920"/>
+            <a:ext cx="10911535" cy="822960"/>
+          </a:xfrm>
+          <a:prstGeom prst="rect">
+            <a:avLst/>
+          </a:prstGeom>
+          <a:noFill/>
+          <a:ln/>
+        </p:spPr>
+        <p:txBody>
+          <a:bodyPr wrap="square" rtlCol="0" anchor="t"/>
+          <a:lstStyle/>
+          <a:p>
+            <a:pPr algn="l" indent="0" marL="0">
+              <a:buNone/>
+            </a:pPr>
+            <a:r>
+              <a:rPr lang="en-US" sz="2600" b="1" dirty="0">
+                <a:solidFill>
+                  <a:srgbClr val="F5F8FF"/>
+                </a:solidFill>
+                <a:latin typeface="IBM Plex Sans" pitchFamily="34" charset="0"/>
+                <a:ea typeface="IBM Plex Sans" pitchFamily="34" charset="-122"/>
+                <a:cs typeface="IBM Plex Sans" pitchFamily="34" charset="-120"/>
+              </a:rPr>
+              <a:t>The Numbers &amp; the Sources</a:t>
+            </a:r>
+            <a:endParaRPr lang="en-US" sz="2600" dirty="0"/>
+          </a:p>
+        </p:txBody>
+      </p:sp>
+      <p:sp>
+        <p:nvSpPr>
+          <p:cNvPr id="11" name="Shape 9"/>
+          <p:cNvSpPr/>
+          <p:nvPr/>
+        </p:nvSpPr>
+        <p:spPr>
+          <a:xfrm>
+            <a:off x="640080" y="1325880"/>
+            <a:ext cx="1005840" cy="82296"/>
+          </a:xfrm>
+          <a:prstGeom prst="rect">
+            <a:avLst/>
+          </a:prstGeom>
+          <a:solidFill>
+            <a:srgbClr val="3898FF"/>
+          </a:solidFill>
+          <a:ln/>
+        </p:spPr>
+      </p:sp>
+      <p:sp>
+        <p:nvSpPr>
+          <p:cNvPr id="12" name="Text 10"/>
+          <p:cNvSpPr/>
+          <p:nvPr/>
+        </p:nvSpPr>
+        <p:spPr>
+          <a:xfrm>
+            <a:off x="640080" y="1737360"/>
+            <a:ext cx="5120640" cy="4206240"/>
+          </a:xfrm>
+          <a:prstGeom prst="rect">
+            <a:avLst/>
+          </a:prstGeom>
+          <a:noFill/>
+          <a:ln/>
+        </p:spPr>
+        <p:txBody>
+          <a:bodyPr wrap="square" rtlCol="0" anchor="t"/>
+          <a:lstStyle/>
+          <a:p>
+            <a:pPr algn="l" marL="228600" indent="-228600">
+              <a:spcAft>
+                <a:spcPts val="1000"/>
+              </a:spcAft>
+              <a:buSzPct val="100000"/>
+              <a:buChar char="•"/>
+            </a:pPr>
+            <a:r>
+              <a:rPr lang="en-US" sz="1800" dirty="0">
+                <a:solidFill>
+                  <a:srgbClr val="F5F8FF"/>
+                </a:solidFill>
+                <a:latin typeface="IBM Plex Sans" pitchFamily="34" charset="0"/>
+                <a:ea typeface="IBM Plex Sans" pitchFamily="34" charset="-122"/>
+                <a:cs typeface="IBM Plex Sans" pitchFamily="34" charset="-120"/>
+              </a:rPr>
+              <a:t>Everything defensible, in one place, so Howard can answer a pointed question without fumbling.</a:t>
+            </a:r>
+            <a:endParaRPr lang="en-US" sz="1800" dirty="0"/>
+          </a:p>
+        </p:txBody>
+      </p:sp>
+      <p:graphicFrame>
+        <p:nvGraphicFramePr>
+          <p:cNvPr id="13" name="Chart 0" descr=""/>
+          <p:cNvGraphicFramePr/>
+          <p:nvPr/>
+        </p:nvGraphicFramePr>
+        <p:xfrm>
+          <a:off x="6126480" y="1737360"/>
+          <a:ext cx="5394960" cy="4023360"/>
+        </p:xfrm>
+        <a:graphic xmlns:a="http://schemas.openxmlformats.org/drawingml/2006/main">
+          <a:graphicData uri="http://schemas.openxmlformats.org/drawingml/2006/chart">
+            <c:chart xmlns:c="http://schemas.openxmlformats.org/drawingml/2006/chart" r:id="rId1"/>
+          </a:graphicData>
+        </a:graphic>
+      </p:graphicFrame>
+    </p:spTree>
+  </p:cSld>
+  <p:clrMapOvr>
+    <a:masterClrMapping/>
+  </p:clrMapOvr>
+</p:sld>
+</file>
+
+<file path=ppt/slides/slide24.xml><?xml version="1.0" encoding="utf-8"?>
+<p:sld xmlns:a="http://schemas.openxmlformats.org/drawingml/2006/main" xmlns:r="http://schemas.openxmlformats.org/officeDocument/2006/relationships" xmlns:p="http://schemas.openxmlformats.org/presentationml/2006/main">
+  <p:cSld name="Slide 24">
+    <p:bg>
+      <p:bgPr>
+        <a:solidFill>
+          <a:srgbClr val="0A1120"/>
+        </a:solidFill>
+      </p:bgPr>
+    </p:bg>
+    <p:spTree>
+      <p:nvGrpSpPr>
+        <p:cNvPr id="1" name=""/>
+        <p:cNvGrpSpPr/>
+        <p:nvPr/>
+      </p:nvGrpSpPr>
+      <p:grpSpPr>
+        <a:xfrm>
+          <a:off x="0" y="0"/>
+          <a:ext cx="0" cy="0"/>
+          <a:chOff x="0" y="0"/>
+          <a:chExt cx="0" cy="0"/>
+        </a:xfrm>
+      </p:grpSpPr>
+      <p:sp>
+        <p:nvSpPr>
+          <p:cNvPr id="2" name="Shape 0"/>
+          <p:cNvSpPr/>
+          <p:nvPr/>
+        </p:nvSpPr>
+        <p:spPr>
+          <a:xfrm>
+            <a:off x="0" y="0"/>
+            <a:ext cx="12191695" cy="109728"/>
+          </a:xfrm>
+          <a:prstGeom prst="rect">
+            <a:avLst/>
+          </a:prstGeom>
+          <a:solidFill>
+            <a:srgbClr val="3898FF"/>
+          </a:solidFill>
+          <a:ln/>
+        </p:spPr>
+      </p:sp>
+      <p:sp>
+        <p:nvSpPr>
+          <p:cNvPr id="3" name="Shape 1"/>
+          <p:cNvSpPr/>
+          <p:nvPr/>
+        </p:nvSpPr>
+        <p:spPr>
+          <a:xfrm>
+            <a:off x="640080" y="6291072"/>
+            <a:ext cx="274320" cy="274320"/>
+          </a:xfrm>
+          <a:prstGeom prst="roundRect">
+            <a:avLst>
+              <a:gd name="adj" fmla="val 22000"/>
+            </a:avLst>
+          </a:prstGeom>
+          <a:solidFill>
+            <a:srgbClr val="2563EB"/>
+          </a:solidFill>
+          <a:ln/>
+        </p:spPr>
+      </p:sp>
+      <p:sp>
+        <p:nvSpPr>
+          <p:cNvPr id="4" name="Shape 2"/>
+          <p:cNvSpPr/>
+          <p:nvPr/>
+        </p:nvSpPr>
+        <p:spPr>
+          <a:xfrm>
+            <a:off x="694944" y="6444691"/>
+            <a:ext cx="32918" cy="54864"/>
+          </a:xfrm>
+          <a:prstGeom prst="roundRect">
+            <a:avLst>
+              <a:gd name="adj" fmla="val 50001"/>
+            </a:avLst>
+          </a:prstGeom>
+          <a:solidFill>
+            <a:srgbClr val="FFFFFF"/>
+          </a:solidFill>
+          <a:ln/>
+        </p:spPr>
+      </p:sp>
+      <p:sp>
+        <p:nvSpPr>
+          <p:cNvPr id="5" name="Shape 3"/>
+          <p:cNvSpPr/>
+          <p:nvPr/>
+        </p:nvSpPr>
+        <p:spPr>
+          <a:xfrm>
+            <a:off x="744322" y="6406286"/>
+            <a:ext cx="32918" cy="93269"/>
+          </a:xfrm>
+          <a:prstGeom prst="roundRect">
+            <a:avLst>
+              <a:gd name="adj" fmla="val 50001"/>
+            </a:avLst>
+          </a:prstGeom>
+          <a:solidFill>
+            <a:srgbClr val="FFFFFF"/>
+          </a:solidFill>
+          <a:ln/>
+        </p:spPr>
+      </p:sp>
+      <p:sp>
+        <p:nvSpPr>
+          <p:cNvPr id="6" name="Shape 4"/>
+          <p:cNvSpPr/>
+          <p:nvPr/>
+        </p:nvSpPr>
+        <p:spPr>
+          <a:xfrm>
+            <a:off x="793699" y="6367882"/>
+            <a:ext cx="32918" cy="131674"/>
+          </a:xfrm>
+          <a:prstGeom prst="roundRect">
+            <a:avLst>
+              <a:gd name="adj" fmla="val 50001"/>
+            </a:avLst>
+          </a:prstGeom>
+          <a:solidFill>
+            <a:srgbClr val="FFFFFF"/>
+          </a:solidFill>
+          <a:ln/>
+        </p:spPr>
+      </p:sp>
+      <p:sp>
+        <p:nvSpPr>
+          <p:cNvPr id="7" name="Shape 5"/>
+          <p:cNvSpPr/>
+          <p:nvPr/>
+        </p:nvSpPr>
+        <p:spPr>
+          <a:xfrm>
+            <a:off x="843077" y="6329477"/>
+            <a:ext cx="32918" cy="170078"/>
+          </a:xfrm>
+          <a:prstGeom prst="roundRect">
+            <a:avLst>
+              <a:gd name="adj" fmla="val 50001"/>
+            </a:avLst>
+          </a:prstGeom>
+          <a:solidFill>
+            <a:srgbClr val="FFFFFF"/>
+          </a:solidFill>
+          <a:ln/>
+        </p:spPr>
+      </p:sp>
+      <p:sp>
+        <p:nvSpPr>
+          <p:cNvPr id="8" name="Text 6"/>
+          <p:cNvSpPr/>
+          <p:nvPr/>
+        </p:nvSpPr>
+        <p:spPr>
+          <a:xfrm>
+            <a:off x="1024128" y="6254496"/>
+            <a:ext cx="2743200" cy="347472"/>
+          </a:xfrm>
+          <a:prstGeom prst="rect">
+            <a:avLst/>
+          </a:prstGeom>
+          <a:noFill/>
+          <a:ln/>
+        </p:spPr>
+        <p:txBody>
+          <a:bodyPr wrap="square" rtlCol="0" anchor="ctr"/>
+          <a:lstStyle/>
+          <a:p>
+            <a:pPr algn="l" indent="0" marL="0">
+              <a:buNone/>
+            </a:pPr>
+            <a:r>
+              <a:rPr lang="en-US" sz="1200" b="1" dirty="0">
+                <a:solidFill>
+                  <a:srgbClr val="93A4B8"/>
+                </a:solidFill>
+                <a:latin typeface="IBM Plex Sans" pitchFamily="34" charset="0"/>
+                <a:ea typeface="IBM Plex Sans" pitchFamily="34" charset="-122"/>
+                <a:cs typeface="IBM Plex Sans" pitchFamily="34" charset="-120"/>
+              </a:rPr>
+              <a:t>IdeaM</a:t>
+            </a:r>
+            <a:endParaRPr lang="en-US" sz="1200" dirty="0"/>
+          </a:p>
+        </p:txBody>
+      </p:sp>
+      <p:sp>
+        <p:nvSpPr>
+          <p:cNvPr id="9" name="Text 7"/>
+          <p:cNvSpPr/>
+          <p:nvPr/>
+        </p:nvSpPr>
+        <p:spPr>
+          <a:xfrm>
+            <a:off x="10180015" y="6254496"/>
+            <a:ext cx="1371600" cy="347472"/>
+          </a:xfrm>
+          <a:prstGeom prst="rect">
+            <a:avLst/>
+          </a:prstGeom>
+          <a:noFill/>
+          <a:ln/>
+        </p:spPr>
+        <p:txBody>
+          <a:bodyPr wrap="square" rtlCol="0" anchor="ctr"/>
+          <a:lstStyle/>
+          <a:p>
+            <a:pPr algn="r" indent="0" marL="0">
+              <a:buNone/>
+            </a:pPr>
+            <a:r>
+              <a:rPr lang="en-US" sz="1100" dirty="0">
+                <a:solidFill>
+                  <a:srgbClr val="93A4B8"/>
+                </a:solidFill>
+                <a:latin typeface="IBM Plex Sans" pitchFamily="34" charset="0"/>
+                <a:ea typeface="IBM Plex Sans" pitchFamily="34" charset="-122"/>
+                <a:cs typeface="IBM Plex Sans" pitchFamily="34" charset="-120"/>
+              </a:rPr>
+              <a:t>24 / 26</a:t>
+            </a:r>
+            <a:endParaRPr lang="en-US" sz="1100" dirty="0"/>
+          </a:p>
+        </p:txBody>
+      </p:sp>
+      <p:sp>
+        <p:nvSpPr>
+          <p:cNvPr id="10" name="Text 8"/>
+          <p:cNvSpPr/>
+          <p:nvPr/>
+        </p:nvSpPr>
+        <p:spPr>
+          <a:xfrm>
+            <a:off x="640080" y="502920"/>
+            <a:ext cx="10911535" cy="822960"/>
+          </a:xfrm>
+          <a:prstGeom prst="rect">
+            <a:avLst/>
+          </a:prstGeom>
+          <a:noFill/>
+          <a:ln/>
+        </p:spPr>
+        <p:txBody>
+          <a:bodyPr wrap="square" rtlCol="0" anchor="t"/>
+          <a:lstStyle/>
+          <a:p>
+            <a:pPr algn="l" indent="0" marL="0">
+              <a:buNone/>
+            </a:pPr>
+            <a:r>
+              <a:rPr lang="en-US" sz="2600" b="1" dirty="0">
+                <a:solidFill>
+                  <a:srgbClr val="F5F8FF"/>
+                </a:solidFill>
+                <a:latin typeface="IBM Plex Sans" pitchFamily="34" charset="0"/>
+                <a:ea typeface="IBM Plex Sans" pitchFamily="34" charset="-122"/>
+                <a:cs typeface="IBM Plex Sans" pitchFamily="34" charset="-120"/>
+              </a:rPr>
+              <a:t>Sources</a:t>
+            </a:r>
+            <a:endParaRPr lang="en-US" sz="2600" dirty="0"/>
+          </a:p>
+        </p:txBody>
+      </p:sp>
+      <p:sp>
+        <p:nvSpPr>
+          <p:cNvPr id="11" name="Shape 9"/>
+          <p:cNvSpPr/>
+          <p:nvPr/>
+        </p:nvSpPr>
+        <p:spPr>
+          <a:xfrm>
+            <a:off x="640080" y="1325880"/>
+            <a:ext cx="1005840" cy="82296"/>
+          </a:xfrm>
+          <a:prstGeom prst="rect">
+            <a:avLst/>
+          </a:prstGeom>
+          <a:solidFill>
+            <a:srgbClr val="3898FF"/>
+          </a:solidFill>
+          <a:ln/>
+        </p:spPr>
+      </p:sp>
+      <p:sp>
+        <p:nvSpPr>
+          <p:cNvPr id="12" name="Text 10"/>
+          <p:cNvSpPr/>
+          <p:nvPr/>
+        </p:nvSpPr>
+        <p:spPr>
+          <a:xfrm>
+            <a:off x="640080" y="1737360"/>
+            <a:ext cx="5120640" cy="4206240"/>
+          </a:xfrm>
+          <a:prstGeom prst="rect">
+            <a:avLst/>
+          </a:prstGeom>
+          <a:noFill/>
+          <a:ln/>
+        </p:spPr>
+        <p:txBody>
+          <a:bodyPr wrap="square" rtlCol="0" anchor="t"/>
+          <a:lstStyle/>
+          <a:p>
+            <a:pPr algn="l" marL="228600" indent="-228600">
+              <a:spcAft>
+                <a:spcPts val="1000"/>
+              </a:spcAft>
+              <a:buSzPct val="100000"/>
+              <a:buChar char="•"/>
+            </a:pPr>
+            <a:r>
+              <a:rPr lang="en-US" sz="1800" dirty="0">
+                <a:solidFill>
+                  <a:srgbClr val="F5F8FF"/>
+                </a:solidFill>
+                <a:latin typeface="IBM Plex Sans" pitchFamily="34" charset="0"/>
+                <a:ea typeface="IBM Plex Sans" pitchFamily="34" charset="-122"/>
+                <a:cs typeface="IBM Plex Sans" pitchFamily="34" charset="-120"/>
+              </a:rPr>
+              <a:t>2025 Stack Overflow Developer Survey — ~80% AI adoption; ~29% trust in accuracy; ~45% report losing time debugging AI output.</a:t>
+            </a:r>
+            <a:endParaRPr lang="en-US" sz="1800" dirty="0"/>
+          </a:p>
+          <a:p>
+            <a:pPr algn="l" marL="228600" indent="-228600">
+              <a:spcAft>
+                <a:spcPts val="1000"/>
+              </a:spcAft>
+              <a:buSzPct val="100000"/>
+              <a:buChar char="•"/>
+            </a:pPr>
+            <a:r>
+              <a:rPr lang="en-US" sz="1800" dirty="0">
+                <a:solidFill>
+                  <a:srgbClr val="F5F8FF"/>
+                </a:solidFill>
+                <a:latin typeface="IBM Plex Sans" pitchFamily="34" charset="0"/>
+                <a:ea typeface="IBM Plex Sans" pitchFamily="34" charset="-122"/>
+                <a:cs typeface="IBM Plex Sans" pitchFamily="34" charset="-120"/>
+              </a:rPr>
+              <a:t>IdeaM architecture / modularity audit — Grade B, above median, zero circular dependencies, a few oversized files.</a:t>
+            </a:r>
+            <a:endParaRPr lang="en-US" sz="1800" dirty="0"/>
+          </a:p>
+          <a:p>
+            <a:pPr algn="l" marL="228600" indent="-228600">
+              <a:spcAft>
+                <a:spcPts val="1000"/>
+              </a:spcAft>
+              <a:buSzPct val="100000"/>
+              <a:buChar char="•"/>
+            </a:pPr>
+            <a:r>
+              <a:rPr lang="en-US" sz="1800" dirty="0">
+                <a:solidFill>
+                  <a:srgbClr val="F5F8FF"/>
+                </a:solidFill>
+                <a:latin typeface="IBM Plex Sans" pitchFamily="34" charset="0"/>
+                <a:ea typeface="IBM Plex Sans" pitchFamily="34" charset="-122"/>
+                <a:cs typeface="IBM Plex Sans" pitchFamily="34" charset="-120"/>
+              </a:rPr>
+              <a:t>Line count — ~135,000 lines of code, solo founder, largely AI-built.</a:t>
+            </a:r>
+            <a:endParaRPr lang="en-US" sz="1800" dirty="0"/>
+          </a:p>
+          <a:p>
+            <a:pPr algn="l" marL="228600" indent="-228600">
+              <a:spcAft>
+                <a:spcPts val="1000"/>
+              </a:spcAft>
+              <a:buSzPct val="100000"/>
+              <a:buChar char="•"/>
+            </a:pPr>
+            <a:r>
+              <a:rPr lang="en-US" sz="1800" dirty="0">
+                <a:solidFill>
+                  <a:srgbClr val="F5F8FF"/>
+                </a:solidFill>
+                <a:latin typeface="IBM Plex Sans" pitchFamily="34" charset="0"/>
+                <a:ea typeface="IBM Plex Sans" pitchFamily="34" charset="-122"/>
+                <a:cs typeface="IBM Plex Sans" pitchFamily="34" charset="-120"/>
+              </a:rPr>
+              <a:t>Assisted vs.</a:t>
+            </a:r>
+            <a:endParaRPr lang="en-US" sz="1800" dirty="0"/>
+          </a:p>
+          <a:p>
+            <a:pPr algn="l" marL="228600" indent="-228600">
+              <a:spcAft>
+                <a:spcPts val="1000"/>
+              </a:spcAft>
+              <a:buSzPct val="100000"/>
+              <a:buChar char="•"/>
+            </a:pPr>
+            <a:r>
+              <a:rPr lang="en-US" sz="1800" dirty="0">
+                <a:solidFill>
+                  <a:srgbClr val="F5F8FF"/>
+                </a:solidFill>
+                <a:latin typeface="IBM Plex Sans" pitchFamily="34" charset="0"/>
+                <a:ea typeface="IBM Plex Sans" pitchFamily="34" charset="-122"/>
+                <a:cs typeface="IBM Plex Sans" pitchFamily="34" charset="-120"/>
+              </a:rPr>
+              <a:t>driven — ~80% use AI as an assistant; ~10–25% of development is truly AI-driven; IdeaM in the ~15% frontier.</a:t>
+            </a:r>
+            <a:endParaRPr lang="en-US" sz="1800" dirty="0"/>
+          </a:p>
+        </p:txBody>
+      </p:sp>
+      <p:graphicFrame>
+        <p:nvGraphicFramePr>
+          <p:cNvPr id="13" name="Chart 0" descr=""/>
+          <p:cNvGraphicFramePr/>
+          <p:nvPr/>
+        </p:nvGraphicFramePr>
+        <p:xfrm>
+          <a:off x="6126480" y="1737360"/>
+          <a:ext cx="5394960" cy="4023360"/>
+        </p:xfrm>
+        <a:graphic xmlns:a="http://schemas.openxmlformats.org/drawingml/2006/main">
+          <a:graphicData uri="http://schemas.openxmlformats.org/drawingml/2006/chart">
+            <c:chart xmlns:c="http://schemas.openxmlformats.org/drawingml/2006/chart" r:id="rId1"/>
+          </a:graphicData>
+        </a:graphic>
+      </p:graphicFrame>
+    </p:spTree>
+  </p:cSld>
+  <p:clrMapOvr>
+    <a:masterClrMapping/>
+  </p:clrMapOvr>
+</p:sld>
+</file>
+
+<file path=ppt/slides/slide25.xml><?xml version="1.0" encoding="utf-8"?>
+<p:sld xmlns:a="http://schemas.openxmlformats.org/drawingml/2006/main" xmlns:r="http://schemas.openxmlformats.org/officeDocument/2006/relationships" xmlns:p="http://schemas.openxmlformats.org/presentationml/2006/main">
+  <p:cSld name="Slide 25">
+    <p:bg>
+      <p:bgPr>
+        <a:solidFill>
+          <a:srgbClr val="0A1120"/>
+        </a:solidFill>
+      </p:bgPr>
+    </p:bg>
+    <p:spTree>
+      <p:nvGrpSpPr>
+        <p:cNvPr id="1" name=""/>
+        <p:cNvGrpSpPr/>
+        <p:nvPr/>
+      </p:nvGrpSpPr>
+      <p:grpSpPr>
+        <a:xfrm>
+          <a:off x="0" y="0"/>
+          <a:ext cx="0" cy="0"/>
+          <a:chOff x="0" y="0"/>
+          <a:chExt cx="0" cy="0"/>
+        </a:xfrm>
+      </p:grpSpPr>
+      <p:sp>
+        <p:nvSpPr>
+          <p:cNvPr id="2" name="Shape 0"/>
+          <p:cNvSpPr/>
+          <p:nvPr/>
+        </p:nvSpPr>
+        <p:spPr>
+          <a:xfrm>
+            <a:off x="0" y="0"/>
+            <a:ext cx="12191695" cy="109728"/>
+          </a:xfrm>
+          <a:prstGeom prst="rect">
+            <a:avLst/>
+          </a:prstGeom>
+          <a:solidFill>
+            <a:srgbClr val="3898FF"/>
+          </a:solidFill>
+          <a:ln/>
+        </p:spPr>
+      </p:sp>
+      <p:sp>
+        <p:nvSpPr>
+          <p:cNvPr id="3" name="Shape 1"/>
+          <p:cNvSpPr/>
+          <p:nvPr/>
+        </p:nvSpPr>
+        <p:spPr>
+          <a:xfrm>
+            <a:off x="640080" y="6291072"/>
+            <a:ext cx="274320" cy="274320"/>
+          </a:xfrm>
+          <a:prstGeom prst="roundRect">
+            <a:avLst>
+              <a:gd name="adj" fmla="val 22000"/>
+            </a:avLst>
+          </a:prstGeom>
+          <a:solidFill>
+            <a:srgbClr val="2563EB"/>
+          </a:solidFill>
+          <a:ln/>
+        </p:spPr>
+      </p:sp>
+      <p:sp>
+        <p:nvSpPr>
+          <p:cNvPr id="4" name="Shape 2"/>
+          <p:cNvSpPr/>
+          <p:nvPr/>
+        </p:nvSpPr>
+        <p:spPr>
+          <a:xfrm>
+            <a:off x="694944" y="6444691"/>
+            <a:ext cx="32918" cy="54864"/>
+          </a:xfrm>
+          <a:prstGeom prst="roundRect">
+            <a:avLst>
+              <a:gd name="adj" fmla="val 50001"/>
+            </a:avLst>
+          </a:prstGeom>
+          <a:solidFill>
+            <a:srgbClr val="FFFFFF"/>
+          </a:solidFill>
+          <a:ln/>
+        </p:spPr>
+      </p:sp>
+      <p:sp>
+        <p:nvSpPr>
+          <p:cNvPr id="5" name="Shape 3"/>
+          <p:cNvSpPr/>
+          <p:nvPr/>
+        </p:nvSpPr>
+        <p:spPr>
+          <a:xfrm>
+            <a:off x="744322" y="6406286"/>
+            <a:ext cx="32918" cy="93269"/>
+          </a:xfrm>
+          <a:prstGeom prst="roundRect">
+            <a:avLst>
+              <a:gd name="adj" fmla="val 50001"/>
+            </a:avLst>
+          </a:prstGeom>
+          <a:solidFill>
+            <a:srgbClr val="FFFFFF"/>
+          </a:solidFill>
+          <a:ln/>
+        </p:spPr>
+      </p:sp>
+      <p:sp>
+        <p:nvSpPr>
+          <p:cNvPr id="6" name="Shape 4"/>
+          <p:cNvSpPr/>
+          <p:nvPr/>
+        </p:nvSpPr>
+        <p:spPr>
+          <a:xfrm>
+            <a:off x="793699" y="6367882"/>
+            <a:ext cx="32918" cy="131674"/>
+          </a:xfrm>
+          <a:prstGeom prst="roundRect">
+            <a:avLst>
+              <a:gd name="adj" fmla="val 50001"/>
+            </a:avLst>
+          </a:prstGeom>
+          <a:solidFill>
+            <a:srgbClr val="FFFFFF"/>
+          </a:solidFill>
+          <a:ln/>
+        </p:spPr>
+      </p:sp>
+      <p:sp>
+        <p:nvSpPr>
+          <p:cNvPr id="7" name="Shape 5"/>
+          <p:cNvSpPr/>
+          <p:nvPr/>
+        </p:nvSpPr>
+        <p:spPr>
+          <a:xfrm>
+            <a:off x="843077" y="6329477"/>
+            <a:ext cx="32918" cy="170078"/>
+          </a:xfrm>
+          <a:prstGeom prst="roundRect">
+            <a:avLst>
+              <a:gd name="adj" fmla="val 50001"/>
+            </a:avLst>
+          </a:prstGeom>
+          <a:solidFill>
+            <a:srgbClr val="FFFFFF"/>
+          </a:solidFill>
+          <a:ln/>
+        </p:spPr>
+      </p:sp>
+      <p:sp>
+        <p:nvSpPr>
+          <p:cNvPr id="8" name="Text 6"/>
+          <p:cNvSpPr/>
+          <p:nvPr/>
+        </p:nvSpPr>
+        <p:spPr>
+          <a:xfrm>
+            <a:off x="1024128" y="6254496"/>
+            <a:ext cx="2743200" cy="347472"/>
+          </a:xfrm>
+          <a:prstGeom prst="rect">
+            <a:avLst/>
+          </a:prstGeom>
+          <a:noFill/>
+          <a:ln/>
+        </p:spPr>
+        <p:txBody>
+          <a:bodyPr wrap="square" rtlCol="0" anchor="ctr"/>
+          <a:lstStyle/>
+          <a:p>
+            <a:pPr algn="l" indent="0" marL="0">
+              <a:buNone/>
+            </a:pPr>
+            <a:r>
+              <a:rPr lang="en-US" sz="1200" b="1" dirty="0">
+                <a:solidFill>
+                  <a:srgbClr val="93A4B8"/>
+                </a:solidFill>
+                <a:latin typeface="IBM Plex Sans" pitchFamily="34" charset="0"/>
+                <a:ea typeface="IBM Plex Sans" pitchFamily="34" charset="-122"/>
+                <a:cs typeface="IBM Plex Sans" pitchFamily="34" charset="-120"/>
+              </a:rPr>
+              <a:t>IdeaM</a:t>
+            </a:r>
+            <a:endParaRPr lang="en-US" sz="1200" dirty="0"/>
+          </a:p>
+        </p:txBody>
+      </p:sp>
+      <p:sp>
+        <p:nvSpPr>
+          <p:cNvPr id="9" name="Text 7"/>
+          <p:cNvSpPr/>
+          <p:nvPr/>
+        </p:nvSpPr>
+        <p:spPr>
+          <a:xfrm>
+            <a:off x="10180015" y="6254496"/>
+            <a:ext cx="1371600" cy="347472"/>
+          </a:xfrm>
+          <a:prstGeom prst="rect">
+            <a:avLst/>
+          </a:prstGeom>
+          <a:noFill/>
+          <a:ln/>
+        </p:spPr>
+        <p:txBody>
+          <a:bodyPr wrap="square" rtlCol="0" anchor="ctr"/>
+          <a:lstStyle/>
+          <a:p>
+            <a:pPr algn="r" indent="0" marL="0">
+              <a:buNone/>
+            </a:pPr>
+            <a:r>
+              <a:rPr lang="en-US" sz="1100" dirty="0">
+                <a:solidFill>
+                  <a:srgbClr val="93A4B8"/>
+                </a:solidFill>
+                <a:latin typeface="IBM Plex Sans" pitchFamily="34" charset="0"/>
+                <a:ea typeface="IBM Plex Sans" pitchFamily="34" charset="-122"/>
+                <a:cs typeface="IBM Plex Sans" pitchFamily="34" charset="-120"/>
+              </a:rPr>
+              <a:t>25 / 26</a:t>
+            </a:r>
+            <a:endParaRPr lang="en-US" sz="1100" dirty="0"/>
+          </a:p>
+        </p:txBody>
+      </p:sp>
+      <p:sp>
+        <p:nvSpPr>
+          <p:cNvPr id="10" name="Text 8"/>
+          <p:cNvSpPr/>
+          <p:nvPr/>
+        </p:nvSpPr>
+        <p:spPr>
+          <a:xfrm>
+            <a:off x="640080" y="502920"/>
+            <a:ext cx="10911535" cy="822960"/>
+          </a:xfrm>
+          <a:prstGeom prst="rect">
+            <a:avLst/>
+          </a:prstGeom>
+          <a:noFill/>
+          <a:ln/>
+        </p:spPr>
+        <p:txBody>
+          <a:bodyPr wrap="square" rtlCol="0" anchor="t"/>
+          <a:lstStyle/>
+          <a:p>
+            <a:pPr algn="l" indent="0" marL="0">
+              <a:buNone/>
+            </a:pPr>
+            <a:r>
+              <a:rPr lang="en-US" sz="2600" b="1" dirty="0">
+                <a:solidFill>
+                  <a:srgbClr val="F5F8FF"/>
+                </a:solidFill>
+                <a:latin typeface="IBM Plex Sans" pitchFamily="34" charset="0"/>
+                <a:ea typeface="IBM Plex Sans" pitchFamily="34" charset="-122"/>
+                <a:cs typeface="IBM Plex Sans" pitchFamily="34" charset="-120"/>
+              </a:rPr>
+              <a:t>The numbers at a glance</a:t>
+            </a:r>
+            <a:endParaRPr lang="en-US" sz="2600" dirty="0"/>
+          </a:p>
+        </p:txBody>
+      </p:sp>
+      <p:sp>
+        <p:nvSpPr>
+          <p:cNvPr id="11" name="Shape 9"/>
+          <p:cNvSpPr/>
+          <p:nvPr/>
+        </p:nvSpPr>
+        <p:spPr>
+          <a:xfrm>
+            <a:off x="640080" y="1325880"/>
+            <a:ext cx="1005840" cy="82296"/>
+          </a:xfrm>
+          <a:prstGeom prst="rect">
+            <a:avLst/>
+          </a:prstGeom>
+          <a:solidFill>
+            <a:srgbClr val="3898FF"/>
+          </a:solidFill>
+          <a:ln/>
+        </p:spPr>
+      </p:sp>
+      <p:sp>
+        <p:nvSpPr>
+          <p:cNvPr id="12" name="Text 10"/>
+          <p:cNvSpPr/>
+          <p:nvPr/>
+        </p:nvSpPr>
+        <p:spPr>
+          <a:xfrm>
+            <a:off x="640080" y="1737360"/>
+            <a:ext cx="5120640" cy="4206240"/>
+          </a:xfrm>
+          <a:prstGeom prst="rect">
+            <a:avLst/>
+          </a:prstGeom>
+          <a:noFill/>
+          <a:ln/>
+        </p:spPr>
+        <p:txBody>
+          <a:bodyPr wrap="square" rtlCol="0" anchor="t"/>
+          <a:lstStyle/>
+          <a:p>
+            <a:pPr algn="l" marL="228600" indent="-228600">
+              <a:spcAft>
+                <a:spcPts val="1000"/>
+              </a:spcAft>
+              <a:buSzPct val="100000"/>
+              <a:buChar char="•"/>
+            </a:pPr>
+            <a:r>
+              <a:rPr lang="en-US" sz="1800" dirty="0">
+                <a:solidFill>
+                  <a:srgbClr val="F5F8FF"/>
+                </a:solidFill>
+                <a:latin typeface="IBM Plex Sans" pitchFamily="34" charset="0"/>
+                <a:ea typeface="IBM Plex Sans" pitchFamily="34" charset="-122"/>
+                <a:cs typeface="IBM Plex Sans" pitchFamily="34" charset="-120"/>
+              </a:rPr>
+              <a:t>80% use AI</a:t>
+            </a:r>
+            <a:endParaRPr lang="en-US" sz="1800" dirty="0"/>
+          </a:p>
+          <a:p>
+            <a:pPr algn="l" marL="228600" indent="-228600">
+              <a:spcAft>
+                <a:spcPts val="1000"/>
+              </a:spcAft>
+              <a:buSzPct val="100000"/>
+              <a:buChar char="•"/>
+            </a:pPr>
+            <a:r>
+              <a:rPr lang="en-US" sz="1800" dirty="0">
+                <a:solidFill>
+                  <a:srgbClr val="F5F8FF"/>
+                </a:solidFill>
+                <a:latin typeface="IBM Plex Sans" pitchFamily="34" charset="0"/>
+                <a:ea typeface="IBM Plex Sans" pitchFamily="34" charset="-122"/>
+                <a:cs typeface="IBM Plex Sans" pitchFamily="34" charset="-120"/>
+              </a:rPr>
+              <a:t>29% trust it</a:t>
+            </a:r>
+            <a:endParaRPr lang="en-US" sz="1800" dirty="0"/>
+          </a:p>
+          <a:p>
+            <a:pPr algn="l" marL="228600" indent="-228600">
+              <a:spcAft>
+                <a:spcPts val="1000"/>
+              </a:spcAft>
+              <a:buSzPct val="100000"/>
+              <a:buChar char="•"/>
+            </a:pPr>
+            <a:r>
+              <a:rPr lang="en-US" sz="1800" dirty="0">
+                <a:solidFill>
+                  <a:srgbClr val="F5F8FF"/>
+                </a:solidFill>
+                <a:latin typeface="IBM Plex Sans" pitchFamily="34" charset="0"/>
+                <a:ea typeface="IBM Plex Sans" pitchFamily="34" charset="-122"/>
+                <a:cs typeface="IBM Plex Sans" pitchFamily="34" charset="-120"/>
+              </a:rPr>
+              <a:t>45% lose time debugging it</a:t>
+            </a:r>
+            <a:endParaRPr lang="en-US" sz="1800" dirty="0"/>
+          </a:p>
+          <a:p>
+            <a:pPr algn="l" marL="228600" indent="-228600">
+              <a:spcAft>
+                <a:spcPts val="1000"/>
+              </a:spcAft>
+              <a:buSzPct val="100000"/>
+              <a:buChar char="•"/>
+            </a:pPr>
+            <a:r>
+              <a:rPr lang="en-US" sz="1800" dirty="0">
+                <a:solidFill>
+                  <a:srgbClr val="F5F8FF"/>
+                </a:solidFill>
+                <a:latin typeface="IBM Plex Sans" pitchFamily="34" charset="0"/>
+                <a:ea typeface="IBM Plex Sans" pitchFamily="34" charset="-122"/>
+                <a:cs typeface="IBM Plex Sans" pitchFamily="34" charset="-120"/>
+              </a:rPr>
+              <a:t>135,000 lines</a:t>
+            </a:r>
+            <a:endParaRPr lang="en-US" sz="1800" dirty="0"/>
+          </a:p>
+          <a:p>
+            <a:pPr algn="l" marL="228600" indent="-228600">
+              <a:spcAft>
+                <a:spcPts val="1000"/>
+              </a:spcAft>
+              <a:buSzPct val="100000"/>
+              <a:buChar char="•"/>
+            </a:pPr>
+            <a:r>
+              <a:rPr lang="en-US" sz="1800" dirty="0">
+                <a:solidFill>
+                  <a:srgbClr val="F5F8FF"/>
+                </a:solidFill>
+                <a:latin typeface="IBM Plex Sans" pitchFamily="34" charset="0"/>
+                <a:ea typeface="IBM Plex Sans" pitchFamily="34" charset="-122"/>
+                <a:cs typeface="IBM Plex Sans" pitchFamily="34" charset="-120"/>
+              </a:rPr>
+              <a:t>solo founder</a:t>
+            </a:r>
+            <a:endParaRPr lang="en-US" sz="1800" dirty="0"/>
+          </a:p>
+          <a:p>
+            <a:pPr algn="l" marL="228600" indent="-228600">
+              <a:spcAft>
+                <a:spcPts val="1000"/>
+              </a:spcAft>
+              <a:buSzPct val="100000"/>
+              <a:buChar char="•"/>
+            </a:pPr>
+            <a:r>
+              <a:rPr lang="en-US" sz="1800" dirty="0">
+                <a:solidFill>
+                  <a:srgbClr val="F5F8FF"/>
+                </a:solidFill>
+                <a:latin typeface="IBM Plex Sans" pitchFamily="34" charset="0"/>
+                <a:ea typeface="IBM Plex Sans" pitchFamily="34" charset="-122"/>
+                <a:cs typeface="IBM Plex Sans" pitchFamily="34" charset="-120"/>
+              </a:rPr>
+              <a:t>Grade B</a:t>
+            </a:r>
+            <a:endParaRPr lang="en-US" sz="1800" dirty="0"/>
+          </a:p>
+        </p:txBody>
+      </p:sp>
+      <p:graphicFrame>
+        <p:nvGraphicFramePr>
+          <p:cNvPr id="13" name="Chart 0" descr=""/>
+          <p:cNvGraphicFramePr/>
+          <p:nvPr/>
+        </p:nvGraphicFramePr>
+        <p:xfrm>
+          <a:off x="6126480" y="1737360"/>
+          <a:ext cx="5394960" cy="4023360"/>
+        </p:xfrm>
+        <a:graphic xmlns:a="http://schemas.openxmlformats.org/drawingml/2006/main">
+          <a:graphicData uri="http://schemas.openxmlformats.org/drawingml/2006/chart">
+            <c:chart xmlns:c="http://schemas.openxmlformats.org/drawingml/2006/chart" r:id="rId1"/>
+          </a:graphicData>
+        </a:graphic>
+      </p:graphicFrame>
+    </p:spTree>
+  </p:cSld>
+  <p:clrMapOvr>
+    <a:masterClrMapping/>
+  </p:clrMapOvr>
+</p:sld>
+</file>
+
+<file path=ppt/slides/slide26.xml><?xml version="1.0" encoding="utf-8"?>
+<p:sld xmlns:a="http://schemas.openxmlformats.org/drawingml/2006/main" xmlns:r="http://schemas.openxmlformats.org/officeDocument/2006/relationships" xmlns:p="http://schemas.openxmlformats.org/presentationml/2006/main">
+  <p:cSld name="Slide 26">
+    <p:bg>
+      <p:bgPr>
+        <a:solidFill>
+          <a:srgbClr val="0A1120"/>
+        </a:solidFill>
+      </p:bgPr>
+    </p:bg>
+    <p:spTree>
+      <p:nvGrpSpPr>
+        <p:cNvPr id="1" name=""/>
+        <p:cNvGrpSpPr/>
+        <p:nvPr/>
+      </p:nvGrpSpPr>
+      <p:grpSpPr>
+        <a:xfrm>
+          <a:off x="0" y="0"/>
+          <a:ext cx="0" cy="0"/>
+          <a:chOff x="0" y="0"/>
+          <a:chExt cx="0" cy="0"/>
+        </a:xfrm>
+      </p:grpSpPr>
+      <p:sp>
+        <p:nvSpPr>
+          <p:cNvPr id="2" name="Shape 0"/>
+          <p:cNvSpPr/>
+          <p:nvPr/>
+        </p:nvSpPr>
+        <p:spPr>
+          <a:xfrm>
+            <a:off x="0" y="0"/>
+            <a:ext cx="12191695" cy="109728"/>
+          </a:xfrm>
+          <a:prstGeom prst="rect">
+            <a:avLst/>
+          </a:prstGeom>
+          <a:solidFill>
+            <a:srgbClr val="3898FF"/>
+          </a:solidFill>
+          <a:ln/>
+        </p:spPr>
+      </p:sp>
+      <p:sp>
+        <p:nvSpPr>
+          <p:cNvPr id="3" name="Text 1"/>
+          <p:cNvSpPr/>
+          <p:nvPr/>
+        </p:nvSpPr>
+        <p:spPr>
+          <a:xfrm>
+            <a:off x="640080" y="2468880"/>
+            <a:ext cx="10911535" cy="1097280"/>
+          </a:xfrm>
+          <a:prstGeom prst="rect">
+            <a:avLst/>
+          </a:prstGeom>
+          <a:noFill/>
+          <a:ln/>
+        </p:spPr>
+        <p:txBody>
+          <a:bodyPr wrap="square" rtlCol="0" anchor="ctr"/>
+          <a:lstStyle/>
+          <a:p>
+            <a:pPr algn="ctr" indent="0" marL="0">
+              <a:buNone/>
+            </a:pPr>
+            <a:r>
+              <a:rPr lang="en-US" sz="4400" b="1" dirty="0">
+                <a:solidFill>
+                  <a:srgbClr val="F5F8FF"/>
+                </a:solidFill>
+                <a:latin typeface="IBM Plex Sans" pitchFamily="34" charset="0"/>
+                <a:ea typeface="IBM Plex Sans" pitchFamily="34" charset="-122"/>
+                <a:cs typeface="IBM Plex Sans" pitchFamily="34" charset="-120"/>
+              </a:rPr>
+              <a:t>Thank you</a:t>
+            </a:r>
+            <a:endParaRPr lang="en-US" sz="4400" dirty="0"/>
+          </a:p>
+        </p:txBody>
+      </p:sp>
+      <p:sp>
+        <p:nvSpPr>
+          <p:cNvPr id="4" name="Text 2"/>
+          <p:cNvSpPr/>
+          <p:nvPr/>
+        </p:nvSpPr>
+        <p:spPr>
+          <a:xfrm>
+            <a:off x="640080" y="3566160"/>
+            <a:ext cx="10911535" cy="731520"/>
+          </a:xfrm>
+          <a:prstGeom prst="rect">
+            <a:avLst/>
+          </a:prstGeom>
+          <a:noFill/>
+          <a:ln/>
+        </p:spPr>
+        <p:txBody>
+          <a:bodyPr wrap="square" rtlCol="0" anchor="ctr"/>
+          <a:lstStyle/>
+          <a:p>
+            <a:pPr algn="ctr" indent="0" marL="0">
+              <a:buNone/>
+            </a:pPr>
+            <a:r>
+              <a:rPr lang="en-US" sz="1800" dirty="0">
+                <a:solidFill>
+                  <a:srgbClr val="93A4B8"/>
+                </a:solidFill>
+                <a:latin typeface="IBM Plex Sans" pitchFamily="34" charset="0"/>
+                <a:ea typeface="IBM Plex Sans" pitchFamily="34" charset="-122"/>
+                <a:cs typeface="IBM Plex Sans" pitchFamily="34" charset="-120"/>
+              </a:rPr>
+              <a:t>Idea Engineering — A New Class of AI App (and What Building One with AI Taught Me)</a:t>
+            </a:r>
+            <a:endParaRPr lang="en-US" sz="1800" dirty="0"/>
+          </a:p>
+        </p:txBody>
+      </p:sp>
+      <p:sp>
+        <p:nvSpPr>
+          <p:cNvPr id="5" name="Shape 3"/>
+          <p:cNvSpPr/>
+          <p:nvPr/>
+        </p:nvSpPr>
+        <p:spPr>
+          <a:xfrm>
+            <a:off x="5410048" y="4709160"/>
+            <a:ext cx="365760" cy="365760"/>
+          </a:xfrm>
+          <a:prstGeom prst="roundRect">
+            <a:avLst>
+              <a:gd name="adj" fmla="val 22000"/>
+            </a:avLst>
+          </a:prstGeom>
+          <a:solidFill>
+            <a:srgbClr val="2563EB"/>
+          </a:solidFill>
+          <a:ln/>
+        </p:spPr>
+      </p:sp>
+      <p:sp>
+        <p:nvSpPr>
+          <p:cNvPr id="6" name="Shape 4"/>
+          <p:cNvSpPr/>
+          <p:nvPr/>
+        </p:nvSpPr>
+        <p:spPr>
+          <a:xfrm>
+            <a:off x="5483200" y="4913986"/>
+            <a:ext cx="43891" cy="73152"/>
+          </a:xfrm>
+          <a:prstGeom prst="roundRect">
+            <a:avLst>
+              <a:gd name="adj" fmla="val 50000"/>
+            </a:avLst>
+          </a:prstGeom>
+          <a:solidFill>
+            <a:srgbClr val="FFFFFF"/>
+          </a:solidFill>
+          <a:ln/>
+        </p:spPr>
+      </p:sp>
+      <p:sp>
+        <p:nvSpPr>
+          <p:cNvPr id="7" name="Shape 5"/>
+          <p:cNvSpPr/>
+          <p:nvPr/>
+        </p:nvSpPr>
+        <p:spPr>
+          <a:xfrm>
+            <a:off x="5549036" y="4862779"/>
+            <a:ext cx="43891" cy="124358"/>
+          </a:xfrm>
+          <a:prstGeom prst="roundRect">
+            <a:avLst>
+              <a:gd name="adj" fmla="val 50000"/>
+            </a:avLst>
+          </a:prstGeom>
+          <a:solidFill>
+            <a:srgbClr val="FFFFFF"/>
+          </a:solidFill>
+          <a:ln/>
+        </p:spPr>
+      </p:sp>
+      <p:sp>
+        <p:nvSpPr>
+          <p:cNvPr id="8" name="Shape 6"/>
+          <p:cNvSpPr/>
+          <p:nvPr/>
+        </p:nvSpPr>
+        <p:spPr>
+          <a:xfrm>
+            <a:off x="5614873" y="4811573"/>
+            <a:ext cx="43891" cy="175565"/>
+          </a:xfrm>
+          <a:prstGeom prst="roundRect">
+            <a:avLst>
+              <a:gd name="adj" fmla="val 50000"/>
+            </a:avLst>
+          </a:prstGeom>
+          <a:solidFill>
+            <a:srgbClr val="FFFFFF"/>
+          </a:solidFill>
+          <a:ln/>
+        </p:spPr>
+      </p:sp>
+      <p:sp>
+        <p:nvSpPr>
+          <p:cNvPr id="9" name="Shape 7"/>
+          <p:cNvSpPr/>
+          <p:nvPr/>
+        </p:nvSpPr>
+        <p:spPr>
+          <a:xfrm>
+            <a:off x="5680710" y="4760366"/>
+            <a:ext cx="43891" cy="226771"/>
+          </a:xfrm>
+          <a:prstGeom prst="roundRect">
+            <a:avLst>
+              <a:gd name="adj" fmla="val 50000"/>
+            </a:avLst>
+          </a:prstGeom>
+          <a:solidFill>
+            <a:srgbClr val="FFFFFF"/>
+          </a:solidFill>
+          <a:ln/>
+        </p:spPr>
+      </p:sp>
+      <p:sp>
+        <p:nvSpPr>
+          <p:cNvPr id="10" name="Text 8"/>
+          <p:cNvSpPr/>
+          <p:nvPr/>
+        </p:nvSpPr>
+        <p:spPr>
+          <a:xfrm>
+            <a:off x="5821528" y="4690872"/>
+            <a:ext cx="2743200" cy="402336"/>
+          </a:xfrm>
+          <a:prstGeom prst="rect">
+            <a:avLst/>
+          </a:prstGeom>
+          <a:noFill/>
+          <a:ln/>
+        </p:spPr>
+        <p:txBody>
+          <a:bodyPr wrap="square" rtlCol="0" anchor="ctr"/>
+          <a:lstStyle/>
+          <a:p>
+            <a:pPr algn="l" indent="0" marL="0">
+              <a:buNone/>
+            </a:pPr>
+            <a:r>
+              <a:rPr lang="en-US" sz="1400" b="1" dirty="0">
+                <a:solidFill>
+                  <a:srgbClr val="93A4B8"/>
+                </a:solidFill>
+                <a:latin typeface="IBM Plex Sans" pitchFamily="34" charset="0"/>
+                <a:ea typeface="IBM Plex Sans" pitchFamily="34" charset="-122"/>
+                <a:cs typeface="IBM Plex Sans" pitchFamily="34" charset="-120"/>
+              </a:rPr>
+              <a:t>Made with IdeaM</a:t>
+            </a:r>
+            <a:endParaRPr lang="en-US" sz="1400" dirty="0"/>
           </a:p>
         </p:txBody>
       </p:sp>
@@ -4359,7 +12602,7 @@
                 <a:ea typeface="IBM Plex Sans" pitchFamily="34" charset="-122"/>
                 <a:cs typeface="IBM Plex Sans" pitchFamily="34" charset="-120"/>
               </a:rPr>
-              <a:t>3 / 11</a:t>
+              <a:t>3 / 26</a:t>
             </a:r>
             <a:endParaRPr lang="en-US" sz="1100" dirty="0"/>
           </a:p>
@@ -4398,7 +12641,7 @@
                 <a:ea typeface="IBM Plex Sans" pitchFamily="34" charset="-122"/>
                 <a:cs typeface="IBM Plex Sans" pitchFamily="34" charset="-120"/>
               </a:rPr>
-              <a:t>2. A New Category — Idea Engineering</a:t>
+              <a:t>A New Category: Idea Engineering</a:t>
             </a:r>
             <a:endParaRPr lang="en-US" sz="2600" dirty="0"/>
           </a:p>
@@ -4461,8 +12704,11 @@
                 <a:ea typeface="IBM Plex Sans" pitchFamily="34" charset="-122"/>
                 <a:cs typeface="IBM Plex Sans" pitchFamily="34" charset="-120"/>
               </a:rPr>
-              <a:t>The distinction that matters</a:t>
-            </a:r>
+              <a:t>Most AI apps do one narrow thing.</a:t>
+            </a:r>
+            <a:endParaRPr lang="en-US" sz="1800" dirty="0"/>
+          </a:p>
+          <a:p>
             <a:pPr algn="l" marL="228600" indent="-228600">
               <a:spcAft>
                 <a:spcPts val="1000"/>
@@ -4479,7 +12725,91 @@
                 <a:ea typeface="IBM Plex Sans" pitchFamily="34" charset="-122"/>
                 <a:cs typeface="IBM Plex Sans" pitchFamily="34" charset="-120"/>
               </a:rPr>
-              <a:t>Why &amp;ldquo;a new class&amp;rdquo; is the right frame</a:t>
+              <a:t>Chatbots answer questions.</a:t>
+            </a:r>
+            <a:endParaRPr lang="en-US" sz="1800" dirty="0"/>
+          </a:p>
+          <a:p>
+            <a:pPr algn="l" marL="228600" indent="-228600">
+              <a:spcAft>
+                <a:spcPts val="1000"/>
+              </a:spcAft>
+              <a:buSzPct val="100000"/>
+              <a:buChar char="•"/>
+            </a:pPr>
+            <a:r>
+              <a:rPr lang="en-US" sz="1800" dirty="0">
+                <a:solidFill>
+                  <a:srgbClr val="F5F8FF"/>
+                </a:solidFill>
+                <a:latin typeface="IBM Plex Sans" pitchFamily="34" charset="0"/>
+                <a:ea typeface="IBM Plex Sans" pitchFamily="34" charset="-122"/>
+                <a:cs typeface="IBM Plex Sans" pitchFamily="34" charset="-120"/>
+              </a:rPr>
+              <a:t>Copilots autocomplete code.</a:t>
+            </a:r>
+            <a:endParaRPr lang="en-US" sz="1800" dirty="0"/>
+          </a:p>
+          <a:p>
+            <a:pPr algn="l" marL="228600" indent="-228600">
+              <a:spcAft>
+                <a:spcPts val="1000"/>
+              </a:spcAft>
+              <a:buSzPct val="100000"/>
+              <a:buChar char="•"/>
+            </a:pPr>
+            <a:r>
+              <a:rPr lang="en-US" sz="1800" dirty="0">
+                <a:solidFill>
+                  <a:srgbClr val="F5F8FF"/>
+                </a:solidFill>
+                <a:latin typeface="IBM Plex Sans" pitchFamily="34" charset="0"/>
+                <a:ea typeface="IBM Plex Sans" pitchFamily="34" charset="-122"/>
+                <a:cs typeface="IBM Plex Sans" pitchFamily="34" charset="-120"/>
+              </a:rPr>
+              <a:t>Useful, but narrow.</a:t>
+            </a:r>
+            <a:endParaRPr lang="en-US" sz="1800" dirty="0"/>
+          </a:p>
+          <a:p>
+            <a:pPr algn="l" marL="228600" indent="-228600">
+              <a:spcAft>
+                <a:spcPts val="1000"/>
+              </a:spcAft>
+              <a:buSzPct val="100000"/>
+              <a:buChar char="•"/>
+            </a:pPr>
+            <a:r>
+              <a:rPr lang="en-US" sz="1800" dirty="0">
+                <a:solidFill>
+                  <a:srgbClr val="F5F8FF"/>
+                </a:solidFill>
+                <a:latin typeface="IBM Plex Sans" pitchFamily="34" charset="0"/>
+                <a:ea typeface="IBM Plex Sans" pitchFamily="34" charset="-122"/>
+                <a:cs typeface="IBM Plex Sans" pitchFamily="34" charset="-120"/>
+              </a:rPr>
+              <a:t>A new class of software does something bigger: it engineers ideas.</a:t>
+            </a:r>
+            <a:endParaRPr lang="en-US" sz="1800" dirty="0"/>
+          </a:p>
+          <a:p>
+            <a:pPr algn="l" marL="228600" indent="-228600">
+              <a:spcAft>
+                <a:spcPts val="1000"/>
+              </a:spcAft>
+              <a:buSzPct val="100000"/>
+              <a:buChar char="•"/>
+            </a:pPr>
+            <a:r>
+              <a:rPr lang="en-US" sz="1800" dirty="0">
+                <a:solidFill>
+                  <a:srgbClr val="F5F8FF"/>
+                </a:solidFill>
+                <a:latin typeface="IBM Plex Sans" pitchFamily="34" charset="0"/>
+                <a:ea typeface="IBM Plex Sans" pitchFamily="34" charset="-122"/>
+                <a:cs typeface="IBM Plex Sans" pitchFamily="34" charset="-120"/>
+              </a:rPr>
+              <a:t>It takes a raw thought, develops it into a real, structured idea, produces finished work from it, and publishes that work.</a:t>
             </a:r>
             <a:endParaRPr lang="en-US" sz="1800" dirty="0"/>
           </a:p>
@@ -4719,7 +13049,7 @@
                 <a:ea typeface="IBM Plex Sans" pitchFamily="34" charset="-122"/>
                 <a:cs typeface="IBM Plex Sans" pitchFamily="34" charset="-120"/>
               </a:rPr>
-              <a:t>4 / 11</a:t>
+              <a:t>4 / 26</a:t>
             </a:r>
             <a:endParaRPr lang="en-US" sz="1100" dirty="0"/>
           </a:p>
@@ -4758,7 +13088,7 @@
                 <a:ea typeface="IBM Plex Sans" pitchFamily="34" charset="-122"/>
                 <a:cs typeface="IBM Plex Sans" pitchFamily="34" charset="-120"/>
               </a:rPr>
-              <a:t>3. What Idea Engineering Looks Like — The Tool (IdeaM)</a:t>
+              <a:t>The distinction that matters</a:t>
             </a:r>
             <a:endParaRPr lang="en-US" sz="2600" dirty="0"/>
           </a:p>
@@ -4821,8 +13151,11 @@
                 <a:ea typeface="IBM Plex Sans" pitchFamily="34" charset="-122"/>
                 <a:cs typeface="IBM Plex Sans" pitchFamily="34" charset="-120"/>
               </a:rPr>
-              <a:t>The full arc — source to published work</a:t>
-            </a:r>
+              <a:t>Chatbot: you ask, it answers, the value evaporates when you close the tab.</a:t>
+            </a:r>
+            <a:endParaRPr lang="en-US" sz="1800" dirty="0"/>
+          </a:p>
+          <a:p>
             <a:pPr algn="l" marL="228600" indent="-228600">
               <a:spcAft>
                 <a:spcPts val="1000"/>
@@ -4839,8 +13172,11 @@
                 <a:ea typeface="IBM Plex Sans" pitchFamily="34" charset="-122"/>
                 <a:cs typeface="IBM Plex Sans" pitchFamily="34" charset="-120"/>
               </a:rPr>
-              <a:t>Privacy-first, on-device, bring-your-own-key</a:t>
-            </a:r>
+              <a:t>Copilot: it finishes your line of code.</a:t>
+            </a:r>
+            <a:endParaRPr lang="en-US" sz="1800" dirty="0"/>
+          </a:p>
+          <a:p>
             <a:pPr algn="l" marL="228600" indent="-228600">
               <a:spcAft>
                 <a:spcPts val="1000"/>
@@ -4857,7 +13193,28 @@
                 <a:ea typeface="IBM Plex Sans" pitchFamily="34" charset="-122"/>
                 <a:cs typeface="IBM Plex Sans" pitchFamily="34" charset="-120"/>
               </a:rPr>
-              <a:t>Why universities care</a:t>
+              <a:t>Idea Engineering: it carries a single thought all the way from spark to published work, and everything it makes is yours and stays connected.</a:t>
+            </a:r>
+            <a:endParaRPr lang="en-US" sz="1800" dirty="0"/>
+          </a:p>
+          <a:p>
+            <a:pPr algn="l" marL="228600" indent="-228600">
+              <a:spcAft>
+                <a:spcPts val="1000"/>
+              </a:spcAft>
+              <a:buSzPct val="100000"/>
+              <a:buChar char="•"/>
+            </a:pPr>
+            <a:r>
+              <a:rPr lang="en-US" sz="1800" dirty="0">
+                <a:solidFill>
+                  <a:srgbClr val="F5F8FF"/>
+                </a:solidFill>
+                <a:latin typeface="IBM Plex Sans" pitchFamily="34" charset="0"/>
+                <a:ea typeface="IBM Plex Sans" pitchFamily="34" charset="-122"/>
+                <a:cs typeface="IBM Plex Sans" pitchFamily="34" charset="-120"/>
+              </a:rPr>
+              <a:t>The unit of value isn't a message — it's a finished idea.</a:t>
             </a:r>
             <a:endParaRPr lang="en-US" sz="1800" dirty="0"/>
           </a:p>
@@ -5097,7 +13454,7 @@
                 <a:ea typeface="IBM Plex Sans" pitchFamily="34" charset="-122"/>
                 <a:cs typeface="IBM Plex Sans" pitchFamily="34" charset="-120"/>
               </a:rPr>
-              <a:t>5 / 11</a:t>
+              <a:t>5 / 26</a:t>
             </a:r>
             <a:endParaRPr lang="en-US" sz="1100" dirty="0"/>
           </a:p>
@@ -5136,7 +13493,7 @@
                 <a:ea typeface="IBM Plex Sans" pitchFamily="34" charset="-122"/>
                 <a:cs typeface="IBM Plex Sans" pitchFamily="34" charset="-120"/>
               </a:rPr>
-              <a:t>1. The Hook — The AI Paradox</a:t>
+              <a:t>Why “a new class” is the right frame</a:t>
             </a:r>
             <a:endParaRPr lang="en-US" sz="2600" dirty="0"/>
           </a:p>
@@ -5171,7 +13528,7 @@
         <p:spPr>
           <a:xfrm>
             <a:off x="640080" y="1737360"/>
-            <a:ext cx="5120640" cy="4206240"/>
+            <a:ext cx="10911535" cy="4206240"/>
           </a:xfrm>
           <a:prstGeom prst="rect">
             <a:avLst/>
@@ -5199,8 +13556,11 @@
                 <a:ea typeface="IBM Plex Sans" pitchFamily="34" charset="-122"/>
                 <a:cs typeface="IBM Plex Sans" pitchFamily="34" charset="-120"/>
               </a:rPr>
-              <a:t>Open with the contradiction everyone in the room feels but hasn't named.</a:t>
-            </a:r>
+              <a:t>New categories of software don't get announced; they get recognized in hindsight (the spreadsheet, the web browser, the search engine).</a:t>
+            </a:r>
+            <a:endParaRPr lang="en-US" sz="1800" dirty="0"/>
+          </a:p>
+          <a:p>
             <a:pPr algn="l" marL="228600" indent="-228600">
               <a:spcAft>
                 <a:spcPts val="1000"/>
@@ -5217,8 +13577,11 @@
                 <a:ea typeface="IBM Plex Sans" pitchFamily="34" charset="-122"/>
                 <a:cs typeface="IBM Plex Sans" pitchFamily="34" charset="-120"/>
               </a:rPr>
-              <a:t>In the 2025 Stack Overflow Developer Survey, roughly 80% of developers now use AI in their work — yet only…</a:t>
-            </a:r>
+              <a:t>Naming the category now — Idea Engineering — is the intellectually honest and the strategically useful move.</a:t>
+            </a:r>
+            <a:endParaRPr lang="en-US" sz="1800" dirty="0"/>
+          </a:p>
+          <a:p>
             <a:pPr algn="l" marL="228600" indent="-228600">
               <a:spcAft>
                 <a:spcPts val="1000"/>
@@ -5235,64 +13598,12 @@
                 <a:ea typeface="IBM Plex Sans" pitchFamily="34" charset="-122"/>
                 <a:cs typeface="IBM Plex Sans" pitchFamily="34" charset="-120"/>
               </a:rPr>
-              <a:t>So: everyone uses it; almost nobody trusts it.</a:t>
-            </a:r>
-            <a:pPr algn="l" marL="228600" indent="-228600">
-              <a:spcAft>
-                <a:spcPts val="1000"/>
-              </a:spcAft>
-              <a:buSzPct val="100000"/>
-              <a:buChar char="•"/>
-            </a:pPr>
-            <a:r>
-              <a:rPr lang="en-US" sz="1800" dirty="0">
-                <a:solidFill>
-                  <a:srgbClr val="F5F8FF"/>
-                </a:solidFill>
-                <a:latin typeface="IBM Plex Sans" pitchFamily="34" charset="0"/>
-                <a:ea typeface="IBM Plex Sans" pitchFamily="34" charset="-122"/>
-                <a:cs typeface="IBM Plex Sans" pitchFamily="34" charset="-120"/>
-              </a:rPr>
-              <a:t>That gap is the whole talk.</a:t>
-            </a:r>
-            <a:pPr algn="l" marL="228600" indent="-228600">
-              <a:spcAft>
-                <a:spcPts val="1000"/>
-              </a:spcAft>
-              <a:buSzPct val="100000"/>
-              <a:buChar char="•"/>
-            </a:pPr>
-            <a:r>
-              <a:rPr lang="en-US" sz="1800" dirty="0">
-                <a:solidFill>
-                  <a:srgbClr val="F5F8FF"/>
-                </a:solidFill>
-                <a:latin typeface="IBM Plex Sans" pitchFamily="34" charset="0"/>
-                <a:ea typeface="IBM Plex Sans" pitchFamily="34" charset="-122"/>
-                <a:cs typeface="IBM Plex Sans" pitchFamily="34" charset="-120"/>
-              </a:rPr>
-              <a:t>Why do we lean on a tool we don't trust — and what would it take to close that gap?</a:t>
+              <a:t>IdeaM is the first instance, not the whole category.</a:t>
             </a:r>
             <a:endParaRPr lang="en-US" sz="1800" dirty="0"/>
           </a:p>
         </p:txBody>
       </p:sp>
-      <p:graphicFrame>
-        <p:nvGraphicFramePr>
-          <p:cNvPr id="13" name="Chart 0" descr=""/>
-          <p:cNvGraphicFramePr/>
-          <p:nvPr/>
-        </p:nvGraphicFramePr>
-        <p:xfrm>
-          <a:off x="6126480" y="1737360"/>
-          <a:ext cx="5394960" cy="4023360"/>
-        </p:xfrm>
-        <a:graphic xmlns:a="http://schemas.openxmlformats.org/drawingml/2006/main">
-          <a:graphicData uri="http://schemas.openxmlformats.org/drawingml/2006/chart">
-            <c:chart xmlns:c="http://schemas.openxmlformats.org/drawingml/2006/chart" r:id="rId1"/>
-          </a:graphicData>
-        </a:graphic>
-      </p:graphicFrame>
     </p:spTree>
   </p:cSld>
   <p:clrMapOvr>
@@ -5527,7 +13838,7 @@
                 <a:ea typeface="IBM Plex Sans" pitchFamily="34" charset="-122"/>
                 <a:cs typeface="IBM Plex Sans" pitchFamily="34" charset="-120"/>
               </a:rPr>
-              <a:t>6 / 11</a:t>
+              <a:t>6 / 26</a:t>
             </a:r>
             <a:endParaRPr lang="en-US" sz="1100" dirty="0"/>
           </a:p>
@@ -5566,7 +13877,7 @@
                 <a:ea typeface="IBM Plex Sans" pitchFamily="34" charset="-122"/>
                 <a:cs typeface="IBM Plex Sans" pitchFamily="34" charset="-120"/>
               </a:rPr>
-              <a:t>4. The Case Study — Building IdeaM WITH AI</a:t>
+              <a:t>The Tool: What Idea Engineering Looks Like</a:t>
             </a:r>
             <a:endParaRPr lang="en-US" sz="2600" dirty="0"/>
           </a:p>
@@ -5601,7 +13912,7 @@
         <p:spPr>
           <a:xfrm>
             <a:off x="640080" y="1737360"/>
-            <a:ext cx="5120640" cy="4206240"/>
+            <a:ext cx="10911535" cy="4206240"/>
           </a:xfrm>
           <a:prstGeom prst="rect">
             <a:avLst/>
@@ -5629,8 +13940,11 @@
                 <a:ea typeface="IBM Plex Sans" pitchFamily="34" charset="-122"/>
                 <a:cs typeface="IBM Plex Sans" pitchFamily="34" charset="-120"/>
               </a:rPr>
-              <a:t>The honest audit</a:t>
-            </a:r>
+              <a:t>Walk the audience through the arc concretely, using IdeaM.</a:t>
+            </a:r>
+            <a:endParaRPr lang="en-US" sz="1800" dirty="0"/>
+          </a:p>
+          <a:p>
             <a:pPr algn="l" marL="228600" indent="-228600">
               <a:spcAft>
                 <a:spcPts val="1000"/>
@@ -5647,28 +13961,96 @@
                 <a:ea typeface="IBM Plex Sans" pitchFamily="34" charset="-122"/>
                 <a:cs typeface="IBM Plex Sans" pitchFamily="34" charset="-120"/>
               </a:rPr>
-              <a:t>The frontier — assisted vs. driven</a:t>
+              <a:t>Bring in any source — video, PDF, web page, audio, email.</a:t>
             </a:r>
             <a:endParaRPr lang="en-US" sz="1800" dirty="0"/>
           </a:p>
-        </p:txBody>
-      </p:sp>
-      <p:graphicFrame>
-        <p:nvGraphicFramePr>
-          <p:cNvPr id="13" name="Chart 0" descr=""/>
-          <p:cNvGraphicFramePr/>
-          <p:nvPr/>
-        </p:nvGraphicFramePr>
-        <p:xfrm>
-          <a:off x="6126480" y="1737360"/>
-          <a:ext cx="5394960" cy="4023360"/>
-        </p:xfrm>
-        <a:graphic xmlns:a="http://schemas.openxmlformats.org/drawingml/2006/main">
-          <a:graphicData uri="http://schemas.openxmlformats.org/drawingml/2006/chart">
-            <c:chart xmlns:c="http://schemas.openxmlformats.org/drawingml/2006/chart" r:id="rId1"/>
-          </a:graphicData>
-        </a:graphic>
-      </p:graphicFrame>
+          <a:p>
+            <a:pPr algn="l" marL="228600" indent="-228600">
+              <a:spcAft>
+                <a:spcPts val="1000"/>
+              </a:spcAft>
+              <a:buSzPct val="100000"/>
+              <a:buChar char="•"/>
+            </a:pPr>
+            <a:r>
+              <a:rPr lang="en-US" sz="1800" dirty="0">
+                <a:solidFill>
+                  <a:srgbClr val="F5F8FF"/>
+                </a:solidFill>
+                <a:latin typeface="IBM Plex Sans" pitchFamily="34" charset="0"/>
+                <a:ea typeface="IBM Plex Sans" pitchFamily="34" charset="-122"/>
+                <a:cs typeface="IBM Plex Sans" pitchFamily="34" charset="-120"/>
+              </a:rPr>
+              <a:t>Research &amp; synthesize across those sources.</a:t>
+            </a:r>
+            <a:endParaRPr lang="en-US" sz="1800" dirty="0"/>
+          </a:p>
+          <a:p>
+            <a:pPr algn="l" marL="228600" indent="-228600">
+              <a:spcAft>
+                <a:spcPts val="1000"/>
+              </a:spcAft>
+              <a:buSzPct val="100000"/>
+              <a:buChar char="•"/>
+            </a:pPr>
+            <a:r>
+              <a:rPr lang="en-US" sz="1800" dirty="0">
+                <a:solidFill>
+                  <a:srgbClr val="F5F8FF"/>
+                </a:solidFill>
+                <a:latin typeface="IBM Plex Sans" pitchFamily="34" charset="0"/>
+                <a:ea typeface="IBM Plex Sans" pitchFamily="34" charset="-122"/>
+                <a:cs typeface="IBM Plex Sans" pitchFamily="34" charset="-120"/>
+              </a:rPr>
+              <a:t>Develop the idea — this is the engineering step, where a rough thought becomes a structured, defensible whole.</a:t>
+            </a:r>
+            <a:endParaRPr lang="en-US" sz="1800" dirty="0"/>
+          </a:p>
+          <a:p>
+            <a:pPr algn="l" marL="228600" indent="-228600">
+              <a:spcAft>
+                <a:spcPts val="1000"/>
+              </a:spcAft>
+              <a:buSzPct val="100000"/>
+              <a:buChar char="•"/>
+            </a:pPr>
+            <a:r>
+              <a:rPr lang="en-US" sz="1800" dirty="0">
+                <a:solidFill>
+                  <a:srgbClr val="F5F8FF"/>
+                </a:solidFill>
+                <a:latin typeface="IBM Plex Sans" pitchFamily="34" charset="0"/>
+                <a:ea typeface="IBM Plex Sans" pitchFamily="34" charset="-122"/>
+                <a:cs typeface="IBM Plex Sans" pitchFamily="34" charset="-120"/>
+              </a:rPr>
+              <a:t>Produce — writing, a podcast, a video.</a:t>
+            </a:r>
+            <a:endParaRPr lang="en-US" sz="1800" dirty="0"/>
+          </a:p>
+          <a:p>
+            <a:pPr algn="l" marL="228600" indent="-228600">
+              <a:spcAft>
+                <a:spcPts val="1000"/>
+              </a:spcAft>
+              <a:buSzPct val="100000"/>
+              <a:buChar char="•"/>
+            </a:pPr>
+            <a:r>
+              <a:rPr lang="en-US" sz="1800" dirty="0">
+                <a:solidFill>
+                  <a:srgbClr val="F5F8FF"/>
+                </a:solidFill>
+                <a:latin typeface="IBM Plex Sans" pitchFamily="34" charset="0"/>
+                <a:ea typeface="IBM Plex Sans" pitchFamily="34" charset="-122"/>
+                <a:cs typeface="IBM Plex Sans" pitchFamily="34" charset="-120"/>
+              </a:rPr>
+              <a:t>Publish everywhere in your own voice.</a:t>
+            </a:r>
+            <a:endParaRPr lang="en-US" sz="1800" dirty="0"/>
+          </a:p>
+        </p:txBody>
+      </p:sp>
     </p:spTree>
   </p:cSld>
   <p:clrMapOvr>
@@ -5903,7 +14285,7 @@
                 <a:ea typeface="IBM Plex Sans" pitchFamily="34" charset="-122"/>
                 <a:cs typeface="IBM Plex Sans" pitchFamily="34" charset="-120"/>
               </a:rPr>
-              <a:t>7 / 11</a:t>
+              <a:t>7 / 26</a:t>
             </a:r>
             <a:endParaRPr lang="en-US" sz="1100" dirty="0"/>
           </a:p>
@@ -5942,7 +14324,7 @@
                 <a:ea typeface="IBM Plex Sans" pitchFamily="34" charset="-122"/>
                 <a:cs typeface="IBM Plex Sans" pitchFamily="34" charset="-120"/>
               </a:rPr>
-              <a:t>5. Why It Works — The Discipline That Closes the Trust Gap</a:t>
+              <a:t>The full arc — source to published work</a:t>
             </a:r>
             <a:endParaRPr lang="en-US" sz="2600" dirty="0"/>
           </a:p>
@@ -6005,8 +14387,11 @@
                 <a:ea typeface="IBM Plex Sans" pitchFamily="34" charset="-122"/>
                 <a:cs typeface="IBM Plex Sans" pitchFamily="34" charset="-120"/>
               </a:rPr>
-              <a:t>The practices</a:t>
-            </a:r>
+              <a:t>Source in (any format)</a:t>
+            </a:r>
+            <a:endParaRPr lang="en-US" sz="1800" dirty="0"/>
+          </a:p>
+          <a:p>
             <a:pPr algn="l" marL="228600" indent="-228600">
               <a:spcAft>
                 <a:spcPts val="1000"/>
@@ -6023,7 +14408,91 @@
                 <a:ea typeface="IBM Plex Sans" pitchFamily="34" charset="-122"/>
                 <a:cs typeface="IBM Plex Sans" pitchFamily="34" charset="-120"/>
               </a:rPr>
-              <a:t>The lesson for students</a:t>
+              <a:t>research &amp; synthesize</a:t>
+            </a:r>
+            <a:endParaRPr lang="en-US" sz="1800" dirty="0"/>
+          </a:p>
+          <a:p>
+            <a:pPr algn="l" marL="228600" indent="-228600">
+              <a:spcAft>
+                <a:spcPts val="1000"/>
+              </a:spcAft>
+              <a:buSzPct val="100000"/>
+              <a:buChar char="•"/>
+            </a:pPr>
+            <a:r>
+              <a:rPr lang="en-US" sz="1800" dirty="0">
+                <a:solidFill>
+                  <a:srgbClr val="F5F8FF"/>
+                </a:solidFill>
+                <a:latin typeface="IBM Plex Sans" pitchFamily="34" charset="0"/>
+                <a:ea typeface="IBM Plex Sans" pitchFamily="34" charset="-122"/>
+                <a:cs typeface="IBM Plex Sans" pitchFamily="34" charset="-120"/>
+              </a:rPr>
+              <a:t>develop (engineer the idea)</a:t>
+            </a:r>
+            <a:endParaRPr lang="en-US" sz="1800" dirty="0"/>
+          </a:p>
+          <a:p>
+            <a:pPr algn="l" marL="228600" indent="-228600">
+              <a:spcAft>
+                <a:spcPts val="1000"/>
+              </a:spcAft>
+              <a:buSzPct val="100000"/>
+              <a:buChar char="•"/>
+            </a:pPr>
+            <a:r>
+              <a:rPr lang="en-US" sz="1800" dirty="0">
+                <a:solidFill>
+                  <a:srgbClr val="F5F8FF"/>
+                </a:solidFill>
+                <a:latin typeface="IBM Plex Sans" pitchFamily="34" charset="0"/>
+                <a:ea typeface="IBM Plex Sans" pitchFamily="34" charset="-122"/>
+                <a:cs typeface="IBM Plex Sans" pitchFamily="34" charset="-120"/>
+              </a:rPr>
+              <a:t>produce (write / podcast / video)</a:t>
+            </a:r>
+            <a:endParaRPr lang="en-US" sz="1800" dirty="0"/>
+          </a:p>
+          <a:p>
+            <a:pPr algn="l" marL="228600" indent="-228600">
+              <a:spcAft>
+                <a:spcPts val="1000"/>
+              </a:spcAft>
+              <a:buSzPct val="100000"/>
+              <a:buChar char="•"/>
+            </a:pPr>
+            <a:r>
+              <a:rPr lang="en-US" sz="1800" dirty="0">
+                <a:solidFill>
+                  <a:srgbClr val="F5F8FF"/>
+                </a:solidFill>
+                <a:latin typeface="IBM Plex Sans" pitchFamily="34" charset="0"/>
+                <a:ea typeface="IBM Plex Sans" pitchFamily="34" charset="-122"/>
+                <a:cs typeface="IBM Plex Sans" pitchFamily="34" charset="-120"/>
+              </a:rPr>
+              <a:t>publish in your own voice</a:t>
+            </a:r>
+            <a:endParaRPr lang="en-US" sz="1800" dirty="0"/>
+          </a:p>
+          <a:p>
+            <a:pPr algn="l" marL="228600" indent="-228600">
+              <a:spcAft>
+                <a:spcPts val="1000"/>
+              </a:spcAft>
+              <a:buSzPct val="100000"/>
+              <a:buChar char="•"/>
+            </a:pPr>
+            <a:r>
+              <a:rPr lang="en-US" sz="1800" dirty="0">
+                <a:solidFill>
+                  <a:srgbClr val="F5F8FF"/>
+                </a:solidFill>
+                <a:latin typeface="IBM Plex Sans" pitchFamily="34" charset="0"/>
+                <a:ea typeface="IBM Plex Sans" pitchFamily="34" charset="-122"/>
+                <a:cs typeface="IBM Plex Sans" pitchFamily="34" charset="-120"/>
+              </a:rPr>
+              <a:t>manage the correspondence.</a:t>
             </a:r>
             <a:endParaRPr lang="en-US" sz="1800" dirty="0"/>
           </a:p>
@@ -6263,7 +14732,7 @@
                 <a:ea typeface="IBM Plex Sans" pitchFamily="34" charset="-122"/>
                 <a:cs typeface="IBM Plex Sans" pitchFamily="34" charset="-120"/>
               </a:rPr>
-              <a:t>8 / 11</a:t>
+              <a:t>8 / 26</a:t>
             </a:r>
             <a:endParaRPr lang="en-US" sz="1100" dirty="0"/>
           </a:p>
@@ -6302,7 +14771,7 @@
                 <a:ea typeface="IBM Plex Sans" pitchFamily="34" charset="-122"/>
                 <a:cs typeface="IBM Plex Sans" pitchFamily="34" charset="-120"/>
               </a:rPr>
-              <a:t>6. Takeaways for the University</a:t>
+              <a:t>What it produces: one idea, many formats</a:t>
             </a:r>
             <a:endParaRPr lang="en-US" sz="2600" dirty="0"/>
           </a:p>
@@ -6365,8 +14834,11 @@
                 <a:ea typeface="IBM Plex Sans" pitchFamily="34" charset="-122"/>
                 <a:cs typeface="IBM Plex Sans" pitchFamily="34" charset="-120"/>
               </a:rPr>
-              <a:t>For students &amp;amp; researchers</a:t>
-            </a:r>
+              <a:t>One outline becomes ~13 finished formats, each in a single click.</a:t>
+            </a:r>
+            <a:endParaRPr lang="en-US" sz="1800" dirty="0"/>
+          </a:p>
+          <a:p>
             <a:pPr algn="l" marL="228600" indent="-228600">
               <a:spcAft>
                 <a:spcPts val="1000"/>
@@ -6383,8 +14855,11 @@
                 <a:ea typeface="IBM Plex Sans" pitchFamily="34" charset="-122"/>
                 <a:cs typeface="IBM Plex Sans" pitchFamily="34" charset="-120"/>
               </a:rPr>
-              <a:t>For CS students</a:t>
-            </a:r>
+              <a:t>Written article, executive summary, email, podcast, video, and this slide deck.</a:t>
+            </a:r>
+            <a:endParaRPr lang="en-US" sz="1800" dirty="0"/>
+          </a:p>
+          <a:p>
             <a:pPr algn="l" marL="228600" indent="-228600">
               <a:spcAft>
                 <a:spcPts val="1000"/>
@@ -6401,7 +14876,70 @@
                 <a:ea typeface="IBM Plex Sans" pitchFamily="34" charset="-122"/>
                 <a:cs typeface="IBM Plex Sans" pitchFamily="34" charset="-120"/>
               </a:rPr>
-              <a:t>For the institution</a:t>
+              <a:t>Plus posts tailored for 7 social platforms: X, LinkedIn, Facebook, Instagram, Threads, Bluesky, Reddit.</a:t>
+            </a:r>
+            <a:endParaRPr lang="en-US" sz="1800" dirty="0"/>
+          </a:p>
+          <a:p>
+            <a:pPr algn="l" marL="228600" indent="-228600">
+              <a:spcAft>
+                <a:spcPts val="1000"/>
+              </a:spcAft>
+              <a:buSzPct val="100000"/>
+              <a:buChar char="•"/>
+            </a:pPr>
+            <a:r>
+              <a:rPr lang="en-US" sz="1800" dirty="0">
+                <a:solidFill>
+                  <a:srgbClr val="F5F8FF"/>
+                </a:solidFill>
+                <a:latin typeface="IBM Plex Sans" pitchFamily="34" charset="0"/>
+                <a:ea typeface="IBM Plex Sans" pitchFamily="34" charset="-122"/>
+                <a:cs typeface="IBM Plex Sans" pitchFamily="34" charset="-120"/>
+              </a:rPr>
+              <a:t>Every output in your own voice, in up to 21 languages.</a:t>
+            </a:r>
+            <a:endParaRPr lang="en-US" sz="1800" dirty="0"/>
+          </a:p>
+          <a:p>
+            <a:pPr algn="l" marL="228600" indent="-228600">
+              <a:spcAft>
+                <a:spcPts val="1000"/>
+              </a:spcAft>
+              <a:buSzPct val="100000"/>
+              <a:buChar char="•"/>
+            </a:pPr>
+            <a:r>
+              <a:rPr lang="en-US" sz="1800" dirty="0">
+                <a:solidFill>
+                  <a:srgbClr val="F5F8FF"/>
+                </a:solidFill>
+                <a:latin typeface="IBM Plex Sans" pitchFamily="34" charset="0"/>
+                <a:ea typeface="IBM Plex Sans" pitchFamily="34" charset="-122"/>
+                <a:cs typeface="IBM Plex Sans" pitchFamily="34" charset="-120"/>
+              </a:rPr>
+              <a:t>Opt-in privacy: on-device AI and bring-your-own-key — your ideas never leave your control.</a:t>
+            </a:r>
+            <a:endParaRPr lang="en-US" sz="1800" dirty="0"/>
+          </a:p>
+          <a:p>
+            <a:pPr algn="l" marL="228600" indent="-228600">
+              <a:spcAft>
+                <a:spcPts val="1000"/>
+              </a:spcAft>
+              <a:buSzPct val="100000"/>
+              <a:buChar char="•"/>
+            </a:pPr>
+            <a:r>
+              <a:rPr lang="en-US" sz="1800" dirty="0">
+                <a:solidFill>
+                  <a:srgbClr val="F5F8FF"/>
+                </a:solidFill>
+                <a:latin typeface="IBM Plex Sans" pitchFamily="34" charset="0"/>
+                <a:ea typeface="IBM Plex Sans" pitchFamily="34" charset="-122"/>
+                <a:cs typeface="IBM Plex Sans" pitchFamily="34" charset="-120"/>
+              </a:rPr>
+              <a:t>An always-on verifier checks every draft for invented facts.</a:t>
             </a:r>
             <a:endParaRPr lang="en-US" sz="1800" dirty="0"/>
           </a:p>
@@ -6641,7 +15179,7 @@
                 <a:ea typeface="IBM Plex Sans" pitchFamily="34" charset="-122"/>
                 <a:cs typeface="IBM Plex Sans" pitchFamily="34" charset="-120"/>
               </a:rPr>
-              <a:t>9 / 11</a:t>
+              <a:t>9 / 26</a:t>
             </a:r>
             <a:endParaRPr lang="en-US" sz="1100" dirty="0"/>
           </a:p>
@@ -6680,7 +15218,7 @@
                 <a:ea typeface="IBM Plex Sans" pitchFamily="34" charset="-122"/>
                 <a:cs typeface="IBM Plex Sans" pitchFamily="34" charset="-120"/>
               </a:rPr>
-              <a:t>7. Live Demo &amp;amp; the Mic-Drop</a:t>
+              <a:t>Privacy-first, on-device, bring-your-own-key</a:t>
             </a:r>
             <a:endParaRPr lang="en-US" sz="2600" dirty="0"/>
           </a:p>
@@ -6743,8 +15281,11 @@
                 <a:ea typeface="IBM Plex Sans" pitchFamily="34" charset="-122"/>
                 <a:cs typeface="IBM Plex Sans" pitchFamily="34" charset="-120"/>
               </a:rPr>
-              <a:t>Show, don't tell.</a:t>
-            </a:r>
+              <a:t>The AI can run on the user's own device, and users bring their own API key.</a:t>
+            </a:r>
+            <a:endParaRPr lang="en-US" sz="1800" dirty="0"/>
+          </a:p>
+          <a:p>
             <a:pPr algn="l" marL="228600" indent="-228600">
               <a:spcAft>
                 <a:spcPts val="1000"/>
@@ -6761,61 +15302,7 @@
                 <a:ea typeface="IBM Plex Sans" pitchFamily="34" charset="-122"/>
                 <a:cs typeface="IBM Plex Sans" pitchFamily="34" charset="-120"/>
               </a:rPr>
-              <a:t>Run IdeaM live — take a source through the arc to a produced, published piece in front of the room.</a:t>
-            </a:r>
-            <a:pPr algn="l" marL="228600" indent="-228600">
-              <a:spcAft>
-                <a:spcPts val="1000"/>
-              </a:spcAft>
-              <a:buSzPct val="100000"/>
-              <a:buChar char="•"/>
-            </a:pPr>
-            <a:r>
-              <a:rPr lang="en-US" sz="1800" dirty="0">
-                <a:solidFill>
-                  <a:srgbClr val="F5F8FF"/>
-                </a:solidFill>
-                <a:latin typeface="IBM Plex Sans" pitchFamily="34" charset="0"/>
-                <a:ea typeface="IBM Plex Sans" pitchFamily="34" charset="-122"/>
-                <a:cs typeface="IBM Plex Sans" pitchFamily="34" charset="-120"/>
-              </a:rPr>
-              <a:t>Then the reveal: this entire seminar was built in IdeaM.</a:t>
-            </a:r>
-            <a:pPr algn="l" marL="228600" indent="-228600">
-              <a:spcAft>
-                <a:spcPts val="1000"/>
-              </a:spcAft>
-              <a:buSzPct val="100000"/>
-              <a:buChar char="•"/>
-            </a:pPr>
-            <a:r>
-              <a:rPr lang="en-US" sz="1800" dirty="0">
-                <a:solidFill>
-                  <a:srgbClr val="F5F8FF"/>
-                </a:solidFill>
-                <a:latin typeface="IBM Plex Sans" pitchFamily="34" charset="0"/>
-                <a:ea typeface="IBM Plex Sans" pitchFamily="34" charset="-122"/>
-                <a:cs typeface="IBM Plex Sans" pitchFamily="34" charset="-120"/>
-              </a:rPr>
-              <a:t>The outline on the screen, the structure, the notes — all of it.</a:t>
-            </a:r>
-            <a:pPr algn="l" marL="228600" indent="-228600">
-              <a:spcAft>
-                <a:spcPts val="1000"/>
-              </a:spcAft>
-              <a:buSzPct val="100000"/>
-              <a:buChar char="•"/>
-            </a:pPr>
-            <a:r>
-              <a:rPr lang="en-US" sz="1800" dirty="0">
-                <a:solidFill>
-                  <a:srgbClr val="F5F8FF"/>
-                </a:solidFill>
-                <a:latin typeface="IBM Plex Sans" pitchFamily="34" charset="0"/>
-                <a:ea typeface="IBM Plex Sans" pitchFamily="34" charset="-122"/>
-                <a:cs typeface="IBM Plex Sans" pitchFamily="34" charset="-120"/>
-              </a:rPr>
-              <a:t>The medium is the message.</a:t>
+              <a:t>This isn't a footnote — for researchers, students, and anyone with sensitive or unpublished work, "your ideas never leave your control" is the…</a:t>
             </a:r>
             <a:endParaRPr lang="en-US" sz="1800" dirty="0"/>
           </a:p>
